--- a/exports/pptx/lessons/middle-module-04-doshas/day-01-bridge.pptx
+++ b/exports/pptx/lessons/middle-module-04-doshas/day-01-bridge.pptx
@@ -17,9 +17,16 @@
     <p:sldId id="265" r:id="rId11"/>
     <p:sldId id="266" r:id="rId12"/>
     <p:sldId id="267" r:id="rId13"/>
+    <p:sldId id="268" r:id="rId14"/>
+    <p:sldId id="269" r:id="rId15"/>
+    <p:sldId id="270" r:id="rId16"/>
+    <p:sldId id="271" r:id="rId17"/>
+    <p:sldId id="272" r:id="rId18"/>
+    <p:sldId id="273" r:id="rId19"/>
+    <p:sldId id="274" r:id="rId20"/>
   </p:sldIdLst>
   <p:notesMasterIdLst>
-    <p:notesMasterId r:id="rId14"/>
+    <p:notesMasterId r:id="rId21"/>
   </p:notesMasterIdLst>
   <p:sldSz cx="9144000" cy="5143500"/>
   <p:notesSz cx="5143500" cy="9144000"/>
@@ -801,6 +808,622 @@
             <a:fld id="{F7021451-1387-4CA6-816F-3879F97B5CBC}" type="slidenum">
               <a:rPr lang="en-US"/>
               <a:t>12</a:t>
+            </a:fld>
+            <a:endParaRPr lang="en-US"/>
+          </a:p>
+        </p:txBody>
+      </p:sp>
+    </p:spTree>
+    <p:extLst>
+      <p:ext uri="{BB962C8B-B14F-4D97-AF65-F5344CB8AC3E}">
+        <p14:creationId xmlns:p14="http://schemas.microsoft.com/office/powerpoint/2010/main" val="1024086991"/>
+      </p:ext>
+    </p:extLst>
+  </p:cSld>
+  <p:clrMapOvr>
+    <a:masterClrMapping/>
+  </p:clrMapOvr>
+</p:notes>
+</file>
+
+<file path=ppt/notesSlides/notesSlide13.xml><?xml version="1.0" encoding="utf-8"?>
+<p:notes xmlns:a="http://schemas.openxmlformats.org/drawingml/2006/main" xmlns:r="http://schemas.openxmlformats.org/officeDocument/2006/relationships" xmlns:p="http://schemas.openxmlformats.org/presentationml/2006/main">
+  <p:cSld>
+    <p:spTree>
+      <p:nvGrpSpPr>
+        <p:cNvPr id="1" name=""/>
+        <p:cNvGrpSpPr/>
+        <p:nvPr/>
+      </p:nvGrpSpPr>
+      <p:grpSpPr>
+        <a:xfrm>
+          <a:off x="0" y="0"/>
+          <a:ext cx="0" cy="0"/>
+          <a:chOff x="0" y="0"/>
+          <a:chExt cx="0" cy="0"/>
+        </a:xfrm>
+      </p:grpSpPr>
+      <p:sp>
+        <p:nvSpPr>
+          <p:cNvPr id="2" name="Slide Image Placeholder 1"/>
+          <p:cNvSpPr>
+            <a:spLocks noGrp="1" noRot="1" noChangeAspect="1"/>
+          </p:cNvSpPr>
+          <p:nvPr>
+            <p:ph type="sldImg"/>
+          </p:nvPr>
+        </p:nvSpPr>
+        <p:spPr/>
+      </p:sp>
+      <p:sp>
+        <p:nvSpPr>
+          <p:cNvPr id="3" name="Notes Placeholder 2"/>
+          <p:cNvSpPr>
+            <a:spLocks noGrp="1"/>
+          </p:cNvSpPr>
+          <p:nvPr>
+            <p:ph type="body" idx="1"/>
+          </p:nvPr>
+        </p:nvSpPr>
+        <p:spPr/>
+        <p:txBody>
+          <a:bodyPr/>
+          <a:lstStyle/>
+          <a:p>
+            <a:r>
+              <a:rPr lang="en-US" dirty="0"/>
+              <a:t/>
+            </a:r>
+            <a:endParaRPr lang="en-US" dirty="0"/>
+          </a:p>
+        </p:txBody>
+      </p:sp>
+      <p:sp>
+        <p:nvSpPr>
+          <p:cNvPr id="4" name="Slide Number Placeholder 3"/>
+          <p:cNvSpPr>
+            <a:spLocks noGrp="1"/>
+          </p:cNvSpPr>
+          <p:nvPr>
+            <p:ph type="sldNum" sz="quarter" idx="10"/>
+          </p:nvPr>
+        </p:nvSpPr>
+        <p:spPr/>
+        <p:txBody>
+          <a:bodyPr/>
+          <a:lstStyle/>
+          <a:p>
+            <a:fld id="{F7021451-1387-4CA6-816F-3879F97B5CBC}" type="slidenum">
+              <a:rPr lang="en-US"/>
+              <a:t>13</a:t>
+            </a:fld>
+            <a:endParaRPr lang="en-US"/>
+          </a:p>
+        </p:txBody>
+      </p:sp>
+    </p:spTree>
+    <p:extLst>
+      <p:ext uri="{BB962C8B-B14F-4D97-AF65-F5344CB8AC3E}">
+        <p14:creationId xmlns:p14="http://schemas.microsoft.com/office/powerpoint/2010/main" val="1024086991"/>
+      </p:ext>
+    </p:extLst>
+  </p:cSld>
+  <p:clrMapOvr>
+    <a:masterClrMapping/>
+  </p:clrMapOvr>
+</p:notes>
+</file>
+
+<file path=ppt/notesSlides/notesSlide14.xml><?xml version="1.0" encoding="utf-8"?>
+<p:notes xmlns:a="http://schemas.openxmlformats.org/drawingml/2006/main" xmlns:r="http://schemas.openxmlformats.org/officeDocument/2006/relationships" xmlns:p="http://schemas.openxmlformats.org/presentationml/2006/main">
+  <p:cSld>
+    <p:spTree>
+      <p:nvGrpSpPr>
+        <p:cNvPr id="1" name=""/>
+        <p:cNvGrpSpPr/>
+        <p:nvPr/>
+      </p:nvGrpSpPr>
+      <p:grpSpPr>
+        <a:xfrm>
+          <a:off x="0" y="0"/>
+          <a:ext cx="0" cy="0"/>
+          <a:chOff x="0" y="0"/>
+          <a:chExt cx="0" cy="0"/>
+        </a:xfrm>
+      </p:grpSpPr>
+      <p:sp>
+        <p:nvSpPr>
+          <p:cNvPr id="2" name="Slide Image Placeholder 1"/>
+          <p:cNvSpPr>
+            <a:spLocks noGrp="1" noRot="1" noChangeAspect="1"/>
+          </p:cNvSpPr>
+          <p:nvPr>
+            <p:ph type="sldImg"/>
+          </p:nvPr>
+        </p:nvSpPr>
+        <p:spPr/>
+      </p:sp>
+      <p:sp>
+        <p:nvSpPr>
+          <p:cNvPr id="3" name="Notes Placeholder 2"/>
+          <p:cNvSpPr>
+            <a:spLocks noGrp="1"/>
+          </p:cNvSpPr>
+          <p:nvPr>
+            <p:ph type="body" idx="1"/>
+          </p:nvPr>
+        </p:nvSpPr>
+        <p:spPr/>
+        <p:txBody>
+          <a:bodyPr/>
+          <a:lstStyle/>
+          <a:p>
+            <a:r>
+              <a:rPr lang="en-US" dirty="0"/>
+              <a:t/>
+            </a:r>
+            <a:endParaRPr lang="en-US" dirty="0"/>
+          </a:p>
+        </p:txBody>
+      </p:sp>
+      <p:sp>
+        <p:nvSpPr>
+          <p:cNvPr id="4" name="Slide Number Placeholder 3"/>
+          <p:cNvSpPr>
+            <a:spLocks noGrp="1"/>
+          </p:cNvSpPr>
+          <p:nvPr>
+            <p:ph type="sldNum" sz="quarter" idx="10"/>
+          </p:nvPr>
+        </p:nvSpPr>
+        <p:spPr/>
+        <p:txBody>
+          <a:bodyPr/>
+          <a:lstStyle/>
+          <a:p>
+            <a:fld id="{F7021451-1387-4CA6-816F-3879F97B5CBC}" type="slidenum">
+              <a:rPr lang="en-US"/>
+              <a:t>14</a:t>
+            </a:fld>
+            <a:endParaRPr lang="en-US"/>
+          </a:p>
+        </p:txBody>
+      </p:sp>
+    </p:spTree>
+    <p:extLst>
+      <p:ext uri="{BB962C8B-B14F-4D97-AF65-F5344CB8AC3E}">
+        <p14:creationId xmlns:p14="http://schemas.microsoft.com/office/powerpoint/2010/main" val="1024086991"/>
+      </p:ext>
+    </p:extLst>
+  </p:cSld>
+  <p:clrMapOvr>
+    <a:masterClrMapping/>
+  </p:clrMapOvr>
+</p:notes>
+</file>
+
+<file path=ppt/notesSlides/notesSlide15.xml><?xml version="1.0" encoding="utf-8"?>
+<p:notes xmlns:a="http://schemas.openxmlformats.org/drawingml/2006/main" xmlns:r="http://schemas.openxmlformats.org/officeDocument/2006/relationships" xmlns:p="http://schemas.openxmlformats.org/presentationml/2006/main">
+  <p:cSld>
+    <p:spTree>
+      <p:nvGrpSpPr>
+        <p:cNvPr id="1" name=""/>
+        <p:cNvGrpSpPr/>
+        <p:nvPr/>
+      </p:nvGrpSpPr>
+      <p:grpSpPr>
+        <a:xfrm>
+          <a:off x="0" y="0"/>
+          <a:ext cx="0" cy="0"/>
+          <a:chOff x="0" y="0"/>
+          <a:chExt cx="0" cy="0"/>
+        </a:xfrm>
+      </p:grpSpPr>
+      <p:sp>
+        <p:nvSpPr>
+          <p:cNvPr id="2" name="Slide Image Placeholder 1"/>
+          <p:cNvSpPr>
+            <a:spLocks noGrp="1" noRot="1" noChangeAspect="1"/>
+          </p:cNvSpPr>
+          <p:nvPr>
+            <p:ph type="sldImg"/>
+          </p:nvPr>
+        </p:nvSpPr>
+        <p:spPr/>
+      </p:sp>
+      <p:sp>
+        <p:nvSpPr>
+          <p:cNvPr id="3" name="Notes Placeholder 2"/>
+          <p:cNvSpPr>
+            <a:spLocks noGrp="1"/>
+          </p:cNvSpPr>
+          <p:nvPr>
+            <p:ph type="body" idx="1"/>
+          </p:nvPr>
+        </p:nvSpPr>
+        <p:spPr/>
+        <p:txBody>
+          <a:bodyPr/>
+          <a:lstStyle/>
+          <a:p>
+            <a:r>
+              <a:rPr lang="en-US" dirty="0"/>
+              <a:t/>
+            </a:r>
+            <a:endParaRPr lang="en-US" dirty="0"/>
+          </a:p>
+        </p:txBody>
+      </p:sp>
+      <p:sp>
+        <p:nvSpPr>
+          <p:cNvPr id="4" name="Slide Number Placeholder 3"/>
+          <p:cNvSpPr>
+            <a:spLocks noGrp="1"/>
+          </p:cNvSpPr>
+          <p:nvPr>
+            <p:ph type="sldNum" sz="quarter" idx="10"/>
+          </p:nvPr>
+        </p:nvSpPr>
+        <p:spPr/>
+        <p:txBody>
+          <a:bodyPr/>
+          <a:lstStyle/>
+          <a:p>
+            <a:fld id="{F7021451-1387-4CA6-816F-3879F97B5CBC}" type="slidenum">
+              <a:rPr lang="en-US"/>
+              <a:t>15</a:t>
+            </a:fld>
+            <a:endParaRPr lang="en-US"/>
+          </a:p>
+        </p:txBody>
+      </p:sp>
+    </p:spTree>
+    <p:extLst>
+      <p:ext uri="{BB962C8B-B14F-4D97-AF65-F5344CB8AC3E}">
+        <p14:creationId xmlns:p14="http://schemas.microsoft.com/office/powerpoint/2010/main" val="1024086991"/>
+      </p:ext>
+    </p:extLst>
+  </p:cSld>
+  <p:clrMapOvr>
+    <a:masterClrMapping/>
+  </p:clrMapOvr>
+</p:notes>
+</file>
+
+<file path=ppt/notesSlides/notesSlide16.xml><?xml version="1.0" encoding="utf-8"?>
+<p:notes xmlns:a="http://schemas.openxmlformats.org/drawingml/2006/main" xmlns:r="http://schemas.openxmlformats.org/officeDocument/2006/relationships" xmlns:p="http://schemas.openxmlformats.org/presentationml/2006/main">
+  <p:cSld>
+    <p:spTree>
+      <p:nvGrpSpPr>
+        <p:cNvPr id="1" name=""/>
+        <p:cNvGrpSpPr/>
+        <p:nvPr/>
+      </p:nvGrpSpPr>
+      <p:grpSpPr>
+        <a:xfrm>
+          <a:off x="0" y="0"/>
+          <a:ext cx="0" cy="0"/>
+          <a:chOff x="0" y="0"/>
+          <a:chExt cx="0" cy="0"/>
+        </a:xfrm>
+      </p:grpSpPr>
+      <p:sp>
+        <p:nvSpPr>
+          <p:cNvPr id="2" name="Slide Image Placeholder 1"/>
+          <p:cNvSpPr>
+            <a:spLocks noGrp="1" noRot="1" noChangeAspect="1"/>
+          </p:cNvSpPr>
+          <p:nvPr>
+            <p:ph type="sldImg"/>
+          </p:nvPr>
+        </p:nvSpPr>
+        <p:spPr/>
+      </p:sp>
+      <p:sp>
+        <p:nvSpPr>
+          <p:cNvPr id="3" name="Notes Placeholder 2"/>
+          <p:cNvSpPr>
+            <a:spLocks noGrp="1"/>
+          </p:cNvSpPr>
+          <p:nvPr>
+            <p:ph type="body" idx="1"/>
+          </p:nvPr>
+        </p:nvSpPr>
+        <p:spPr/>
+        <p:txBody>
+          <a:bodyPr/>
+          <a:lstStyle/>
+          <a:p>
+            <a:r>
+              <a:rPr lang="en-US" dirty="0"/>
+              <a:t/>
+            </a:r>
+            <a:endParaRPr lang="en-US" dirty="0"/>
+          </a:p>
+        </p:txBody>
+      </p:sp>
+      <p:sp>
+        <p:nvSpPr>
+          <p:cNvPr id="4" name="Slide Number Placeholder 3"/>
+          <p:cNvSpPr>
+            <a:spLocks noGrp="1"/>
+          </p:cNvSpPr>
+          <p:nvPr>
+            <p:ph type="sldNum" sz="quarter" idx="10"/>
+          </p:nvPr>
+        </p:nvSpPr>
+        <p:spPr/>
+        <p:txBody>
+          <a:bodyPr/>
+          <a:lstStyle/>
+          <a:p>
+            <a:fld id="{F7021451-1387-4CA6-816F-3879F97B5CBC}" type="slidenum">
+              <a:rPr lang="en-US"/>
+              <a:t>16</a:t>
+            </a:fld>
+            <a:endParaRPr lang="en-US"/>
+          </a:p>
+        </p:txBody>
+      </p:sp>
+    </p:spTree>
+    <p:extLst>
+      <p:ext uri="{BB962C8B-B14F-4D97-AF65-F5344CB8AC3E}">
+        <p14:creationId xmlns:p14="http://schemas.microsoft.com/office/powerpoint/2010/main" val="1024086991"/>
+      </p:ext>
+    </p:extLst>
+  </p:cSld>
+  <p:clrMapOvr>
+    <a:masterClrMapping/>
+  </p:clrMapOvr>
+</p:notes>
+</file>
+
+<file path=ppt/notesSlides/notesSlide17.xml><?xml version="1.0" encoding="utf-8"?>
+<p:notes xmlns:a="http://schemas.openxmlformats.org/drawingml/2006/main" xmlns:r="http://schemas.openxmlformats.org/officeDocument/2006/relationships" xmlns:p="http://schemas.openxmlformats.org/presentationml/2006/main">
+  <p:cSld>
+    <p:spTree>
+      <p:nvGrpSpPr>
+        <p:cNvPr id="1" name=""/>
+        <p:cNvGrpSpPr/>
+        <p:nvPr/>
+      </p:nvGrpSpPr>
+      <p:grpSpPr>
+        <a:xfrm>
+          <a:off x="0" y="0"/>
+          <a:ext cx="0" cy="0"/>
+          <a:chOff x="0" y="0"/>
+          <a:chExt cx="0" cy="0"/>
+        </a:xfrm>
+      </p:grpSpPr>
+      <p:sp>
+        <p:nvSpPr>
+          <p:cNvPr id="2" name="Slide Image Placeholder 1"/>
+          <p:cNvSpPr>
+            <a:spLocks noGrp="1" noRot="1" noChangeAspect="1"/>
+          </p:cNvSpPr>
+          <p:nvPr>
+            <p:ph type="sldImg"/>
+          </p:nvPr>
+        </p:nvSpPr>
+        <p:spPr/>
+      </p:sp>
+      <p:sp>
+        <p:nvSpPr>
+          <p:cNvPr id="3" name="Notes Placeholder 2"/>
+          <p:cNvSpPr>
+            <a:spLocks noGrp="1"/>
+          </p:cNvSpPr>
+          <p:nvPr>
+            <p:ph type="body" idx="1"/>
+          </p:nvPr>
+        </p:nvSpPr>
+        <p:spPr/>
+        <p:txBody>
+          <a:bodyPr/>
+          <a:lstStyle/>
+          <a:p>
+            <a:r>
+              <a:rPr lang="en-US" dirty="0"/>
+              <a:t/>
+            </a:r>
+            <a:endParaRPr lang="en-US" dirty="0"/>
+          </a:p>
+        </p:txBody>
+      </p:sp>
+      <p:sp>
+        <p:nvSpPr>
+          <p:cNvPr id="4" name="Slide Number Placeholder 3"/>
+          <p:cNvSpPr>
+            <a:spLocks noGrp="1"/>
+          </p:cNvSpPr>
+          <p:nvPr>
+            <p:ph type="sldNum" sz="quarter" idx="10"/>
+          </p:nvPr>
+        </p:nvSpPr>
+        <p:spPr/>
+        <p:txBody>
+          <a:bodyPr/>
+          <a:lstStyle/>
+          <a:p>
+            <a:fld id="{F7021451-1387-4CA6-816F-3879F97B5CBC}" type="slidenum">
+              <a:rPr lang="en-US"/>
+              <a:t>17</a:t>
+            </a:fld>
+            <a:endParaRPr lang="en-US"/>
+          </a:p>
+        </p:txBody>
+      </p:sp>
+    </p:spTree>
+    <p:extLst>
+      <p:ext uri="{BB962C8B-B14F-4D97-AF65-F5344CB8AC3E}">
+        <p14:creationId xmlns:p14="http://schemas.microsoft.com/office/powerpoint/2010/main" val="1024086991"/>
+      </p:ext>
+    </p:extLst>
+  </p:cSld>
+  <p:clrMapOvr>
+    <a:masterClrMapping/>
+  </p:clrMapOvr>
+</p:notes>
+</file>
+
+<file path=ppt/notesSlides/notesSlide18.xml><?xml version="1.0" encoding="utf-8"?>
+<p:notes xmlns:a="http://schemas.openxmlformats.org/drawingml/2006/main" xmlns:r="http://schemas.openxmlformats.org/officeDocument/2006/relationships" xmlns:p="http://schemas.openxmlformats.org/presentationml/2006/main">
+  <p:cSld>
+    <p:spTree>
+      <p:nvGrpSpPr>
+        <p:cNvPr id="1" name=""/>
+        <p:cNvGrpSpPr/>
+        <p:nvPr/>
+      </p:nvGrpSpPr>
+      <p:grpSpPr>
+        <a:xfrm>
+          <a:off x="0" y="0"/>
+          <a:ext cx="0" cy="0"/>
+          <a:chOff x="0" y="0"/>
+          <a:chExt cx="0" cy="0"/>
+        </a:xfrm>
+      </p:grpSpPr>
+      <p:sp>
+        <p:nvSpPr>
+          <p:cNvPr id="2" name="Slide Image Placeholder 1"/>
+          <p:cNvSpPr>
+            <a:spLocks noGrp="1" noRot="1" noChangeAspect="1"/>
+          </p:cNvSpPr>
+          <p:nvPr>
+            <p:ph type="sldImg"/>
+          </p:nvPr>
+        </p:nvSpPr>
+        <p:spPr/>
+      </p:sp>
+      <p:sp>
+        <p:nvSpPr>
+          <p:cNvPr id="3" name="Notes Placeholder 2"/>
+          <p:cNvSpPr>
+            <a:spLocks noGrp="1"/>
+          </p:cNvSpPr>
+          <p:nvPr>
+            <p:ph type="body" idx="1"/>
+          </p:nvPr>
+        </p:nvSpPr>
+        <p:spPr/>
+        <p:txBody>
+          <a:bodyPr/>
+          <a:lstStyle/>
+          <a:p>
+            <a:r>
+              <a:rPr lang="en-US" dirty="0"/>
+              <a:t/>
+            </a:r>
+            <a:endParaRPr lang="en-US" dirty="0"/>
+          </a:p>
+        </p:txBody>
+      </p:sp>
+      <p:sp>
+        <p:nvSpPr>
+          <p:cNvPr id="4" name="Slide Number Placeholder 3"/>
+          <p:cNvSpPr>
+            <a:spLocks noGrp="1"/>
+          </p:cNvSpPr>
+          <p:nvPr>
+            <p:ph type="sldNum" sz="quarter" idx="10"/>
+          </p:nvPr>
+        </p:nvSpPr>
+        <p:spPr/>
+        <p:txBody>
+          <a:bodyPr/>
+          <a:lstStyle/>
+          <a:p>
+            <a:fld id="{F7021451-1387-4CA6-816F-3879F97B5CBC}" type="slidenum">
+              <a:rPr lang="en-US"/>
+              <a:t>18</a:t>
+            </a:fld>
+            <a:endParaRPr lang="en-US"/>
+          </a:p>
+        </p:txBody>
+      </p:sp>
+    </p:spTree>
+    <p:extLst>
+      <p:ext uri="{BB962C8B-B14F-4D97-AF65-F5344CB8AC3E}">
+        <p14:creationId xmlns:p14="http://schemas.microsoft.com/office/powerpoint/2010/main" val="1024086991"/>
+      </p:ext>
+    </p:extLst>
+  </p:cSld>
+  <p:clrMapOvr>
+    <a:masterClrMapping/>
+  </p:clrMapOvr>
+</p:notes>
+</file>
+
+<file path=ppt/notesSlides/notesSlide19.xml><?xml version="1.0" encoding="utf-8"?>
+<p:notes xmlns:a="http://schemas.openxmlformats.org/drawingml/2006/main" xmlns:r="http://schemas.openxmlformats.org/officeDocument/2006/relationships" xmlns:p="http://schemas.openxmlformats.org/presentationml/2006/main">
+  <p:cSld>
+    <p:spTree>
+      <p:nvGrpSpPr>
+        <p:cNvPr id="1" name=""/>
+        <p:cNvGrpSpPr/>
+        <p:nvPr/>
+      </p:nvGrpSpPr>
+      <p:grpSpPr>
+        <a:xfrm>
+          <a:off x="0" y="0"/>
+          <a:ext cx="0" cy="0"/>
+          <a:chOff x="0" y="0"/>
+          <a:chExt cx="0" cy="0"/>
+        </a:xfrm>
+      </p:grpSpPr>
+      <p:sp>
+        <p:nvSpPr>
+          <p:cNvPr id="2" name="Slide Image Placeholder 1"/>
+          <p:cNvSpPr>
+            <a:spLocks noGrp="1" noRot="1" noChangeAspect="1"/>
+          </p:cNvSpPr>
+          <p:nvPr>
+            <p:ph type="sldImg"/>
+          </p:nvPr>
+        </p:nvSpPr>
+        <p:spPr/>
+      </p:sp>
+      <p:sp>
+        <p:nvSpPr>
+          <p:cNvPr id="3" name="Notes Placeholder 2"/>
+          <p:cNvSpPr>
+            <a:spLocks noGrp="1"/>
+          </p:cNvSpPr>
+          <p:nvPr>
+            <p:ph type="body" idx="1"/>
+          </p:nvPr>
+        </p:nvSpPr>
+        <p:spPr/>
+        <p:txBody>
+          <a:bodyPr/>
+          <a:lstStyle/>
+          <a:p>
+            <a:r>
+              <a:rPr lang="en-US" dirty="0"/>
+              <a:t/>
+            </a:r>
+            <a:endParaRPr lang="en-US" dirty="0"/>
+          </a:p>
+        </p:txBody>
+      </p:sp>
+      <p:sp>
+        <p:nvSpPr>
+          <p:cNvPr id="4" name="Slide Number Placeholder 3"/>
+          <p:cNvSpPr>
+            <a:spLocks noGrp="1"/>
+          </p:cNvSpPr>
+          <p:nvPr>
+            <p:ph type="sldNum" sz="quarter" idx="10"/>
+          </p:nvPr>
+        </p:nvSpPr>
+        <p:spPr/>
+        <p:txBody>
+          <a:bodyPr/>
+          <a:lstStyle/>
+          <a:p>
+            <a:fld id="{F7021451-1387-4CA6-816F-3879F97B5CBC}" type="slidenum">
+              <a:rPr lang="en-US"/>
+              <a:t>19</a:t>
             </a:fld>
             <a:endParaRPr lang="en-US"/>
           </a:p>
@@ -2100,148 +2723,6 @@
         </p:nvSpPr>
         <p:spPr>
           <a:xfrm>
-            <a:off x="406301" y="1223963"/>
-            <a:ext cx="8498026" cy="274290"/>
-          </a:xfrm>
-          <a:prstGeom prst="rect">
-            <a:avLst/>
-          </a:prstGeom>
-          <a:noFill/>
-          <a:ln/>
-        </p:spPr>
-        <p:txBody>
-          <a:bodyPr wrap="square" lIns="0" tIns="0" rIns="0" bIns="0" rtlCol="0" anchor="t"/>
-          <a:lstStyle/>
-          <a:p>
-            <a:pPr algn="l" indent="0" marL="0">
-              <a:lnSpc>
-                <a:spcPts val="2160"/>
-              </a:lnSpc>
-              <a:spcBef>
-                <a:spcPts val="600"/>
-              </a:spcBef>
-              <a:spcAft>
-                <a:spcPts val="800"/>
-              </a:spcAft>
-              <a:buNone/>
-            </a:pPr>
-            <a:r>
-              <a:rPr lang="en-US" sz="1800" b="1" dirty="0">
-                <a:solidFill>
-                  <a:srgbClr val="FE4447"/>
-                </a:solidFill>
-                <a:latin typeface="Georgia" pitchFamily="34" charset="0"/>
-                <a:ea typeface="Georgia" pitchFamily="34" charset="-122"/>
-                <a:cs typeface="Georgia" pitchFamily="34" charset="-120"/>
-              </a:rPr>
-              <a:t>Learning objective</a:t>
-            </a:r>
-            <a:endParaRPr lang="en-US" sz="1800" dirty="0"/>
-          </a:p>
-        </p:txBody>
-      </p:sp>
-      <p:sp>
-        <p:nvSpPr>
-          <p:cNvPr id="6" name="Text 4"/>
-          <p:cNvSpPr/>
-          <p:nvPr/>
-        </p:nvSpPr>
-        <p:spPr>
-          <a:xfrm>
-            <a:off x="406301" y="1637854"/>
-            <a:ext cx="8498026" cy="426541"/>
-          </a:xfrm>
-          <a:prstGeom prst="rect">
-            <a:avLst/>
-          </a:prstGeom>
-          <a:noFill/>
-          <a:ln/>
-        </p:spPr>
-        <p:txBody>
-          <a:bodyPr wrap="square" lIns="0" tIns="0" rIns="0" bIns="0" rtlCol="0" anchor="t"/>
-          <a:lstStyle/>
-          <a:p>
-            <a:pPr algn="l" indent="0" marL="0">
-              <a:lnSpc>
-                <a:spcPts val="1680"/>
-              </a:lnSpc>
-              <a:spcBef>
-                <a:spcPts val="300"/>
-              </a:spcBef>
-              <a:spcAft>
-                <a:spcPts val="300"/>
-              </a:spcAft>
-              <a:buNone/>
-            </a:pPr>
-            <a:r>
-              <a:rPr lang="en-US" sz="1200" dirty="0">
-                <a:solidFill>
-                  <a:srgbClr val="1C2833"/>
-                </a:solidFill>
-                <a:latin typeface="Arial" pitchFamily="34" charset="0"/>
-                <a:ea typeface="Arial" pitchFamily="34" charset="-122"/>
-                <a:cs typeface="Arial" pitchFamily="34" charset="-120"/>
-              </a:rPr>
-              <a:t>By the end of this lesson, students recall the five </a:t>
-            </a:r>
-            <a:pPr algn="l" indent="0" marL="0">
-              <a:lnSpc>
-                <a:spcPts val="1680"/>
-              </a:lnSpc>
-              <a:spcBef>
-                <a:spcPts val="300"/>
-              </a:spcBef>
-              <a:spcAft>
-                <a:spcPts val="300"/>
-              </a:spcAft>
-              <a:buNone/>
-            </a:pPr>
-            <a:r>
-              <a:rPr lang="en-US" sz="1200" i="1" dirty="0">
-                <a:solidFill>
-                  <a:srgbClr val="1C2833"/>
-                </a:solidFill>
-                <a:latin typeface="Arial" pitchFamily="34" charset="0"/>
-                <a:ea typeface="Arial" pitchFamily="34" charset="-122"/>
-                <a:cs typeface="Arial" pitchFamily="34" charset="-120"/>
-              </a:rPr>
-              <a:t>pañcabhūta</a:t>
-            </a:r>
-            <a:pPr algn="l" indent="0" marL="0">
-              <a:lnSpc>
-                <a:spcPts val="1680"/>
-              </a:lnSpc>
-              <a:spcBef>
-                <a:spcPts val="300"/>
-              </a:spcBef>
-              <a:spcAft>
-                <a:spcPts val="300"/>
-              </a:spcAft>
-              <a:buNone/>
-            </a:pPr>
-            <a:r>
-              <a:rPr lang="en-US" sz="1200" dirty="0">
-                <a:solidFill>
-                  <a:srgbClr val="1C2833"/>
-                </a:solidFill>
-                <a:latin typeface="Arial" pitchFamily="34" charset="0"/>
-                <a:ea typeface="Arial" pitchFamily="34" charset="-122"/>
-                <a:cs typeface="Arial" pitchFamily="34" charset="-120"/>
-              </a:rPr>
-              <a:t>, pair them into three combinations, and articulate why the body might be organised around motion, transformation, and structure.</a:t>
-            </a:r>
-            <a:endParaRPr lang="en-US" sz="1200" dirty="0"/>
-          </a:p>
-        </p:txBody>
-      </p:sp>
-      <p:sp>
-        <p:nvSpPr>
-          <p:cNvPr id="7" name="Text 5"/>
-          <p:cNvSpPr/>
-          <p:nvPr/>
-        </p:nvSpPr>
-        <p:spPr>
-          <a:xfrm>
             <a:off x="406301" y="4434929"/>
             <a:ext cx="8498026" cy="213271"/>
           </a:xfrm>
@@ -2386,7 +2867,7 @@
                 <a:ea typeface="Georgia" pitchFamily="34" charset="-122"/>
                 <a:cs typeface="Georgia" pitchFamily="34" charset="-120"/>
               </a:rPr>
-              <a:t>Differentiation</a:t>
+              <a:t>Core (20 min) (cont.)</a:t>
             </a:r>
             <a:endParaRPr lang="en-US" sz="1800" dirty="0"/>
           </a:p>
@@ -2400,8 +2881,8 @@
         </p:nvSpPr>
         <p:spPr>
           <a:xfrm>
-            <a:off x="634901" y="883593"/>
-            <a:ext cx="8102798" cy="731341"/>
+            <a:off x="406301" y="870942"/>
+            <a:ext cx="8498026" cy="213271"/>
           </a:xfrm>
           <a:prstGeom prst="rect">
             <a:avLst/>
@@ -2413,6 +2894,54 @@
           <a:bodyPr wrap="square" lIns="0" tIns="0" rIns="0" bIns="0" rtlCol="0" anchor="t"/>
           <a:lstStyle/>
           <a:p>
+            <a:pPr algn="l" indent="0" marL="0">
+              <a:lnSpc>
+                <a:spcPts val="1680"/>
+              </a:lnSpc>
+              <a:spcBef>
+                <a:spcPts val="300"/>
+              </a:spcBef>
+              <a:spcAft>
+                <a:spcPts val="300"/>
+              </a:spcAft>
+              <a:buNone/>
+            </a:pPr>
+            <a:r>
+              <a:rPr lang="en-US" sz="1200" i="1" dirty="0">
+                <a:solidFill>
+                  <a:srgbClr val="1C2833"/>
+                </a:solidFill>
+                <a:latin typeface="Arial" pitchFamily="34" charset="0"/>
+                <a:ea typeface="Arial" pitchFamily="34" charset="-122"/>
+                <a:cs typeface="Arial" pitchFamily="34" charset="-120"/>
+              </a:rPr>
+              <a:t>Each row: Pair · Sanskrit name · Lit. meaning.</a:t>
+            </a:r>
+            <a:endParaRPr lang="en-US" sz="1200" dirty="0"/>
+          </a:p>
+        </p:txBody>
+      </p:sp>
+      <p:sp>
+        <p:nvSpPr>
+          <p:cNvPr id="5" name="Text 3"/>
+          <p:cNvSpPr/>
+          <p:nvPr/>
+        </p:nvSpPr>
+        <p:spPr>
+          <a:xfrm>
+            <a:off x="634901" y="1173063"/>
+            <a:ext cx="8102798" cy="769441"/>
+          </a:xfrm>
+          <a:prstGeom prst="rect">
+            <a:avLst/>
+          </a:prstGeom>
+          <a:noFill/>
+          <a:ln/>
+        </p:spPr>
+        <p:txBody>
+          <a:bodyPr wrap="square" lIns="0" tIns="0" rIns="0" bIns="0" rtlCol="0" anchor="t"/>
+          <a:lstStyle/>
+          <a:p>
             <a:pPr algn="l" marL="342900" indent="-342900">
               <a:lnSpc>
                 <a:spcPts val="1620"/>
@@ -2424,15 +2953,15 @@
               <a:buChar char="•"/>
             </a:pPr>
             <a:r>
-              <a:rPr lang="en-US" sz="1200" b="1" dirty="0">
-                <a:solidFill>
-                  <a:srgbClr val="1C2833"/>
-                </a:solidFill>
-                <a:latin typeface="Arial" pitchFamily="34" charset="0"/>
-                <a:ea typeface="Arial" pitchFamily="34" charset="-122"/>
-                <a:cs typeface="Arial" pitchFamily="34" charset="-120"/>
-              </a:rPr>
-              <a:t>One tier up:</a:t>
+              <a:rPr lang="en-US" sz="1200" i="1" dirty="0">
+                <a:solidFill>
+                  <a:srgbClr val="1C2833"/>
+                </a:solidFill>
+                <a:latin typeface="Arial" pitchFamily="34" charset="0"/>
+                <a:ea typeface="Arial" pitchFamily="34" charset="-122"/>
+                <a:cs typeface="Arial" pitchFamily="34" charset="-120"/>
+              </a:rPr>
+              <a:t>ākāśa</a:t>
             </a:r>
             <a:pPr algn="l" indent="0" marL="0">
               <a:lnSpc>
@@ -2452,7 +2981,7 @@
                 <a:ea typeface="Arial" pitchFamily="34" charset="-122"/>
                 <a:cs typeface="Arial" pitchFamily="34" charset="-120"/>
               </a:rPr>
-              <a:t> Why does </a:t>
+              <a:t> + </a:t>
             </a:r>
             <a:pPr algn="l" indent="0" marL="0">
               <a:lnSpc>
@@ -2472,7 +3001,7 @@
                 <a:ea typeface="Arial" pitchFamily="34" charset="-122"/>
                 <a:cs typeface="Arial" pitchFamily="34" charset="-120"/>
               </a:rPr>
-              <a:t>ap</a:t>
+              <a:t>vāyu</a:t>
             </a:r>
             <a:pPr algn="l" indent="0" marL="0">
               <a:lnSpc>
@@ -2492,7 +3021,47 @@
                 <a:ea typeface="Arial" pitchFamily="34" charset="-122"/>
                 <a:cs typeface="Arial" pitchFamily="34" charset="-120"/>
               </a:rPr>
-              <a:t> (water) appear in TWO of the three doṣas? What does that suggest about water's special role in the framework?</a:t>
+              <a:t> — </a:t>
+            </a:r>
+            <a:pPr algn="l" indent="0" marL="0">
+              <a:lnSpc>
+                <a:spcPts val="1620"/>
+              </a:lnSpc>
+              <a:spcAft>
+                <a:spcPts val="300"/>
+              </a:spcAft>
+              <a:buNone/>
+            </a:pPr>
+            <a:r>
+              <a:rPr lang="en-US" sz="1200" b="1" i="1" dirty="0">
+                <a:solidFill>
+                  <a:srgbClr val="1C2833"/>
+                </a:solidFill>
+                <a:latin typeface="Arial" pitchFamily="34" charset="0"/>
+                <a:ea typeface="Arial" pitchFamily="34" charset="-122"/>
+                <a:cs typeface="Arial" pitchFamily="34" charset="-120"/>
+              </a:rPr>
+              <a:t>vāta</a:t>
+            </a:r>
+            <a:pPr algn="l" indent="0" marL="0">
+              <a:lnSpc>
+                <a:spcPts val="1620"/>
+              </a:lnSpc>
+              <a:spcAft>
+                <a:spcPts val="300"/>
+              </a:spcAft>
+              <a:buNone/>
+            </a:pPr>
+            <a:r>
+              <a:rPr lang="en-US" sz="1200" dirty="0">
+                <a:solidFill>
+                  <a:srgbClr val="1C2833"/>
+                </a:solidFill>
+                <a:latin typeface="Arial" pitchFamily="34" charset="0"/>
+                <a:ea typeface="Arial" pitchFamily="34" charset="-122"/>
+                <a:cs typeface="Arial" pitchFamily="34" charset="-120"/>
+              </a:rPr>
+              <a:t> · "wind, that-which-moves"</a:t>
             </a:r>
             <a:endParaRPr lang="en-US" sz="1200" dirty="0"/>
           </a:p>
@@ -2508,15 +3077,15 @@
               <a:buChar char="•"/>
             </a:pPr>
             <a:r>
-              <a:rPr lang="en-US" sz="1200" b="1" dirty="0">
-                <a:solidFill>
-                  <a:srgbClr val="1C2833"/>
-                </a:solidFill>
-                <a:latin typeface="Arial" pitchFamily="34" charset="0"/>
-                <a:ea typeface="Arial" pitchFamily="34" charset="-122"/>
-                <a:cs typeface="Arial" pitchFamily="34" charset="-120"/>
-              </a:rPr>
-              <a:t>One tier down:</a:t>
+              <a:rPr lang="en-US" sz="1200" i="1" dirty="0">
+                <a:solidFill>
+                  <a:srgbClr val="1C2833"/>
+                </a:solidFill>
+                <a:latin typeface="Arial" pitchFamily="34" charset="0"/>
+                <a:ea typeface="Arial" pitchFamily="34" charset="-122"/>
+                <a:cs typeface="Arial" pitchFamily="34" charset="-120"/>
+              </a:rPr>
+              <a:t>tejas</a:t>
             </a:r>
             <a:pPr algn="l" indent="0" marL="0">
               <a:lnSpc>
@@ -2536,15 +3105,219 @@
                 <a:ea typeface="Arial" pitchFamily="34" charset="-122"/>
                 <a:cs typeface="Arial" pitchFamily="34" charset="-120"/>
               </a:rPr>
-              <a:t> Just remember the three names and what each does. The element pairing can come tomorrow.</a:t>
+              <a:t> + </a:t>
+            </a:r>
+            <a:pPr algn="l" indent="0" marL="0">
+              <a:lnSpc>
+                <a:spcPts val="1620"/>
+              </a:lnSpc>
+              <a:spcAft>
+                <a:spcPts val="300"/>
+              </a:spcAft>
+              <a:buNone/>
+            </a:pPr>
+            <a:r>
+              <a:rPr lang="en-US" sz="1200" i="1" dirty="0">
+                <a:solidFill>
+                  <a:srgbClr val="1C2833"/>
+                </a:solidFill>
+                <a:latin typeface="Arial" pitchFamily="34" charset="0"/>
+                <a:ea typeface="Arial" pitchFamily="34" charset="-122"/>
+                <a:cs typeface="Arial" pitchFamily="34" charset="-120"/>
+              </a:rPr>
+              <a:t>ap</a:t>
+            </a:r>
+            <a:pPr algn="l" indent="0" marL="0">
+              <a:lnSpc>
+                <a:spcPts val="1620"/>
+              </a:lnSpc>
+              <a:spcAft>
+                <a:spcPts val="300"/>
+              </a:spcAft>
+              <a:buNone/>
+            </a:pPr>
+            <a:r>
+              <a:rPr lang="en-US" sz="1200" dirty="0">
+                <a:solidFill>
+                  <a:srgbClr val="1C2833"/>
+                </a:solidFill>
+                <a:latin typeface="Arial" pitchFamily="34" charset="0"/>
+                <a:ea typeface="Arial" pitchFamily="34" charset="-122"/>
+                <a:cs typeface="Arial" pitchFamily="34" charset="-120"/>
+              </a:rPr>
+              <a:t> — </a:t>
+            </a:r>
+            <a:pPr algn="l" indent="0" marL="0">
+              <a:lnSpc>
+                <a:spcPts val="1620"/>
+              </a:lnSpc>
+              <a:spcAft>
+                <a:spcPts val="300"/>
+              </a:spcAft>
+              <a:buNone/>
+            </a:pPr>
+            <a:r>
+              <a:rPr lang="en-US" sz="1200" b="1" i="1" dirty="0">
+                <a:solidFill>
+                  <a:srgbClr val="1C2833"/>
+                </a:solidFill>
+                <a:latin typeface="Arial" pitchFamily="34" charset="0"/>
+                <a:ea typeface="Arial" pitchFamily="34" charset="-122"/>
+                <a:cs typeface="Arial" pitchFamily="34" charset="-120"/>
+              </a:rPr>
+              <a:t>pitta</a:t>
+            </a:r>
+            <a:pPr algn="l" indent="0" marL="0">
+              <a:lnSpc>
+                <a:spcPts val="1620"/>
+              </a:lnSpc>
+              <a:spcAft>
+                <a:spcPts val="300"/>
+              </a:spcAft>
+              <a:buNone/>
+            </a:pPr>
+            <a:r>
+              <a:rPr lang="en-US" sz="1200" dirty="0">
+                <a:solidFill>
+                  <a:srgbClr val="1C2833"/>
+                </a:solidFill>
+                <a:latin typeface="Arial" pitchFamily="34" charset="0"/>
+                <a:ea typeface="Arial" pitchFamily="34" charset="-122"/>
+                <a:cs typeface="Arial" pitchFamily="34" charset="-120"/>
+              </a:rPr>
+              <a:t> · "that which heats / digests"</a:t>
             </a:r>
             <a:endParaRPr lang="en-US" sz="1200" dirty="0"/>
           </a:p>
-        </p:txBody>
-      </p:sp>
-      <p:sp>
-        <p:nvSpPr>
-          <p:cNvPr id="5" name="Text 3"/>
+          <a:p>
+            <a:pPr algn="l" marL="342900" indent="-342900">
+              <a:lnSpc>
+                <a:spcPts val="1620"/>
+              </a:lnSpc>
+              <a:spcAft>
+                <a:spcPts val="300"/>
+              </a:spcAft>
+              <a:buSzPct val="100000"/>
+              <a:buChar char="•"/>
+            </a:pPr>
+            <a:r>
+              <a:rPr lang="en-US" sz="1200" i="1" dirty="0">
+                <a:solidFill>
+                  <a:srgbClr val="1C2833"/>
+                </a:solidFill>
+                <a:latin typeface="Arial" pitchFamily="34" charset="0"/>
+                <a:ea typeface="Arial" pitchFamily="34" charset="-122"/>
+                <a:cs typeface="Arial" pitchFamily="34" charset="-120"/>
+              </a:rPr>
+              <a:t>ap</a:t>
+            </a:r>
+            <a:pPr algn="l" indent="0" marL="0">
+              <a:lnSpc>
+                <a:spcPts val="1620"/>
+              </a:lnSpc>
+              <a:spcAft>
+                <a:spcPts val="300"/>
+              </a:spcAft>
+              <a:buNone/>
+            </a:pPr>
+            <a:r>
+              <a:rPr lang="en-US" sz="1200" dirty="0">
+                <a:solidFill>
+                  <a:srgbClr val="1C2833"/>
+                </a:solidFill>
+                <a:latin typeface="Arial" pitchFamily="34" charset="0"/>
+                <a:ea typeface="Arial" pitchFamily="34" charset="-122"/>
+                <a:cs typeface="Arial" pitchFamily="34" charset="-120"/>
+              </a:rPr>
+              <a:t> + </a:t>
+            </a:r>
+            <a:pPr algn="l" indent="0" marL="0">
+              <a:lnSpc>
+                <a:spcPts val="1620"/>
+              </a:lnSpc>
+              <a:spcAft>
+                <a:spcPts val="300"/>
+              </a:spcAft>
+              <a:buNone/>
+            </a:pPr>
+            <a:r>
+              <a:rPr lang="en-US" sz="1200" i="1" dirty="0">
+                <a:solidFill>
+                  <a:srgbClr val="1C2833"/>
+                </a:solidFill>
+                <a:latin typeface="Arial" pitchFamily="34" charset="0"/>
+                <a:ea typeface="Arial" pitchFamily="34" charset="-122"/>
+                <a:cs typeface="Arial" pitchFamily="34" charset="-120"/>
+              </a:rPr>
+              <a:t>pṛthvī</a:t>
+            </a:r>
+            <a:pPr algn="l" indent="0" marL="0">
+              <a:lnSpc>
+                <a:spcPts val="1620"/>
+              </a:lnSpc>
+              <a:spcAft>
+                <a:spcPts val="300"/>
+              </a:spcAft>
+              <a:buNone/>
+            </a:pPr>
+            <a:r>
+              <a:rPr lang="en-US" sz="1200" dirty="0">
+                <a:solidFill>
+                  <a:srgbClr val="1C2833"/>
+                </a:solidFill>
+                <a:latin typeface="Arial" pitchFamily="34" charset="0"/>
+                <a:ea typeface="Arial" pitchFamily="34" charset="-122"/>
+                <a:cs typeface="Arial" pitchFamily="34" charset="-120"/>
+              </a:rPr>
+              <a:t> — </a:t>
+            </a:r>
+            <a:pPr algn="l" indent="0" marL="0">
+              <a:lnSpc>
+                <a:spcPts val="1620"/>
+              </a:lnSpc>
+              <a:spcAft>
+                <a:spcPts val="300"/>
+              </a:spcAft>
+              <a:buNone/>
+            </a:pPr>
+            <a:r>
+              <a:rPr lang="en-US" sz="1200" b="1" i="1" dirty="0">
+                <a:solidFill>
+                  <a:srgbClr val="1C2833"/>
+                </a:solidFill>
+                <a:latin typeface="Arial" pitchFamily="34" charset="0"/>
+                <a:ea typeface="Arial" pitchFamily="34" charset="-122"/>
+                <a:cs typeface="Arial" pitchFamily="34" charset="-120"/>
+              </a:rPr>
+              <a:t>kapha</a:t>
+            </a:r>
+            <a:pPr algn="l" indent="0" marL="0">
+              <a:lnSpc>
+                <a:spcPts val="1620"/>
+              </a:lnSpc>
+              <a:spcAft>
+                <a:spcPts val="300"/>
+              </a:spcAft>
+              <a:buNone/>
+            </a:pPr>
+            <a:r>
+              <a:rPr lang="en-US" sz="1200" dirty="0">
+                <a:solidFill>
+                  <a:srgbClr val="1C2833"/>
+                </a:solidFill>
+                <a:latin typeface="Arial" pitchFamily="34" charset="0"/>
+                <a:ea typeface="Arial" pitchFamily="34" charset="-122"/>
+                <a:cs typeface="Arial" pitchFamily="34" charset="-120"/>
+              </a:rPr>
+              <a:t> · "phlegm, that-which-holds"</a:t>
+            </a:r>
+            <a:endParaRPr lang="en-US" sz="1200" dirty="0"/>
+          </a:p>
+        </p:txBody>
+      </p:sp>
+      <p:sp>
+        <p:nvSpPr>
+          <p:cNvPr id="6" name="Text 4"/>
           <p:cNvSpPr/>
           <p:nvPr/>
         </p:nvSpPr>
@@ -2694,7 +3467,7 @@
                 <a:ea typeface="Georgia" pitchFamily="34" charset="-122"/>
                 <a:cs typeface="Georgia" pitchFamily="34" charset="-120"/>
               </a:rPr>
-              <a:t>Teacher notes</a:t>
+              <a:t>Core (20 min) (cont.)</a:t>
             </a:r>
             <a:endParaRPr lang="en-US" sz="1800" dirty="0"/>
           </a:p>
@@ -2708,8 +3481,8 @@
         </p:nvSpPr>
         <p:spPr>
           <a:xfrm>
-            <a:off x="406301" y="870942"/>
-            <a:ext cx="8498026" cy="853083"/>
+            <a:off x="634901" y="883593"/>
+            <a:ext cx="8102798" cy="487561"/>
           </a:xfrm>
           <a:prstGeom prst="rect">
             <a:avLst/>
@@ -2721,13 +3494,31 @@
           <a:bodyPr wrap="square" lIns="0" tIns="0" rIns="0" bIns="0" rtlCol="0" anchor="t"/>
           <a:lstStyle/>
           <a:p>
-            <a:pPr algn="l" indent="0" marL="0">
-              <a:lnSpc>
-                <a:spcPts val="1680"/>
-              </a:lnSpc>
-              <a:spcBef>
-                <a:spcPts val="300"/>
-              </a:spcBef>
+            <a:pPr algn="l" marL="342900" indent="-342900">
+              <a:lnSpc>
+                <a:spcPts val="1620"/>
+              </a:lnSpc>
+              <a:spcAft>
+                <a:spcPts val="300"/>
+              </a:spcAft>
+              <a:buSzPct val="100000"/>
+              <a:buChar char="•"/>
+            </a:pPr>
+            <a:r>
+              <a:rPr lang="en-US" sz="1200" b="1" dirty="0">
+                <a:solidFill>
+                  <a:srgbClr val="1C2833"/>
+                </a:solidFill>
+                <a:latin typeface="Arial" pitchFamily="34" charset="0"/>
+                <a:ea typeface="Arial" pitchFamily="34" charset="-122"/>
+                <a:cs typeface="Arial" pitchFamily="34" charset="-120"/>
+              </a:rPr>
+              <a:t>The Sanskrit name for the trio.</a:t>
+            </a:r>
+            <a:pPr algn="l" indent="0" marL="0">
+              <a:lnSpc>
+                <a:spcPts val="1620"/>
+              </a:lnSpc>
               <a:spcAft>
                 <a:spcPts val="300"/>
               </a:spcAft>
@@ -2742,15 +3533,52 @@
                 <a:ea typeface="Arial" pitchFamily="34" charset="-122"/>
                 <a:cs typeface="Arial" pitchFamily="34" charset="-120"/>
               </a:rPr>
-              <a:t>– The trickiest pairing is </a:t>
-            </a:r>
-            <a:pPr algn="l" indent="0" marL="0">
-              <a:lnSpc>
-                <a:spcPts val="1680"/>
-              </a:lnSpc>
-              <a:spcBef>
-                <a:spcPts val="300"/>
-              </a:spcBef>
+              <a:t> Write it: </a:t>
+            </a:r>
+            <a:pPr algn="l" indent="0" marL="0">
+              <a:lnSpc>
+                <a:spcPts val="1620"/>
+              </a:lnSpc>
+              <a:spcAft>
+                <a:spcPts val="300"/>
+              </a:spcAft>
+              <a:buNone/>
+            </a:pPr>
+            <a:r>
+              <a:rPr lang="en-US" sz="1200" b="1" i="1" dirty="0">
+                <a:solidFill>
+                  <a:srgbClr val="1C2833"/>
+                </a:solidFill>
+                <a:latin typeface="Arial" pitchFamily="34" charset="0"/>
+                <a:ea typeface="Arial" pitchFamily="34" charset="-122"/>
+                <a:cs typeface="Arial" pitchFamily="34" charset="-120"/>
+              </a:rPr>
+              <a:t>tridoṣa</a:t>
+            </a:r>
+            <a:pPr algn="l" indent="0" marL="0">
+              <a:lnSpc>
+                <a:spcPts val="1620"/>
+              </a:lnSpc>
+              <a:spcAft>
+                <a:spcPts val="300"/>
+              </a:spcAft>
+              <a:buNone/>
+            </a:pPr>
+            <a:r>
+              <a:rPr lang="en-US" sz="1200" dirty="0">
+                <a:solidFill>
+                  <a:srgbClr val="1C2833"/>
+                </a:solidFill>
+                <a:latin typeface="Arial" pitchFamily="34" charset="0"/>
+                <a:ea typeface="Arial" pitchFamily="34" charset="-122"/>
+                <a:cs typeface="Arial" pitchFamily="34" charset="-120"/>
+              </a:rPr>
+              <a:t>. "Three </a:t>
+            </a:r>
+            <a:pPr algn="l" indent="0" marL="0">
+              <a:lnSpc>
+                <a:spcPts val="1620"/>
+              </a:lnSpc>
               <a:spcAft>
                 <a:spcPts val="300"/>
               </a:spcAft>
@@ -2765,15 +3593,12 @@
                 <a:ea typeface="Arial" pitchFamily="34" charset="-122"/>
                 <a:cs typeface="Arial" pitchFamily="34" charset="-120"/>
               </a:rPr>
-              <a:t>kapha = ap + pṛthvī</a:t>
-            </a:r>
-            <a:pPr algn="l" indent="0" marL="0">
-              <a:lnSpc>
-                <a:spcPts val="1680"/>
-              </a:lnSpc>
-              <a:spcBef>
-                <a:spcPts val="300"/>
-              </a:spcBef>
+              <a:t>doṣa</a:t>
+            </a:r>
+            <a:pPr algn="l" indent="0" marL="0">
+              <a:lnSpc>
+                <a:spcPts val="1620"/>
+              </a:lnSpc>
               <a:spcAft>
                 <a:spcPts val="300"/>
               </a:spcAft>
@@ -2788,15 +3613,78 @@
                 <a:ea typeface="Arial" pitchFamily="34" charset="-122"/>
                 <a:cs typeface="Arial" pitchFamily="34" charset="-120"/>
               </a:rPr>
-              <a:t>. Students will want </a:t>
-            </a:r>
-            <a:pPr algn="l" indent="0" marL="0">
-              <a:lnSpc>
-                <a:spcPts val="1680"/>
-              </a:lnSpc>
-              <a:spcBef>
-                <a:spcPts val="300"/>
-              </a:spcBef>
+              <a:t>s." In classical Indian medicine, these three functional principles are how the body is organised.</a:t>
+            </a:r>
+            <a:endParaRPr lang="en-US" sz="1200" dirty="0"/>
+          </a:p>
+        </p:txBody>
+      </p:sp>
+      <p:sp>
+        <p:nvSpPr>
+          <p:cNvPr id="5" name="Text 3"/>
+          <p:cNvSpPr/>
+          <p:nvPr/>
+        </p:nvSpPr>
+        <p:spPr>
+          <a:xfrm>
+            <a:off x="634901" y="1472654"/>
+            <a:ext cx="8102798" cy="693241"/>
+          </a:xfrm>
+          <a:prstGeom prst="rect">
+            <a:avLst/>
+          </a:prstGeom>
+          <a:noFill/>
+          <a:ln/>
+        </p:spPr>
+        <p:txBody>
+          <a:bodyPr wrap="square" lIns="0" tIns="0" rIns="0" bIns="0" rtlCol="0" anchor="t"/>
+          <a:lstStyle/>
+          <a:p>
+            <a:pPr algn="l" marL="342900" indent="-342900">
+              <a:lnSpc>
+                <a:spcPts val="1620"/>
+              </a:lnSpc>
+              <a:spcAft>
+                <a:spcPts val="300"/>
+              </a:spcAft>
+              <a:buSzPct val="100000"/>
+              <a:buChar char="•"/>
+            </a:pPr>
+            <a:r>
+              <a:rPr lang="en-US" sz="1200" b="1" dirty="0">
+                <a:solidFill>
+                  <a:srgbClr val="1C2833"/>
+                </a:solidFill>
+                <a:latin typeface="Arial" pitchFamily="34" charset="0"/>
+                <a:ea typeface="Arial" pitchFamily="34" charset="-122"/>
+                <a:cs typeface="Arial" pitchFamily="34" charset="-120"/>
+              </a:rPr>
+              <a:t>Source-of-record paraphrase.</a:t>
+            </a:r>
+            <a:pPr algn="l" indent="0" marL="0">
+              <a:lnSpc>
+                <a:spcPts val="1620"/>
+              </a:lnSpc>
+              <a:spcAft>
+                <a:spcPts val="300"/>
+              </a:spcAft>
+              <a:buNone/>
+            </a:pPr>
+            <a:r>
+              <a:rPr lang="en-US" sz="1200" dirty="0">
+                <a:solidFill>
+                  <a:srgbClr val="1C2833"/>
+                </a:solidFill>
+                <a:latin typeface="Arial" pitchFamily="34" charset="0"/>
+                <a:ea typeface="Arial" pitchFamily="34" charset="-122"/>
+                <a:cs typeface="Arial" pitchFamily="34" charset="-120"/>
+              </a:rPr>
+              <a:t> </a:t>
+            </a:r>
+            <a:pPr algn="l" indent="0" marL="0">
+              <a:lnSpc>
+                <a:spcPts val="1620"/>
+              </a:lnSpc>
               <a:spcAft>
                 <a:spcPts val="300"/>
               </a:spcAft>
@@ -2811,15 +3699,12 @@
                 <a:ea typeface="Arial" pitchFamily="34" charset="-122"/>
                 <a:cs typeface="Arial" pitchFamily="34" charset="-120"/>
               </a:rPr>
-              <a:t>pṛthvī</a:t>
-            </a:r>
-            <a:pPr algn="l" indent="0" marL="0">
-              <a:lnSpc>
-                <a:spcPts val="1680"/>
-              </a:lnSpc>
-              <a:spcBef>
-                <a:spcPts val="300"/>
-              </a:spcBef>
+              <a:t>"The Caraka Saṁhitā — one of the founding Ayurveda texts, c. 1st millennium BCE/CE — says: when vāta, pitta, and kapha are in their natural state, they sustain the body; when they are out of balance, they cause disease."</a:t>
+            </a:r>
+            <a:pPr algn="l" indent="0" marL="0">
+              <a:lnSpc>
+                <a:spcPts val="1620"/>
+              </a:lnSpc>
               <a:spcAft>
                 <a:spcPts val="300"/>
               </a:spcAft>
@@ -2834,15 +3719,12 @@
                 <a:ea typeface="Arial" pitchFamily="34" charset="-122"/>
                 <a:cs typeface="Arial" pitchFamily="34" charset="-120"/>
               </a:rPr>
-              <a:t> alone — but the classical formulation is that earth needs water to hold its cohesive structure (think: dry sand vs wet sand). – Some students will ask why fire (</a:t>
-            </a:r>
-            <a:pPr algn="l" indent="0" marL="0">
-              <a:lnSpc>
-                <a:spcPts val="1680"/>
-              </a:lnSpc>
-              <a:spcBef>
-                <a:spcPts val="300"/>
-              </a:spcBef>
+              <a:t> (Caraka Saṁhitā, </a:t>
+            </a:r>
+            <a:pPr algn="l" indent="0" marL="0">
+              <a:lnSpc>
+                <a:spcPts val="1620"/>
+              </a:lnSpc>
               <a:spcAft>
                 <a:spcPts val="300"/>
               </a:spcAft>
@@ -2857,15 +3739,12 @@
                 <a:ea typeface="Arial" pitchFamily="34" charset="-122"/>
                 <a:cs typeface="Arial" pitchFamily="34" charset="-120"/>
               </a:rPr>
-              <a:t>tejas</a:t>
-            </a:r>
-            <a:pPr algn="l" indent="0" marL="0">
-              <a:lnSpc>
-                <a:spcPts val="1680"/>
-              </a:lnSpc>
-              <a:spcBef>
-                <a:spcPts val="300"/>
-              </a:spcBef>
+              <a:t>Sūtrasthāna</a:t>
+            </a:r>
+            <a:pPr algn="l" indent="0" marL="0">
+              <a:lnSpc>
+                <a:spcPts val="1620"/>
+              </a:lnSpc>
               <a:spcAft>
                 <a:spcPts val="300"/>
               </a:spcAft>
@@ -2880,145 +3759,7 @@
                 <a:ea typeface="Arial" pitchFamily="34" charset="-122"/>
                 <a:cs typeface="Arial" pitchFamily="34" charset="-120"/>
               </a:rPr>
-              <a:t>) doesn't appear alone. Good question. The classical answer: fire by itself doesn't transform — it needs something fluid to transform </a:t>
-            </a:r>
-            <a:pPr algn="l" indent="0" marL="0">
-              <a:lnSpc>
-                <a:spcPts val="1680"/>
-              </a:lnSpc>
-              <a:spcBef>
-                <a:spcPts val="300"/>
-              </a:spcBef>
-              <a:spcAft>
-                <a:spcPts val="300"/>
-              </a:spcAft>
-              <a:buNone/>
-            </a:pPr>
-            <a:r>
-              <a:rPr lang="en-US" sz="1200" i="1" dirty="0">
-                <a:solidFill>
-                  <a:srgbClr val="1C2833"/>
-                </a:solidFill>
-                <a:latin typeface="Arial" pitchFamily="34" charset="0"/>
-                <a:ea typeface="Arial" pitchFamily="34" charset="-122"/>
-                <a:cs typeface="Arial" pitchFamily="34" charset="-120"/>
-              </a:rPr>
-              <a:t>in</a:t>
-            </a:r>
-            <a:pPr algn="l" indent="0" marL="0">
-              <a:lnSpc>
-                <a:spcPts val="1680"/>
-              </a:lnSpc>
-              <a:spcBef>
-                <a:spcPts val="300"/>
-              </a:spcBef>
-              <a:spcAft>
-                <a:spcPts val="300"/>
-              </a:spcAft>
-              <a:buNone/>
-            </a:pPr>
-            <a:r>
-              <a:rPr lang="en-US" sz="1200" dirty="0">
-                <a:solidFill>
-                  <a:srgbClr val="1C2833"/>
-                </a:solidFill>
-                <a:latin typeface="Arial" pitchFamily="34" charset="0"/>
-                <a:ea typeface="Arial" pitchFamily="34" charset="-122"/>
-                <a:cs typeface="Arial" pitchFamily="34" charset="-120"/>
-              </a:rPr>
-              <a:t>. Hence </a:t>
-            </a:r>
-            <a:pPr algn="l" indent="0" marL="0">
-              <a:lnSpc>
-                <a:spcPts val="1680"/>
-              </a:lnSpc>
-              <a:spcBef>
-                <a:spcPts val="300"/>
-              </a:spcBef>
-              <a:spcAft>
-                <a:spcPts val="300"/>
-              </a:spcAft>
-              <a:buNone/>
-            </a:pPr>
-            <a:r>
-              <a:rPr lang="en-US" sz="1200" i="1" dirty="0">
-                <a:solidFill>
-                  <a:srgbClr val="1C2833"/>
-                </a:solidFill>
-                <a:latin typeface="Arial" pitchFamily="34" charset="0"/>
-                <a:ea typeface="Arial" pitchFamily="34" charset="-122"/>
-                <a:cs typeface="Arial" pitchFamily="34" charset="-120"/>
-              </a:rPr>
-              <a:t>tejas + ap = pitta</a:t>
-            </a:r>
-            <a:pPr algn="l" indent="0" marL="0">
-              <a:lnSpc>
-                <a:spcPts val="1680"/>
-              </a:lnSpc>
-              <a:spcBef>
-                <a:spcPts val="300"/>
-              </a:spcBef>
-              <a:spcAft>
-                <a:spcPts val="300"/>
-              </a:spcAft>
-              <a:buNone/>
-            </a:pPr>
-            <a:r>
-              <a:rPr lang="en-US" sz="1200" dirty="0">
-                <a:solidFill>
-                  <a:srgbClr val="1C2833"/>
-                </a:solidFill>
-                <a:latin typeface="Arial" pitchFamily="34" charset="0"/>
-                <a:ea typeface="Arial" pitchFamily="34" charset="-122"/>
-                <a:cs typeface="Arial" pitchFamily="34" charset="-120"/>
-              </a:rPr>
-              <a:t>. – Don't go deep on </a:t>
-            </a:r>
-            <a:pPr algn="l" indent="0" marL="0">
-              <a:lnSpc>
-                <a:spcPts val="1680"/>
-              </a:lnSpc>
-              <a:spcBef>
-                <a:spcPts val="300"/>
-              </a:spcBef>
-              <a:spcAft>
-                <a:spcPts val="300"/>
-              </a:spcAft>
-              <a:buNone/>
-            </a:pPr>
-            <a:r>
-              <a:rPr lang="en-US" sz="1200" i="1" dirty="0">
-                <a:solidFill>
-                  <a:srgbClr val="1C2833"/>
-                </a:solidFill>
-                <a:latin typeface="Arial" pitchFamily="34" charset="0"/>
-                <a:ea typeface="Arial" pitchFamily="34" charset="-122"/>
-                <a:cs typeface="Arial" pitchFamily="34" charset="-120"/>
-              </a:rPr>
-              <a:t>prakṛti/vikṛti</a:t>
-            </a:r>
-            <a:pPr algn="l" indent="0" marL="0">
-              <a:lnSpc>
-                <a:spcPts val="1680"/>
-              </a:lnSpc>
-              <a:spcBef>
-                <a:spcPts val="300"/>
-              </a:spcBef>
-              <a:spcAft>
-                <a:spcPts val="300"/>
-              </a:spcAft>
-              <a:buNone/>
-            </a:pPr>
-            <a:r>
-              <a:rPr lang="en-US" sz="1200" dirty="0">
-                <a:solidFill>
-                  <a:srgbClr val="1C2833"/>
-                </a:solidFill>
-                <a:latin typeface="Arial" pitchFamily="34" charset="0"/>
-                <a:ea typeface="Arial" pitchFamily="34" charset="-122"/>
-                <a:cs typeface="Arial" pitchFamily="34" charset="-120"/>
-              </a:rPr>
-              <a:t> today. That's Day 3.</a:t>
+              <a:t> 1.57 — paraphrase.)</a:t>
             </a:r>
             <a:endParaRPr lang="en-US" sz="1200" dirty="0"/>
           </a:p>
@@ -3026,7 +3767,7 @@
       </p:sp>
       <p:sp>
         <p:nvSpPr>
-          <p:cNvPr id="5" name="Text 3"/>
+          <p:cNvPr id="6" name="Text 4"/>
           <p:cNvSpPr/>
           <p:nvPr/>
         </p:nvSpPr>
@@ -3176,7 +3917,7 @@
                 <a:ea typeface="Georgia" pitchFamily="34" charset="-122"/>
                 <a:cs typeface="Georgia" pitchFamily="34" charset="-120"/>
               </a:rPr>
-              <a:t>Citation(s) used in this lesson</a:t>
+              <a:t>Core (20 min) (cont.)</a:t>
             </a:r>
             <a:endParaRPr lang="en-US" sz="1800" dirty="0"/>
           </a:p>
@@ -3190,8 +3931,8 @@
         </p:nvSpPr>
         <p:spPr>
           <a:xfrm>
-            <a:off x="406301" y="870942"/>
-            <a:ext cx="8498026" cy="222796"/>
+            <a:off x="634901" y="883593"/>
+            <a:ext cx="8102798" cy="487561"/>
           </a:xfrm>
           <a:prstGeom prst="rect">
             <a:avLst/>
@@ -3203,6 +3944,72 @@
           <a:bodyPr wrap="square" lIns="0" tIns="0" rIns="0" bIns="0" rtlCol="0" anchor="t"/>
           <a:lstStyle/>
           <a:p>
+            <a:pPr algn="l" marL="342900" indent="-342900">
+              <a:lnSpc>
+                <a:spcPts val="1620"/>
+              </a:lnSpc>
+              <a:spcAft>
+                <a:spcPts val="300"/>
+              </a:spcAft>
+              <a:buSzPct val="100000"/>
+              <a:buChar char="•"/>
+            </a:pPr>
+            <a:r>
+              <a:rPr lang="en-US" sz="1200" b="1" dirty="0">
+                <a:solidFill>
+                  <a:srgbClr val="1C2833"/>
+                </a:solidFill>
+                <a:latin typeface="Arial" pitchFamily="34" charset="0"/>
+                <a:ea typeface="Arial" pitchFamily="34" charset="-122"/>
+                <a:cs typeface="Arial" pitchFamily="34" charset="-120"/>
+              </a:rPr>
+              <a:t>What this module is not.</a:t>
+            </a:r>
+            <a:pPr algn="l" indent="0" marL="0">
+              <a:lnSpc>
+                <a:spcPts val="1620"/>
+              </a:lnSpc>
+              <a:spcAft>
+                <a:spcPts val="300"/>
+              </a:spcAft>
+              <a:buNone/>
+            </a:pPr>
+            <a:r>
+              <a:rPr lang="en-US" sz="1200" dirty="0">
+                <a:solidFill>
+                  <a:srgbClr val="1C2833"/>
+                </a:solidFill>
+                <a:latin typeface="Arial" pitchFamily="34" charset="0"/>
+                <a:ea typeface="Arial" pitchFamily="34" charset="-122"/>
+                <a:cs typeface="Arial" pitchFamily="34" charset="-120"/>
+              </a:rPr>
+              <a:t> Read aloud the safety statement from the README: this is a vocabulary for noticing, not a diagnosis system.</a:t>
+            </a:r>
+            <a:endParaRPr lang="en-US" sz="1200" dirty="0"/>
+          </a:p>
+        </p:txBody>
+      </p:sp>
+      <p:sp>
+        <p:nvSpPr>
+          <p:cNvPr id="5" name="Text 3"/>
+          <p:cNvSpPr/>
+          <p:nvPr/>
+        </p:nvSpPr>
+        <p:spPr>
+          <a:xfrm>
+            <a:off x="406301" y="4434929"/>
+            <a:ext cx="8498026" cy="213271"/>
+          </a:xfrm>
+          <a:prstGeom prst="rect">
+            <a:avLst/>
+          </a:prstGeom>
+          <a:noFill/>
+          <a:ln/>
+        </p:spPr>
+        <p:txBody>
+          <a:bodyPr wrap="square" lIns="0" tIns="0" rIns="0" bIns="0" rtlCol="0" anchor="t"/>
+          <a:lstStyle/>
+          <a:p>
             <a:pPr algn="l" indent="0" marL="0">
               <a:lnSpc>
                 <a:spcPts val="1680"/>
@@ -3224,8 +4031,365 @@
                 <a:ea typeface="Arial" pitchFamily="34" charset="-122"/>
                 <a:cs typeface="Arial" pitchFamily="34" charset="-120"/>
               </a:rPr>
-              <a:t>– Caraka Saṁhitā, </a:t>
-            </a:r>
+              <a:t>Middle ·  · IKS Curriculum</a:t>
+            </a:r>
+            <a:endParaRPr lang="en-US" sz="1200" dirty="0"/>
+          </a:p>
+        </p:txBody>
+      </p:sp>
+    </p:spTree>
+  </p:cSld>
+  <p:clrMapOvr>
+    <a:masterClrMapping/>
+  </p:clrMapOvr>
+</p:sld>
+</file>
+
+<file path=ppt/slides/slide13.xml><?xml version="1.0" encoding="utf-8"?>
+<p:sld xmlns:a="http://schemas.openxmlformats.org/drawingml/2006/main" xmlns:r="http://schemas.openxmlformats.org/officeDocument/2006/relationships" xmlns:p="http://schemas.openxmlformats.org/presentationml/2006/main">
+  <p:cSld name="Slide 13">
+    <p:bg>
+      <p:bgPr>
+        <a:solidFill>
+          <a:srgbClr val="FFFFFF"/>
+        </a:solidFill>
+      </p:bgPr>
+    </p:bg>
+    <p:spTree>
+      <p:nvGrpSpPr>
+        <p:cNvPr id="1" name=""/>
+        <p:cNvGrpSpPr/>
+        <p:nvPr/>
+      </p:nvGrpSpPr>
+      <p:grpSpPr>
+        <a:xfrm>
+          <a:off x="0" y="0"/>
+          <a:ext cx="0" cy="0"/>
+          <a:chOff x="0" y="0"/>
+          <a:chExt cx="0" cy="0"/>
+        </a:xfrm>
+      </p:grpSpPr>
+      <p:sp>
+        <p:nvSpPr>
+          <p:cNvPr id="2" name="Text 0"/>
+          <p:cNvSpPr/>
+          <p:nvPr/>
+        </p:nvSpPr>
+        <p:spPr>
+          <a:xfrm>
+            <a:off x="0" y="0"/>
+            <a:ext cx="9144000" cy="101501"/>
+          </a:xfrm>
+          <a:prstGeom prst="rect">
+            <a:avLst/>
+          </a:prstGeom>
+          <a:solidFill>
+            <a:srgbClr val="277884"/>
+          </a:solidFill>
+          <a:ln/>
+        </p:spPr>
+        <p:txBody>
+          <a:bodyPr wrap="square" rtlCol="0" anchor="ctr"/>
+          <a:lstStyle/>
+          <a:p>
+            <a:pPr indent="0" marL="0">
+              <a:buNone/>
+            </a:pPr>
+            <a:endParaRPr lang="en-US" dirty="0"/>
+          </a:p>
+        </p:txBody>
+      </p:sp>
+      <p:sp>
+        <p:nvSpPr>
+          <p:cNvPr id="3" name="Text 1"/>
+          <p:cNvSpPr/>
+          <p:nvPr/>
+        </p:nvSpPr>
+        <p:spPr>
+          <a:xfrm>
+            <a:off x="406301" y="457051"/>
+            <a:ext cx="8498026" cy="274290"/>
+          </a:xfrm>
+          <a:prstGeom prst="rect">
+            <a:avLst/>
+          </a:prstGeom>
+          <a:noFill/>
+          <a:ln/>
+        </p:spPr>
+        <p:txBody>
+          <a:bodyPr wrap="square" lIns="0" tIns="0" rIns="0" bIns="0" rtlCol="0" anchor="t"/>
+          <a:lstStyle/>
+          <a:p>
+            <a:pPr algn="l" indent="0" marL="0">
+              <a:lnSpc>
+                <a:spcPts val="2160"/>
+              </a:lnSpc>
+              <a:spcBef>
+                <a:spcPts val="600"/>
+              </a:spcBef>
+              <a:spcAft>
+                <a:spcPts val="800"/>
+              </a:spcAft>
+              <a:buNone/>
+            </a:pPr>
+            <a:r>
+              <a:rPr lang="en-US" sz="1800" b="1" dirty="0">
+                <a:solidFill>
+                  <a:srgbClr val="FE4447"/>
+                </a:solidFill>
+                <a:latin typeface="Georgia" pitchFamily="34" charset="0"/>
+                <a:ea typeface="Georgia" pitchFamily="34" charset="-122"/>
+                <a:cs typeface="Georgia" pitchFamily="34" charset="-120"/>
+              </a:rPr>
+              <a:t>Activity (15 min) — Build your tridoṣa page</a:t>
+            </a:r>
+            <a:endParaRPr lang="en-US" sz="1800" dirty="0"/>
+          </a:p>
+        </p:txBody>
+      </p:sp>
+      <p:sp>
+        <p:nvSpPr>
+          <p:cNvPr id="4" name="Text 2"/>
+          <p:cNvSpPr/>
+          <p:nvPr/>
+        </p:nvSpPr>
+        <p:spPr>
+          <a:xfrm>
+            <a:off x="634901" y="883593"/>
+            <a:ext cx="8102798" cy="1257002"/>
+          </a:xfrm>
+          <a:prstGeom prst="rect">
+            <a:avLst/>
+          </a:prstGeom>
+          <a:noFill/>
+          <a:ln/>
+        </p:spPr>
+        <p:txBody>
+          <a:bodyPr wrap="square" lIns="0" tIns="0" rIns="0" bIns="0" rtlCol="0" anchor="t"/>
+          <a:lstStyle/>
+          <a:p>
+            <a:pPr algn="l" marL="342900" indent="-342900">
+              <a:lnSpc>
+                <a:spcPts val="1620"/>
+              </a:lnSpc>
+              <a:spcAft>
+                <a:spcPts val="300"/>
+              </a:spcAft>
+              <a:buSzPct val="100000"/>
+              <a:buChar char="•"/>
+            </a:pPr>
+            <a:r>
+              <a:rPr lang="en-US" sz="1200" dirty="0">
+                <a:solidFill>
+                  <a:srgbClr val="1C2833"/>
+                </a:solidFill>
+                <a:latin typeface="Arial" pitchFamily="34" charset="0"/>
+                <a:ea typeface="Arial" pitchFamily="34" charset="-122"/>
+                <a:cs typeface="Arial" pitchFamily="34" charset="-120"/>
+              </a:rPr>
+              <a:t>Open notebook to a fresh page. At the top, write: </a:t>
+            </a:r>
+            <a:pPr algn="l" indent="0" marL="0">
+              <a:lnSpc>
+                <a:spcPts val="1620"/>
+              </a:lnSpc>
+              <a:spcAft>
+                <a:spcPts val="300"/>
+              </a:spcAft>
+              <a:buNone/>
+            </a:pPr>
+            <a:r>
+              <a:rPr lang="en-US" sz="1200" b="1" dirty="0">
+                <a:solidFill>
+                  <a:srgbClr val="1C2833"/>
+                </a:solidFill>
+                <a:latin typeface="Arial" pitchFamily="34" charset="0"/>
+                <a:ea typeface="Arial" pitchFamily="34" charset="-122"/>
+                <a:cs typeface="Arial" pitchFamily="34" charset="-120"/>
+              </a:rPr>
+              <a:t>tridoṣa — three doṣa</a:t>
+            </a:r>
+            <a:pPr algn="l" indent="0" marL="0">
+              <a:lnSpc>
+                <a:spcPts val="1620"/>
+              </a:lnSpc>
+              <a:spcAft>
+                <a:spcPts val="300"/>
+              </a:spcAft>
+              <a:buNone/>
+            </a:pPr>
+            <a:r>
+              <a:rPr lang="en-US" sz="1200" dirty="0">
+                <a:solidFill>
+                  <a:srgbClr val="1C2833"/>
+                </a:solidFill>
+                <a:latin typeface="Arial" pitchFamily="34" charset="0"/>
+                <a:ea typeface="Arial" pitchFamily="34" charset="-122"/>
+                <a:cs typeface="Arial" pitchFamily="34" charset="-120"/>
+              </a:rPr>
+              <a:t>.</a:t>
+            </a:r>
+            <a:endParaRPr lang="en-US" sz="1200" dirty="0"/>
+          </a:p>
+          <a:p>
+            <a:pPr algn="l" marL="342900" indent="-342900">
+              <a:lnSpc>
+                <a:spcPts val="1620"/>
+              </a:lnSpc>
+              <a:spcAft>
+                <a:spcPts val="300"/>
+              </a:spcAft>
+              <a:buSzPct val="100000"/>
+              <a:buChar char="•"/>
+            </a:pPr>
+            <a:r>
+              <a:rPr lang="en-US" sz="1200" dirty="0">
+                <a:solidFill>
+                  <a:srgbClr val="1C2833"/>
+                </a:solidFill>
+                <a:latin typeface="Arial" pitchFamily="34" charset="0"/>
+                <a:ea typeface="Arial" pitchFamily="34" charset="-122"/>
+                <a:cs typeface="Arial" pitchFamily="34" charset="-120"/>
+              </a:rPr>
+              <a:t>Draw three columns, one per </a:t>
+            </a:r>
+            <a:pPr algn="l" indent="0" marL="0">
+              <a:lnSpc>
+                <a:spcPts val="1620"/>
+              </a:lnSpc>
+              <a:spcAft>
+                <a:spcPts val="300"/>
+              </a:spcAft>
+              <a:buNone/>
+            </a:pPr>
+            <a:r>
+              <a:rPr lang="en-US" sz="1200" i="1" dirty="0">
+                <a:solidFill>
+                  <a:srgbClr val="1C2833"/>
+                </a:solidFill>
+                <a:latin typeface="Arial" pitchFamily="34" charset="0"/>
+                <a:ea typeface="Arial" pitchFamily="34" charset="-122"/>
+                <a:cs typeface="Arial" pitchFamily="34" charset="-120"/>
+              </a:rPr>
+              <a:t>doṣa</a:t>
+            </a:r>
+            <a:pPr algn="l" indent="0" marL="0">
+              <a:lnSpc>
+                <a:spcPts val="1620"/>
+              </a:lnSpc>
+              <a:spcAft>
+                <a:spcPts val="300"/>
+              </a:spcAft>
+              <a:buNone/>
+            </a:pPr>
+            <a:r>
+              <a:rPr lang="en-US" sz="1200" dirty="0">
+                <a:solidFill>
+                  <a:srgbClr val="1C2833"/>
+                </a:solidFill>
+                <a:latin typeface="Arial" pitchFamily="34" charset="0"/>
+                <a:ea typeface="Arial" pitchFamily="34" charset="-122"/>
+                <a:cs typeface="Arial" pitchFamily="34" charset="-120"/>
+              </a:rPr>
+              <a:t>. At the top of each column write the Sanskrit name + IAST + literal meaning.</a:t>
+            </a:r>
+            <a:endParaRPr lang="en-US" sz="1200" dirty="0"/>
+          </a:p>
+          <a:p>
+            <a:pPr algn="l" marL="342900" indent="-342900">
+              <a:lnSpc>
+                <a:spcPts val="1620"/>
+              </a:lnSpc>
+              <a:spcAft>
+                <a:spcPts val="300"/>
+              </a:spcAft>
+              <a:buSzPct val="100000"/>
+              <a:buChar char="•"/>
+            </a:pPr>
+            <a:r>
+              <a:rPr lang="en-US" sz="1200" dirty="0">
+                <a:solidFill>
+                  <a:srgbClr val="1C2833"/>
+                </a:solidFill>
+                <a:latin typeface="Arial" pitchFamily="34" charset="0"/>
+                <a:ea typeface="Arial" pitchFamily="34" charset="-122"/>
+                <a:cs typeface="Arial" pitchFamily="34" charset="-120"/>
+              </a:rPr>
+              <a:t>Below each name, draw the two elements that combine. Use the Module 2 element-symbol you made earlier.</a:t>
+            </a:r>
+            <a:endParaRPr lang="en-US" sz="1200" dirty="0"/>
+          </a:p>
+          <a:p>
+            <a:pPr algn="l" marL="342900" indent="-342900">
+              <a:lnSpc>
+                <a:spcPts val="1620"/>
+              </a:lnSpc>
+              <a:spcAft>
+                <a:spcPts val="300"/>
+              </a:spcAft>
+              <a:buSzPct val="100000"/>
+              <a:buChar char="•"/>
+            </a:pPr>
+            <a:r>
+              <a:rPr lang="en-US" sz="1200" dirty="0">
+                <a:solidFill>
+                  <a:srgbClr val="1C2833"/>
+                </a:solidFill>
+                <a:latin typeface="Arial" pitchFamily="34" charset="0"/>
+                <a:ea typeface="Arial" pitchFamily="34" charset="-122"/>
+                <a:cs typeface="Arial" pitchFamily="34" charset="-120"/>
+              </a:rPr>
+              <a:t>Leave the rest of the column blank — you'll fill it tomorrow.</a:t>
+            </a:r>
+            <a:endParaRPr lang="en-US" sz="1200" dirty="0"/>
+          </a:p>
+          <a:p>
+            <a:pPr algn="l" marL="342900" indent="-342900">
+              <a:lnSpc>
+                <a:spcPts val="1620"/>
+              </a:lnSpc>
+              <a:spcAft>
+                <a:spcPts val="300"/>
+              </a:spcAft>
+              <a:buSzPct val="100000"/>
+              <a:buChar char="•"/>
+            </a:pPr>
+            <a:r>
+              <a:rPr lang="en-US" sz="1200" dirty="0">
+                <a:solidFill>
+                  <a:srgbClr val="1C2833"/>
+                </a:solidFill>
+                <a:latin typeface="Arial" pitchFamily="34" charset="0"/>
+                <a:ea typeface="Arial" pitchFamily="34" charset="-122"/>
+                <a:cs typeface="Arial" pitchFamily="34" charset="-120"/>
+              </a:rPr>
+              <a:t>Partner check: swap notebooks with the person next to you. Read theirs out loud. Catch one mistake if you can.</a:t>
+            </a:r>
+            <a:endParaRPr lang="en-US" sz="1200" dirty="0"/>
+          </a:p>
+        </p:txBody>
+      </p:sp>
+      <p:sp>
+        <p:nvSpPr>
+          <p:cNvPr id="5" name="Text 3"/>
+          <p:cNvSpPr/>
+          <p:nvPr/>
+        </p:nvSpPr>
+        <p:spPr>
+          <a:xfrm>
+            <a:off x="406301" y="4434929"/>
+            <a:ext cx="8498026" cy="213271"/>
+          </a:xfrm>
+          <a:prstGeom prst="rect">
+            <a:avLst/>
+          </a:prstGeom>
+          <a:noFill/>
+          <a:ln/>
+        </p:spPr>
+        <p:txBody>
+          <a:bodyPr wrap="square" lIns="0" tIns="0" rIns="0" bIns="0" rtlCol="0" anchor="t"/>
+          <a:lstStyle/>
+          <a:p>
             <a:pPr algn="l" indent="0" marL="0">
               <a:lnSpc>
                 <a:spcPts val="1680"/>
@@ -3239,6 +4403,182 @@
               <a:buNone/>
             </a:pPr>
             <a:r>
+              <a:rPr lang="en-US" sz="1200" dirty="0">
+                <a:solidFill>
+                  <a:srgbClr val="1C2833"/>
+                </a:solidFill>
+                <a:latin typeface="Arial" pitchFamily="34" charset="0"/>
+                <a:ea typeface="Arial" pitchFamily="34" charset="-122"/>
+                <a:cs typeface="Arial" pitchFamily="34" charset="-120"/>
+              </a:rPr>
+              <a:t>Middle ·  · IKS Curriculum</a:t>
+            </a:r>
+            <a:endParaRPr lang="en-US" sz="1200" dirty="0"/>
+          </a:p>
+        </p:txBody>
+      </p:sp>
+    </p:spTree>
+  </p:cSld>
+  <p:clrMapOvr>
+    <a:masterClrMapping/>
+  </p:clrMapOvr>
+</p:sld>
+</file>
+
+<file path=ppt/slides/slide14.xml><?xml version="1.0" encoding="utf-8"?>
+<p:sld xmlns:a="http://schemas.openxmlformats.org/drawingml/2006/main" xmlns:r="http://schemas.openxmlformats.org/officeDocument/2006/relationships" xmlns:p="http://schemas.openxmlformats.org/presentationml/2006/main">
+  <p:cSld name="Slide 14">
+    <p:bg>
+      <p:bgPr>
+        <a:solidFill>
+          <a:srgbClr val="FFFFFF"/>
+        </a:solidFill>
+      </p:bgPr>
+    </p:bg>
+    <p:spTree>
+      <p:nvGrpSpPr>
+        <p:cNvPr id="1" name=""/>
+        <p:cNvGrpSpPr/>
+        <p:nvPr/>
+      </p:nvGrpSpPr>
+      <p:grpSpPr>
+        <a:xfrm>
+          <a:off x="0" y="0"/>
+          <a:ext cx="0" cy="0"/>
+          <a:chOff x="0" y="0"/>
+          <a:chExt cx="0" cy="0"/>
+        </a:xfrm>
+      </p:grpSpPr>
+      <p:sp>
+        <p:nvSpPr>
+          <p:cNvPr id="2" name="Text 0"/>
+          <p:cNvSpPr/>
+          <p:nvPr/>
+        </p:nvSpPr>
+        <p:spPr>
+          <a:xfrm>
+            <a:off x="0" y="0"/>
+            <a:ext cx="9144000" cy="101501"/>
+          </a:xfrm>
+          <a:prstGeom prst="rect">
+            <a:avLst/>
+          </a:prstGeom>
+          <a:solidFill>
+            <a:srgbClr val="277884"/>
+          </a:solidFill>
+          <a:ln/>
+        </p:spPr>
+        <p:txBody>
+          <a:bodyPr wrap="square" rtlCol="0" anchor="ctr"/>
+          <a:lstStyle/>
+          <a:p>
+            <a:pPr indent="0" marL="0">
+              <a:buNone/>
+            </a:pPr>
+            <a:endParaRPr lang="en-US" dirty="0"/>
+          </a:p>
+        </p:txBody>
+      </p:sp>
+      <p:sp>
+        <p:nvSpPr>
+          <p:cNvPr id="3" name="Text 1"/>
+          <p:cNvSpPr/>
+          <p:nvPr/>
+        </p:nvSpPr>
+        <p:spPr>
+          <a:xfrm>
+            <a:off x="406301" y="457051"/>
+            <a:ext cx="8498026" cy="274290"/>
+          </a:xfrm>
+          <a:prstGeom prst="rect">
+            <a:avLst/>
+          </a:prstGeom>
+          <a:noFill/>
+          <a:ln/>
+        </p:spPr>
+        <p:txBody>
+          <a:bodyPr wrap="square" lIns="0" tIns="0" rIns="0" bIns="0" rtlCol="0" anchor="t"/>
+          <a:lstStyle/>
+          <a:p>
+            <a:pPr algn="l" indent="0" marL="0">
+              <a:lnSpc>
+                <a:spcPts val="2160"/>
+              </a:lnSpc>
+              <a:spcBef>
+                <a:spcPts val="600"/>
+              </a:spcBef>
+              <a:spcAft>
+                <a:spcPts val="800"/>
+              </a:spcAft>
+              <a:buNone/>
+            </a:pPr>
+            <a:r>
+              <a:rPr lang="en-US" sz="1800" b="1" dirty="0">
+                <a:solidFill>
+                  <a:srgbClr val="FE4447"/>
+                </a:solidFill>
+                <a:latin typeface="Georgia" pitchFamily="34" charset="0"/>
+                <a:ea typeface="Georgia" pitchFamily="34" charset="-122"/>
+                <a:cs typeface="Georgia" pitchFamily="34" charset="-120"/>
+              </a:rPr>
+              <a:t>Wrap-up (5 min)</a:t>
+            </a:r>
+            <a:endParaRPr lang="en-US" sz="1800" dirty="0"/>
+          </a:p>
+        </p:txBody>
+      </p:sp>
+      <p:sp>
+        <p:nvSpPr>
+          <p:cNvPr id="4" name="Text 2"/>
+          <p:cNvSpPr/>
+          <p:nvPr/>
+        </p:nvSpPr>
+        <p:spPr>
+          <a:xfrm>
+            <a:off x="634901" y="883593"/>
+            <a:ext cx="8102798" cy="525661"/>
+          </a:xfrm>
+          <a:prstGeom prst="rect">
+            <a:avLst/>
+          </a:prstGeom>
+          <a:noFill/>
+          <a:ln/>
+        </p:spPr>
+        <p:txBody>
+          <a:bodyPr wrap="square" lIns="0" tIns="0" rIns="0" bIns="0" rtlCol="0" anchor="t"/>
+          <a:lstStyle/>
+          <a:p>
+            <a:pPr algn="l" marL="342900" indent="-342900">
+              <a:lnSpc>
+                <a:spcPts val="1620"/>
+              </a:lnSpc>
+              <a:spcAft>
+                <a:spcPts val="300"/>
+              </a:spcAft>
+              <a:buSzPct val="100000"/>
+              <a:buChar char="•"/>
+            </a:pPr>
+            <a:r>
+              <a:rPr lang="en-US" sz="1200" dirty="0">
+                <a:solidFill>
+                  <a:srgbClr val="1C2833"/>
+                </a:solidFill>
+                <a:latin typeface="Arial" pitchFamily="34" charset="0"/>
+                <a:ea typeface="Arial" pitchFamily="34" charset="-122"/>
+                <a:cs typeface="Arial" pitchFamily="34" charset="-120"/>
+              </a:rPr>
+              <a:t>One-question exit: </a:t>
+            </a:r>
+            <a:pPr algn="l" indent="0" marL="0">
+              <a:lnSpc>
+                <a:spcPts val="1620"/>
+              </a:lnSpc>
+              <a:spcAft>
+                <a:spcPts val="300"/>
+              </a:spcAft>
+              <a:buNone/>
+            </a:pPr>
+            <a:r>
               <a:rPr lang="en-US" sz="1200" i="1" dirty="0">
                 <a:solidFill>
                   <a:srgbClr val="1C2833"/>
@@ -3247,10 +4587,1054 @@
                 <a:ea typeface="Arial" pitchFamily="34" charset="-122"/>
                 <a:cs typeface="Arial" pitchFamily="34" charset="-120"/>
               </a:rPr>
+              <a:t>"Which of the three feels most like YOU right now? Don't think hard — just one word."</a:t>
+            </a:r>
+            <a:pPr algn="l" indent="0" marL="0">
+              <a:lnSpc>
+                <a:spcPts val="1620"/>
+              </a:lnSpc>
+              <a:spcAft>
+                <a:spcPts val="300"/>
+              </a:spcAft>
+              <a:buNone/>
+            </a:pPr>
+            <a:r>
+              <a:rPr lang="en-US" sz="1200" dirty="0">
+                <a:solidFill>
+                  <a:srgbClr val="1C2833"/>
+                </a:solidFill>
+                <a:latin typeface="Arial" pitchFamily="34" charset="0"/>
+                <a:ea typeface="Arial" pitchFamily="34" charset="-122"/>
+                <a:cs typeface="Arial" pitchFamily="34" charset="-120"/>
+              </a:rPr>
+              <a:t> Sticky note.</a:t>
+            </a:r>
+            <a:endParaRPr lang="en-US" sz="1200" dirty="0"/>
+          </a:p>
+          <a:p>
+            <a:pPr algn="l" marL="342900" indent="-342900">
+              <a:lnSpc>
+                <a:spcPts val="1620"/>
+              </a:lnSpc>
+              <a:spcAft>
+                <a:spcPts val="300"/>
+              </a:spcAft>
+              <a:buSzPct val="100000"/>
+              <a:buChar char="•"/>
+            </a:pPr>
+            <a:r>
+              <a:rPr lang="en-US" sz="1200" dirty="0">
+                <a:solidFill>
+                  <a:srgbClr val="1C2833"/>
+                </a:solidFill>
+                <a:latin typeface="Arial" pitchFamily="34" charset="0"/>
+                <a:ea typeface="Arial" pitchFamily="34" charset="-122"/>
+                <a:cs typeface="Arial" pitchFamily="34" charset="-120"/>
+              </a:rPr>
+              <a:t>Preview: </a:t>
+            </a:r>
+            <a:pPr algn="l" indent="0" marL="0">
+              <a:lnSpc>
+                <a:spcPts val="1620"/>
+              </a:lnSpc>
+              <a:spcAft>
+                <a:spcPts val="300"/>
+              </a:spcAft>
+              <a:buNone/>
+            </a:pPr>
+            <a:r>
+              <a:rPr lang="en-US" sz="1200" i="1" dirty="0">
+                <a:solidFill>
+                  <a:srgbClr val="1C2833"/>
+                </a:solidFill>
+                <a:latin typeface="Arial" pitchFamily="34" charset="0"/>
+                <a:ea typeface="Arial" pitchFamily="34" charset="-122"/>
+                <a:cs typeface="Arial" pitchFamily="34" charset="-120"/>
+              </a:rPr>
+              <a:t>"Tomorrow we fill in the rest of the columns — what each doṣa actually does in your body."</a:t>
+            </a:r>
+            <a:endParaRPr lang="en-US" sz="1200" dirty="0"/>
+          </a:p>
+        </p:txBody>
+      </p:sp>
+      <p:sp>
+        <p:nvSpPr>
+          <p:cNvPr id="5" name="Text 3"/>
+          <p:cNvSpPr/>
+          <p:nvPr/>
+        </p:nvSpPr>
+        <p:spPr>
+          <a:xfrm>
+            <a:off x="406301" y="4434929"/>
+            <a:ext cx="8498026" cy="213271"/>
+          </a:xfrm>
+          <a:prstGeom prst="rect">
+            <a:avLst/>
+          </a:prstGeom>
+          <a:noFill/>
+          <a:ln/>
+        </p:spPr>
+        <p:txBody>
+          <a:bodyPr wrap="square" lIns="0" tIns="0" rIns="0" bIns="0" rtlCol="0" anchor="t"/>
+          <a:lstStyle/>
+          <a:p>
+            <a:pPr algn="l" indent="0" marL="0">
+              <a:lnSpc>
+                <a:spcPts val="1680"/>
+              </a:lnSpc>
+              <a:spcBef>
+                <a:spcPts val="300"/>
+              </a:spcBef>
+              <a:spcAft>
+                <a:spcPts val="300"/>
+              </a:spcAft>
+              <a:buNone/>
+            </a:pPr>
+            <a:r>
+              <a:rPr lang="en-US" sz="1200" dirty="0">
+                <a:solidFill>
+                  <a:srgbClr val="1C2833"/>
+                </a:solidFill>
+                <a:latin typeface="Arial" pitchFamily="34" charset="0"/>
+                <a:ea typeface="Arial" pitchFamily="34" charset="-122"/>
+                <a:cs typeface="Arial" pitchFamily="34" charset="-120"/>
+              </a:rPr>
+              <a:t>Middle ·  · IKS Curriculum</a:t>
+            </a:r>
+            <a:endParaRPr lang="en-US" sz="1200" dirty="0"/>
+          </a:p>
+        </p:txBody>
+      </p:sp>
+    </p:spTree>
+  </p:cSld>
+  <p:clrMapOvr>
+    <a:masterClrMapping/>
+  </p:clrMapOvr>
+</p:sld>
+</file>
+
+<file path=ppt/slides/slide15.xml><?xml version="1.0" encoding="utf-8"?>
+<p:sld xmlns:a="http://schemas.openxmlformats.org/drawingml/2006/main" xmlns:r="http://schemas.openxmlformats.org/officeDocument/2006/relationships" xmlns:p="http://schemas.openxmlformats.org/presentationml/2006/main">
+  <p:cSld name="Slide 15">
+    <p:bg>
+      <p:bgPr>
+        <a:solidFill>
+          <a:srgbClr val="FFFFFF"/>
+        </a:solidFill>
+      </p:bgPr>
+    </p:bg>
+    <p:spTree>
+      <p:nvGrpSpPr>
+        <p:cNvPr id="1" name=""/>
+        <p:cNvGrpSpPr/>
+        <p:nvPr/>
+      </p:nvGrpSpPr>
+      <p:grpSpPr>
+        <a:xfrm>
+          <a:off x="0" y="0"/>
+          <a:ext cx="0" cy="0"/>
+          <a:chOff x="0" y="0"/>
+          <a:chExt cx="0" cy="0"/>
+        </a:xfrm>
+      </p:grpSpPr>
+      <p:sp>
+        <p:nvSpPr>
+          <p:cNvPr id="2" name="Text 0"/>
+          <p:cNvSpPr/>
+          <p:nvPr/>
+        </p:nvSpPr>
+        <p:spPr>
+          <a:xfrm>
+            <a:off x="0" y="0"/>
+            <a:ext cx="9144000" cy="101501"/>
+          </a:xfrm>
+          <a:prstGeom prst="rect">
+            <a:avLst/>
+          </a:prstGeom>
+          <a:solidFill>
+            <a:srgbClr val="277884"/>
+          </a:solidFill>
+          <a:ln/>
+        </p:spPr>
+        <p:txBody>
+          <a:bodyPr wrap="square" rtlCol="0" anchor="ctr"/>
+          <a:lstStyle/>
+          <a:p>
+            <a:pPr indent="0" marL="0">
+              <a:buNone/>
+            </a:pPr>
+            <a:endParaRPr lang="en-US" dirty="0"/>
+          </a:p>
+        </p:txBody>
+      </p:sp>
+      <p:sp>
+        <p:nvSpPr>
+          <p:cNvPr id="3" name="Text 1"/>
+          <p:cNvSpPr/>
+          <p:nvPr/>
+        </p:nvSpPr>
+        <p:spPr>
+          <a:xfrm>
+            <a:off x="406301" y="457051"/>
+            <a:ext cx="8498026" cy="274290"/>
+          </a:xfrm>
+          <a:prstGeom prst="rect">
+            <a:avLst/>
+          </a:prstGeom>
+          <a:noFill/>
+          <a:ln/>
+        </p:spPr>
+        <p:txBody>
+          <a:bodyPr wrap="square" lIns="0" tIns="0" rIns="0" bIns="0" rtlCol="0" anchor="t"/>
+          <a:lstStyle/>
+          <a:p>
+            <a:pPr algn="l" indent="0" marL="0">
+              <a:lnSpc>
+                <a:spcPts val="2160"/>
+              </a:lnSpc>
+              <a:spcBef>
+                <a:spcPts val="600"/>
+              </a:spcBef>
+              <a:spcAft>
+                <a:spcPts val="800"/>
+              </a:spcAft>
+              <a:buNone/>
+            </a:pPr>
+            <a:r>
+              <a:rPr lang="en-US" sz="1800" b="1" dirty="0">
+                <a:solidFill>
+                  <a:srgbClr val="FE4447"/>
+                </a:solidFill>
+                <a:latin typeface="Georgia" pitchFamily="34" charset="0"/>
+                <a:ea typeface="Georgia" pitchFamily="34" charset="-122"/>
+                <a:cs typeface="Georgia" pitchFamily="34" charset="-120"/>
+              </a:rPr>
+              <a:t>Student-facing content</a:t>
+            </a:r>
+            <a:endParaRPr lang="en-US" sz="1800" dirty="0"/>
+          </a:p>
+        </p:txBody>
+      </p:sp>
+      <p:sp>
+        <p:nvSpPr>
+          <p:cNvPr id="4" name="Text 2"/>
+          <p:cNvSpPr/>
+          <p:nvPr/>
+        </p:nvSpPr>
+        <p:spPr>
+          <a:xfrm>
+            <a:off x="406301" y="883593"/>
+            <a:ext cx="8331398" cy="1881187"/>
+          </a:xfrm>
+          <a:prstGeom prst="rect">
+            <a:avLst/>
+          </a:prstGeom>
+          <a:solidFill>
+            <a:srgbClr val="F4F8F9"/>
+          </a:solidFill>
+          <a:ln/>
+        </p:spPr>
+        <p:txBody>
+          <a:bodyPr wrap="square" rtlCol="0" anchor="ctr"/>
+          <a:lstStyle/>
+          <a:p>
+            <a:pPr indent="0" marL="0">
+              <a:buNone/>
+            </a:pPr>
+            <a:endParaRPr lang="en-US" dirty="0"/>
+          </a:p>
+        </p:txBody>
+      </p:sp>
+      <p:sp>
+        <p:nvSpPr>
+          <p:cNvPr id="5" name="Shape 3"/>
+          <p:cNvSpPr/>
+          <p:nvPr/>
+        </p:nvSpPr>
+        <p:spPr>
+          <a:xfrm>
+            <a:off x="434876" y="883593"/>
+            <a:ext cx="0" cy="1881187"/>
+          </a:xfrm>
+          <a:prstGeom prst="line">
+            <a:avLst/>
+          </a:prstGeom>
+          <a:noFill/>
+          <a:ln w="57150">
+            <a:solidFill>
+              <a:srgbClr val="FE4447"/>
+            </a:solidFill>
+            <a:prstDash val="solid"/>
+          </a:ln>
+        </p:spPr>
+      </p:sp>
+      <p:sp>
+        <p:nvSpPr>
+          <p:cNvPr id="6" name="Text 4"/>
+          <p:cNvSpPr/>
+          <p:nvPr/>
+        </p:nvSpPr>
+        <p:spPr>
+          <a:xfrm>
+            <a:off x="692051" y="1074093"/>
+            <a:ext cx="7973389" cy="230981"/>
+          </a:xfrm>
+          <a:prstGeom prst="rect">
+            <a:avLst/>
+          </a:prstGeom>
+          <a:noFill/>
+          <a:ln/>
+        </p:spPr>
+        <p:txBody>
+          <a:bodyPr wrap="square" lIns="0" tIns="0" rIns="0" bIns="0" rtlCol="0" anchor="t"/>
+          <a:lstStyle/>
+          <a:p>
+            <a:pPr algn="l" indent="0" marL="0">
+              <a:lnSpc>
+                <a:spcPts val="1820"/>
+              </a:lnSpc>
+              <a:spcBef>
+                <a:spcPts val="300"/>
+              </a:spcBef>
+              <a:spcAft>
+                <a:spcPts val="300"/>
+              </a:spcAft>
+              <a:buNone/>
+            </a:pPr>
+            <a:r>
+              <a:rPr lang="en-US" sz="1300" dirty="0">
+                <a:solidFill>
+                  <a:srgbClr val="1C2833"/>
+                </a:solidFill>
+                <a:latin typeface="Georgia" pitchFamily="34" charset="0"/>
+                <a:ea typeface="Georgia" pitchFamily="34" charset="-122"/>
+                <a:cs typeface="Georgia" pitchFamily="34" charset="-120"/>
+              </a:rPr>
+              <a:t>*</a:t>
+            </a:r>
+            <a:pPr algn="l" indent="0" marL="0">
+              <a:lnSpc>
+                <a:spcPts val="1820"/>
+              </a:lnSpc>
+              <a:spcBef>
+                <a:spcPts val="300"/>
+              </a:spcBef>
+              <a:spcAft>
+                <a:spcPts val="300"/>
+              </a:spcAft>
+              <a:buNone/>
+            </a:pPr>
+            <a:r>
+              <a:rPr lang="en-US" sz="1300" i="1" dirty="0">
+                <a:solidFill>
+                  <a:srgbClr val="1C2833"/>
+                </a:solidFill>
+                <a:latin typeface="Georgia" pitchFamily="34" charset="0"/>
+                <a:ea typeface="Georgia" pitchFamily="34" charset="-122"/>
+                <a:cs typeface="Georgia" pitchFamily="34" charset="-120"/>
+              </a:rPr>
+              <a:t>Three categories of</a:t>
+            </a:r>
+            <a:pPr algn="l" indent="0" marL="0">
+              <a:lnSpc>
+                <a:spcPts val="1820"/>
+              </a:lnSpc>
+              <a:spcBef>
+                <a:spcPts val="300"/>
+              </a:spcBef>
+              <a:spcAft>
+                <a:spcPts val="300"/>
+              </a:spcAft>
+              <a:buNone/>
+            </a:pPr>
+            <a:r>
+              <a:rPr lang="en-US" sz="1300" dirty="0">
+                <a:solidFill>
+                  <a:srgbClr val="1C2833"/>
+                </a:solidFill>
+                <a:latin typeface="Georgia" pitchFamily="34" charset="0"/>
+                <a:ea typeface="Georgia" pitchFamily="34" charset="-122"/>
+                <a:cs typeface="Georgia" pitchFamily="34" charset="-120"/>
+              </a:rPr>
+              <a:t>doing</a:t>
+            </a:r>
+            <a:pPr algn="l" indent="0" marL="0">
+              <a:lnSpc>
+                <a:spcPts val="1820"/>
+              </a:lnSpc>
+              <a:spcBef>
+                <a:spcPts val="300"/>
+              </a:spcBef>
+              <a:spcAft>
+                <a:spcPts val="300"/>
+              </a:spcAft>
+              <a:buNone/>
+            </a:pPr>
+            <a:r>
+              <a:rPr lang="en-US" sz="1300" i="1" dirty="0">
+                <a:solidFill>
+                  <a:srgbClr val="1C2833"/>
+                </a:solidFill>
+                <a:latin typeface="Georgia" pitchFamily="34" charset="0"/>
+                <a:ea typeface="Georgia" pitchFamily="34" charset="-122"/>
+                <a:cs typeface="Georgia" pitchFamily="34" charset="-120"/>
+              </a:rPr>
+              <a:t>:</a:t>
+            </a:r>
+            <a:pPr algn="l" indent="0" marL="0">
+              <a:lnSpc>
+                <a:spcPts val="1820"/>
+              </a:lnSpc>
+              <a:spcBef>
+                <a:spcPts val="300"/>
+              </a:spcBef>
+              <a:spcAft>
+                <a:spcPts val="300"/>
+              </a:spcAft>
+              <a:buNone/>
+            </a:pPr>
+            <a:r>
+              <a:rPr lang="en-US" sz="1300" dirty="0">
+                <a:solidFill>
+                  <a:srgbClr val="1C2833"/>
+                </a:solidFill>
+                <a:latin typeface="Georgia" pitchFamily="34" charset="0"/>
+                <a:ea typeface="Georgia" pitchFamily="34" charset="-122"/>
+                <a:cs typeface="Georgia" pitchFamily="34" charset="-120"/>
+              </a:rPr>
+              <a:t>*</a:t>
+            </a:r>
+            <a:endParaRPr lang="en-US" sz="1300" dirty="0"/>
+          </a:p>
+        </p:txBody>
+      </p:sp>
+      <p:sp>
+        <p:nvSpPr>
+          <p:cNvPr id="7" name="Text 5"/>
+          <p:cNvSpPr/>
+          <p:nvPr/>
+        </p:nvSpPr>
+        <p:spPr>
+          <a:xfrm>
+            <a:off x="692051" y="1343174"/>
+            <a:ext cx="7973389" cy="692944"/>
+          </a:xfrm>
+          <a:prstGeom prst="rect">
+            <a:avLst/>
+          </a:prstGeom>
+          <a:noFill/>
+          <a:ln/>
+        </p:spPr>
+        <p:txBody>
+          <a:bodyPr wrap="square" lIns="0" tIns="0" rIns="0" bIns="0" rtlCol="0" anchor="t"/>
+          <a:lstStyle/>
+          <a:p>
+            <a:pPr algn="l" indent="0" marL="0">
+              <a:lnSpc>
+                <a:spcPts val="1820"/>
+              </a:lnSpc>
+              <a:spcBef>
+                <a:spcPts val="300"/>
+              </a:spcBef>
+              <a:spcAft>
+                <a:spcPts val="300"/>
+              </a:spcAft>
+              <a:buNone/>
+            </a:pPr>
+            <a:r>
+              <a:rPr lang="en-US" sz="1300" dirty="0">
+                <a:solidFill>
+                  <a:srgbClr val="1C2833"/>
+                </a:solidFill>
+                <a:latin typeface="Georgia" pitchFamily="34" charset="0"/>
+                <a:ea typeface="Georgia" pitchFamily="34" charset="-122"/>
+                <a:cs typeface="Georgia" pitchFamily="34" charset="-120"/>
+              </a:rPr>
+              <a:t>| Doṣa | Sanskrit | Elements | What it does | |------|----------|----------|---------------| | </a:t>
+            </a:r>
+            <a:pPr algn="l" indent="0" marL="0">
+              <a:lnSpc>
+                <a:spcPts val="1820"/>
+              </a:lnSpc>
+              <a:spcBef>
+                <a:spcPts val="300"/>
+              </a:spcBef>
+              <a:spcAft>
+                <a:spcPts val="300"/>
+              </a:spcAft>
+              <a:buNone/>
+            </a:pPr>
+            <a:r>
+              <a:rPr lang="en-US" sz="1300" i="1" dirty="0">
+                <a:solidFill>
+                  <a:srgbClr val="1C2833"/>
+                </a:solidFill>
+                <a:latin typeface="Georgia" pitchFamily="34" charset="0"/>
+                <a:ea typeface="Georgia" pitchFamily="34" charset="-122"/>
+                <a:cs typeface="Georgia" pitchFamily="34" charset="-120"/>
+              </a:rPr>
+              <a:t>vāta</a:t>
+            </a:r>
+            <a:pPr algn="l" indent="0" marL="0">
+              <a:lnSpc>
+                <a:spcPts val="1820"/>
+              </a:lnSpc>
+              <a:spcBef>
+                <a:spcPts val="300"/>
+              </a:spcBef>
+              <a:spcAft>
+                <a:spcPts val="300"/>
+              </a:spcAft>
+              <a:buNone/>
+            </a:pPr>
+            <a:r>
+              <a:rPr lang="en-US" sz="1300" dirty="0">
+                <a:solidFill>
+                  <a:srgbClr val="1C2833"/>
+                </a:solidFill>
+                <a:latin typeface="Georgia" pitchFamily="34" charset="0"/>
+                <a:ea typeface="Georgia" pitchFamily="34" charset="-122"/>
+                <a:cs typeface="Georgia" pitchFamily="34" charset="-120"/>
+              </a:rPr>
+              <a:t> | "wind" | </a:t>
+            </a:r>
+            <a:pPr algn="l" indent="0" marL="0">
+              <a:lnSpc>
+                <a:spcPts val="1820"/>
+              </a:lnSpc>
+              <a:spcBef>
+                <a:spcPts val="300"/>
+              </a:spcBef>
+              <a:spcAft>
+                <a:spcPts val="300"/>
+              </a:spcAft>
+              <a:buNone/>
+            </a:pPr>
+            <a:r>
+              <a:rPr lang="en-US" sz="1300" i="1" dirty="0">
+                <a:solidFill>
+                  <a:srgbClr val="1C2833"/>
+                </a:solidFill>
+                <a:latin typeface="Georgia" pitchFamily="34" charset="0"/>
+                <a:ea typeface="Georgia" pitchFamily="34" charset="-122"/>
+                <a:cs typeface="Georgia" pitchFamily="34" charset="-120"/>
+              </a:rPr>
+              <a:t>ākāśa</a:t>
+            </a:r>
+            <a:pPr algn="l" indent="0" marL="0">
+              <a:lnSpc>
+                <a:spcPts val="1820"/>
+              </a:lnSpc>
+              <a:spcBef>
+                <a:spcPts val="300"/>
+              </a:spcBef>
+              <a:spcAft>
+                <a:spcPts val="300"/>
+              </a:spcAft>
+              <a:buNone/>
+            </a:pPr>
+            <a:r>
+              <a:rPr lang="en-US" sz="1300" dirty="0">
+                <a:solidFill>
+                  <a:srgbClr val="1C2833"/>
+                </a:solidFill>
+                <a:latin typeface="Georgia" pitchFamily="34" charset="0"/>
+                <a:ea typeface="Georgia" pitchFamily="34" charset="-122"/>
+                <a:cs typeface="Georgia" pitchFamily="34" charset="-120"/>
+              </a:rPr>
+              <a:t> + </a:t>
+            </a:r>
+            <a:pPr algn="l" indent="0" marL="0">
+              <a:lnSpc>
+                <a:spcPts val="1820"/>
+              </a:lnSpc>
+              <a:spcBef>
+                <a:spcPts val="300"/>
+              </a:spcBef>
+              <a:spcAft>
+                <a:spcPts val="300"/>
+              </a:spcAft>
+              <a:buNone/>
+            </a:pPr>
+            <a:r>
+              <a:rPr lang="en-US" sz="1300" i="1" dirty="0">
+                <a:solidFill>
+                  <a:srgbClr val="1C2833"/>
+                </a:solidFill>
+                <a:latin typeface="Georgia" pitchFamily="34" charset="0"/>
+                <a:ea typeface="Georgia" pitchFamily="34" charset="-122"/>
+                <a:cs typeface="Georgia" pitchFamily="34" charset="-120"/>
+              </a:rPr>
+              <a:t>vāyu</a:t>
+            </a:r>
+            <a:pPr algn="l" indent="0" marL="0">
+              <a:lnSpc>
+                <a:spcPts val="1820"/>
+              </a:lnSpc>
+              <a:spcBef>
+                <a:spcPts val="300"/>
+              </a:spcBef>
+              <a:spcAft>
+                <a:spcPts val="300"/>
+              </a:spcAft>
+              <a:buNone/>
+            </a:pPr>
+            <a:r>
+              <a:rPr lang="en-US" sz="1300" dirty="0">
+                <a:solidFill>
+                  <a:srgbClr val="1C2833"/>
+                </a:solidFill>
+                <a:latin typeface="Georgia" pitchFamily="34" charset="0"/>
+                <a:ea typeface="Georgia" pitchFamily="34" charset="-122"/>
+                <a:cs typeface="Georgia" pitchFamily="34" charset="-120"/>
+              </a:rPr>
+              <a:t> | moves things | | </a:t>
+            </a:r>
+            <a:pPr algn="l" indent="0" marL="0">
+              <a:lnSpc>
+                <a:spcPts val="1820"/>
+              </a:lnSpc>
+              <a:spcBef>
+                <a:spcPts val="300"/>
+              </a:spcBef>
+              <a:spcAft>
+                <a:spcPts val="300"/>
+              </a:spcAft>
+              <a:buNone/>
+            </a:pPr>
+            <a:r>
+              <a:rPr lang="en-US" sz="1300" i="1" dirty="0">
+                <a:solidFill>
+                  <a:srgbClr val="1C2833"/>
+                </a:solidFill>
+                <a:latin typeface="Georgia" pitchFamily="34" charset="0"/>
+                <a:ea typeface="Georgia" pitchFamily="34" charset="-122"/>
+                <a:cs typeface="Georgia" pitchFamily="34" charset="-120"/>
+              </a:rPr>
+              <a:t>pitta</a:t>
+            </a:r>
+            <a:pPr algn="l" indent="0" marL="0">
+              <a:lnSpc>
+                <a:spcPts val="1820"/>
+              </a:lnSpc>
+              <a:spcBef>
+                <a:spcPts val="300"/>
+              </a:spcBef>
+              <a:spcAft>
+                <a:spcPts val="300"/>
+              </a:spcAft>
+              <a:buNone/>
+            </a:pPr>
+            <a:r>
+              <a:rPr lang="en-US" sz="1300" dirty="0">
+                <a:solidFill>
+                  <a:srgbClr val="1C2833"/>
+                </a:solidFill>
+                <a:latin typeface="Georgia" pitchFamily="34" charset="0"/>
+                <a:ea typeface="Georgia" pitchFamily="34" charset="-122"/>
+                <a:cs typeface="Georgia" pitchFamily="34" charset="-120"/>
+              </a:rPr>
+              <a:t> | "heater" | </a:t>
+            </a:r>
+            <a:pPr algn="l" indent="0" marL="0">
+              <a:lnSpc>
+                <a:spcPts val="1820"/>
+              </a:lnSpc>
+              <a:spcBef>
+                <a:spcPts val="300"/>
+              </a:spcBef>
+              <a:spcAft>
+                <a:spcPts val="300"/>
+              </a:spcAft>
+              <a:buNone/>
+            </a:pPr>
+            <a:r>
+              <a:rPr lang="en-US" sz="1300" i="1" dirty="0">
+                <a:solidFill>
+                  <a:srgbClr val="1C2833"/>
+                </a:solidFill>
+                <a:latin typeface="Georgia" pitchFamily="34" charset="0"/>
+                <a:ea typeface="Georgia" pitchFamily="34" charset="-122"/>
+                <a:cs typeface="Georgia" pitchFamily="34" charset="-120"/>
+              </a:rPr>
+              <a:t>tejas</a:t>
+            </a:r>
+            <a:pPr algn="l" indent="0" marL="0">
+              <a:lnSpc>
+                <a:spcPts val="1820"/>
+              </a:lnSpc>
+              <a:spcBef>
+                <a:spcPts val="300"/>
+              </a:spcBef>
+              <a:spcAft>
+                <a:spcPts val="300"/>
+              </a:spcAft>
+              <a:buNone/>
+            </a:pPr>
+            <a:r>
+              <a:rPr lang="en-US" sz="1300" dirty="0">
+                <a:solidFill>
+                  <a:srgbClr val="1C2833"/>
+                </a:solidFill>
+                <a:latin typeface="Georgia" pitchFamily="34" charset="0"/>
+                <a:ea typeface="Georgia" pitchFamily="34" charset="-122"/>
+                <a:cs typeface="Georgia" pitchFamily="34" charset="-120"/>
+              </a:rPr>
+              <a:t> + </a:t>
+            </a:r>
+            <a:pPr algn="l" indent="0" marL="0">
+              <a:lnSpc>
+                <a:spcPts val="1820"/>
+              </a:lnSpc>
+              <a:spcBef>
+                <a:spcPts val="300"/>
+              </a:spcBef>
+              <a:spcAft>
+                <a:spcPts val="300"/>
+              </a:spcAft>
+              <a:buNone/>
+            </a:pPr>
+            <a:r>
+              <a:rPr lang="en-US" sz="1300" i="1" dirty="0">
+                <a:solidFill>
+                  <a:srgbClr val="1C2833"/>
+                </a:solidFill>
+                <a:latin typeface="Georgia" pitchFamily="34" charset="0"/>
+                <a:ea typeface="Georgia" pitchFamily="34" charset="-122"/>
+                <a:cs typeface="Georgia" pitchFamily="34" charset="-120"/>
+              </a:rPr>
+              <a:t>ap</a:t>
+            </a:r>
+            <a:pPr algn="l" indent="0" marL="0">
+              <a:lnSpc>
+                <a:spcPts val="1820"/>
+              </a:lnSpc>
+              <a:spcBef>
+                <a:spcPts val="300"/>
+              </a:spcBef>
+              <a:spcAft>
+                <a:spcPts val="300"/>
+              </a:spcAft>
+              <a:buNone/>
+            </a:pPr>
+            <a:r>
+              <a:rPr lang="en-US" sz="1300" dirty="0">
+                <a:solidFill>
+                  <a:srgbClr val="1C2833"/>
+                </a:solidFill>
+                <a:latin typeface="Georgia" pitchFamily="34" charset="0"/>
+                <a:ea typeface="Georgia" pitchFamily="34" charset="-122"/>
+                <a:cs typeface="Georgia" pitchFamily="34" charset="-120"/>
+              </a:rPr>
+              <a:t> | transforms things | | </a:t>
+            </a:r>
+            <a:pPr algn="l" indent="0" marL="0">
+              <a:lnSpc>
+                <a:spcPts val="1820"/>
+              </a:lnSpc>
+              <a:spcBef>
+                <a:spcPts val="300"/>
+              </a:spcBef>
+              <a:spcAft>
+                <a:spcPts val="300"/>
+              </a:spcAft>
+              <a:buNone/>
+            </a:pPr>
+            <a:r>
+              <a:rPr lang="en-US" sz="1300" i="1" dirty="0">
+                <a:solidFill>
+                  <a:srgbClr val="1C2833"/>
+                </a:solidFill>
+                <a:latin typeface="Georgia" pitchFamily="34" charset="0"/>
+                <a:ea typeface="Georgia" pitchFamily="34" charset="-122"/>
+                <a:cs typeface="Georgia" pitchFamily="34" charset="-120"/>
+              </a:rPr>
+              <a:t>kapha</a:t>
+            </a:r>
+            <a:pPr algn="l" indent="0" marL="0">
+              <a:lnSpc>
+                <a:spcPts val="1820"/>
+              </a:lnSpc>
+              <a:spcBef>
+                <a:spcPts val="300"/>
+              </a:spcBef>
+              <a:spcAft>
+                <a:spcPts val="300"/>
+              </a:spcAft>
+              <a:buNone/>
+            </a:pPr>
+            <a:r>
+              <a:rPr lang="en-US" sz="1300" dirty="0">
+                <a:solidFill>
+                  <a:srgbClr val="1C2833"/>
+                </a:solidFill>
+                <a:latin typeface="Georgia" pitchFamily="34" charset="0"/>
+                <a:ea typeface="Georgia" pitchFamily="34" charset="-122"/>
+                <a:cs typeface="Georgia" pitchFamily="34" charset="-120"/>
+              </a:rPr>
+              <a:t> | "binder" | </a:t>
+            </a:r>
+            <a:pPr algn="l" indent="0" marL="0">
+              <a:lnSpc>
+                <a:spcPts val="1820"/>
+              </a:lnSpc>
+              <a:spcBef>
+                <a:spcPts val="300"/>
+              </a:spcBef>
+              <a:spcAft>
+                <a:spcPts val="300"/>
+              </a:spcAft>
+              <a:buNone/>
+            </a:pPr>
+            <a:r>
+              <a:rPr lang="en-US" sz="1300" i="1" dirty="0">
+                <a:solidFill>
+                  <a:srgbClr val="1C2833"/>
+                </a:solidFill>
+                <a:latin typeface="Georgia" pitchFamily="34" charset="0"/>
+                <a:ea typeface="Georgia" pitchFamily="34" charset="-122"/>
+                <a:cs typeface="Georgia" pitchFamily="34" charset="-120"/>
+              </a:rPr>
+              <a:t>ap</a:t>
+            </a:r>
+            <a:pPr algn="l" indent="0" marL="0">
+              <a:lnSpc>
+                <a:spcPts val="1820"/>
+              </a:lnSpc>
+              <a:spcBef>
+                <a:spcPts val="300"/>
+              </a:spcBef>
+              <a:spcAft>
+                <a:spcPts val="300"/>
+              </a:spcAft>
+              <a:buNone/>
+            </a:pPr>
+            <a:r>
+              <a:rPr lang="en-US" sz="1300" dirty="0">
+                <a:solidFill>
+                  <a:srgbClr val="1C2833"/>
+                </a:solidFill>
+                <a:latin typeface="Georgia" pitchFamily="34" charset="0"/>
+                <a:ea typeface="Georgia" pitchFamily="34" charset="-122"/>
+                <a:cs typeface="Georgia" pitchFamily="34" charset="-120"/>
+              </a:rPr>
+              <a:t> + </a:t>
+            </a:r>
+            <a:pPr algn="l" indent="0" marL="0">
+              <a:lnSpc>
+                <a:spcPts val="1820"/>
+              </a:lnSpc>
+              <a:spcBef>
+                <a:spcPts val="300"/>
+              </a:spcBef>
+              <a:spcAft>
+                <a:spcPts val="300"/>
+              </a:spcAft>
+              <a:buNone/>
+            </a:pPr>
+            <a:r>
+              <a:rPr lang="en-US" sz="1300" i="1" dirty="0">
+                <a:solidFill>
+                  <a:srgbClr val="1C2833"/>
+                </a:solidFill>
+                <a:latin typeface="Georgia" pitchFamily="34" charset="0"/>
+                <a:ea typeface="Georgia" pitchFamily="34" charset="-122"/>
+                <a:cs typeface="Georgia" pitchFamily="34" charset="-120"/>
+              </a:rPr>
+              <a:t>pṛthvī</a:t>
+            </a:r>
+            <a:pPr algn="l" indent="0" marL="0">
+              <a:lnSpc>
+                <a:spcPts val="1820"/>
+              </a:lnSpc>
+              <a:spcBef>
+                <a:spcPts val="300"/>
+              </a:spcBef>
+              <a:spcAft>
+                <a:spcPts val="300"/>
+              </a:spcAft>
+              <a:buNone/>
+            </a:pPr>
+            <a:r>
+              <a:rPr lang="en-US" sz="1300" dirty="0">
+                <a:solidFill>
+                  <a:srgbClr val="1C2833"/>
+                </a:solidFill>
+                <a:latin typeface="Georgia" pitchFamily="34" charset="0"/>
+                <a:ea typeface="Georgia" pitchFamily="34" charset="-122"/>
+                <a:cs typeface="Georgia" pitchFamily="34" charset="-120"/>
+              </a:rPr>
+              <a:t> | holds things |</a:t>
+            </a:r>
+            <a:endParaRPr lang="en-US" sz="1300" dirty="0"/>
+          </a:p>
+        </p:txBody>
+      </p:sp>
+      <p:sp>
+        <p:nvSpPr>
+          <p:cNvPr id="8" name="Text 6"/>
+          <p:cNvSpPr/>
+          <p:nvPr/>
+        </p:nvSpPr>
+        <p:spPr>
+          <a:xfrm>
+            <a:off x="692051" y="2074218"/>
+            <a:ext cx="7973389" cy="230981"/>
+          </a:xfrm>
+          <a:prstGeom prst="rect">
+            <a:avLst/>
+          </a:prstGeom>
+          <a:noFill/>
+          <a:ln/>
+        </p:spPr>
+        <p:txBody>
+          <a:bodyPr wrap="square" lIns="0" tIns="0" rIns="0" bIns="0" rtlCol="0" anchor="t"/>
+          <a:lstStyle/>
+          <a:p>
+            <a:pPr algn="l" indent="0" marL="0">
+              <a:lnSpc>
+                <a:spcPts val="1820"/>
+              </a:lnSpc>
+              <a:spcBef>
+                <a:spcPts val="300"/>
+              </a:spcBef>
+              <a:spcAft>
+                <a:spcPts val="300"/>
+              </a:spcAft>
+              <a:buNone/>
+            </a:pPr>
+            <a:r>
+              <a:rPr lang="en-US" sz="1300" i="1" dirty="0">
+                <a:solidFill>
+                  <a:srgbClr val="1C2833"/>
+                </a:solidFill>
+                <a:latin typeface="Georgia" pitchFamily="34" charset="0"/>
+                <a:ea typeface="Georgia" pitchFamily="34" charset="-122"/>
+                <a:cs typeface="Georgia" pitchFamily="34" charset="-120"/>
+              </a:rPr>
+              <a:t>When they are in balance, they sustain the body. When they are out of balance, they cause trouble.</a:t>
+            </a:r>
+            <a:endParaRPr lang="en-US" sz="1300" dirty="0"/>
+          </a:p>
+        </p:txBody>
+      </p:sp>
+      <p:sp>
+        <p:nvSpPr>
+          <p:cNvPr id="9" name="Text 7"/>
+          <p:cNvSpPr/>
+          <p:nvPr/>
+        </p:nvSpPr>
+        <p:spPr>
+          <a:xfrm>
+            <a:off x="692051" y="2343299"/>
+            <a:ext cx="7973389" cy="230981"/>
+          </a:xfrm>
+          <a:prstGeom prst="rect">
+            <a:avLst/>
+          </a:prstGeom>
+          <a:noFill/>
+          <a:ln/>
+        </p:spPr>
+        <p:txBody>
+          <a:bodyPr wrap="square" lIns="0" tIns="0" rIns="0" bIns="0" rtlCol="0" anchor="t"/>
+          <a:lstStyle/>
+          <a:p>
+            <a:pPr algn="l" indent="0" marL="0">
+              <a:lnSpc>
+                <a:spcPts val="1820"/>
+              </a:lnSpc>
+              <a:spcBef>
+                <a:spcPts val="300"/>
+              </a:spcBef>
+              <a:spcAft>
+                <a:spcPts val="300"/>
+              </a:spcAft>
+              <a:buNone/>
+            </a:pPr>
+            <a:r>
+              <a:rPr lang="en-US" sz="1300" dirty="0">
+                <a:solidFill>
+                  <a:srgbClr val="1C2833"/>
+                </a:solidFill>
+                <a:latin typeface="Georgia" pitchFamily="34" charset="0"/>
+                <a:ea typeface="Georgia" pitchFamily="34" charset="-122"/>
+                <a:cs typeface="Georgia" pitchFamily="34" charset="-120"/>
+              </a:rPr>
+              <a:t>— Caraka Saṁhitā, </a:t>
+            </a:r>
+            <a:pPr algn="l" indent="0" marL="0">
+              <a:lnSpc>
+                <a:spcPts val="1820"/>
+              </a:lnSpc>
+              <a:spcBef>
+                <a:spcPts val="300"/>
+              </a:spcBef>
+              <a:spcAft>
+                <a:spcPts val="300"/>
+              </a:spcAft>
+              <a:buNone/>
+            </a:pPr>
+            <a:r>
+              <a:rPr lang="en-US" sz="1300" i="1" dirty="0">
+                <a:solidFill>
+                  <a:srgbClr val="1C2833"/>
+                </a:solidFill>
+                <a:latin typeface="Georgia" pitchFamily="34" charset="0"/>
+                <a:ea typeface="Georgia" pitchFamily="34" charset="-122"/>
+                <a:cs typeface="Georgia" pitchFamily="34" charset="-120"/>
+              </a:rPr>
               <a:t>Sūtrasthāna</a:t>
             </a:r>
             <a:pPr algn="l" indent="0" marL="0">
               <a:lnSpc>
+                <a:spcPts val="1820"/>
+              </a:lnSpc>
+              <a:spcBef>
+                <a:spcPts val="300"/>
+              </a:spcBef>
+              <a:spcAft>
+                <a:spcPts val="300"/>
+              </a:spcAft>
+              <a:buNone/>
+            </a:pPr>
+            <a:r>
+              <a:rPr lang="en-US" sz="1300" dirty="0">
+                <a:solidFill>
+                  <a:srgbClr val="1C2833"/>
+                </a:solidFill>
+                <a:latin typeface="Georgia" pitchFamily="34" charset="0"/>
+                <a:ea typeface="Georgia" pitchFamily="34" charset="-122"/>
+                <a:cs typeface="Georgia" pitchFamily="34" charset="-120"/>
+              </a:rPr>
+              <a:t> 1.57 (paraphrase)</a:t>
+            </a:r>
+            <a:endParaRPr lang="en-US" sz="1300" dirty="0"/>
+          </a:p>
+        </p:txBody>
+      </p:sp>
+      <p:sp>
+        <p:nvSpPr>
+          <p:cNvPr id="10" name="Text 8"/>
+          <p:cNvSpPr/>
+          <p:nvPr/>
+        </p:nvSpPr>
+        <p:spPr>
+          <a:xfrm>
+            <a:off x="406301" y="4434929"/>
+            <a:ext cx="8498026" cy="213271"/>
+          </a:xfrm>
+          <a:prstGeom prst="rect">
+            <a:avLst/>
+          </a:prstGeom>
+          <a:noFill/>
+          <a:ln/>
+        </p:spPr>
+        <p:txBody>
+          <a:bodyPr wrap="square" lIns="0" tIns="0" rIns="0" bIns="0" rtlCol="0" anchor="t"/>
+          <a:lstStyle/>
+          <a:p>
+            <a:pPr algn="l" indent="0" marL="0">
+              <a:lnSpc>
                 <a:spcPts val="1680"/>
               </a:lnSpc>
               <a:spcBef>
@@ -3270,15 +5654,1372 @@
                 <a:ea typeface="Arial" pitchFamily="34" charset="-122"/>
                 <a:cs typeface="Arial" pitchFamily="34" charset="-120"/>
               </a:rPr>
+              <a:t>Middle ·  · IKS Curriculum</a:t>
+            </a:r>
+            <a:endParaRPr lang="en-US" sz="1200" dirty="0"/>
+          </a:p>
+        </p:txBody>
+      </p:sp>
+    </p:spTree>
+  </p:cSld>
+  <p:clrMapOvr>
+    <a:masterClrMapping/>
+  </p:clrMapOvr>
+</p:sld>
+</file>
+
+<file path=ppt/slides/slide16.xml><?xml version="1.0" encoding="utf-8"?>
+<p:sld xmlns:a="http://schemas.openxmlformats.org/drawingml/2006/main" xmlns:r="http://schemas.openxmlformats.org/officeDocument/2006/relationships" xmlns:p="http://schemas.openxmlformats.org/presentationml/2006/main">
+  <p:cSld name="Slide 16">
+    <p:bg>
+      <p:bgPr>
+        <a:solidFill>
+          <a:srgbClr val="FFFFFF"/>
+        </a:solidFill>
+      </p:bgPr>
+    </p:bg>
+    <p:spTree>
+      <p:nvGrpSpPr>
+        <p:cNvPr id="1" name=""/>
+        <p:cNvGrpSpPr/>
+        <p:nvPr/>
+      </p:nvGrpSpPr>
+      <p:grpSpPr>
+        <a:xfrm>
+          <a:off x="0" y="0"/>
+          <a:ext cx="0" cy="0"/>
+          <a:chOff x="0" y="0"/>
+          <a:chExt cx="0" cy="0"/>
+        </a:xfrm>
+      </p:grpSpPr>
+      <p:sp>
+        <p:nvSpPr>
+          <p:cNvPr id="2" name="Text 0"/>
+          <p:cNvSpPr/>
+          <p:nvPr/>
+        </p:nvSpPr>
+        <p:spPr>
+          <a:xfrm>
+            <a:off x="0" y="0"/>
+            <a:ext cx="9144000" cy="101501"/>
+          </a:xfrm>
+          <a:prstGeom prst="rect">
+            <a:avLst/>
+          </a:prstGeom>
+          <a:solidFill>
+            <a:srgbClr val="277884"/>
+          </a:solidFill>
+          <a:ln/>
+        </p:spPr>
+        <p:txBody>
+          <a:bodyPr wrap="square" rtlCol="0" anchor="ctr"/>
+          <a:lstStyle/>
+          <a:p>
+            <a:pPr indent="0" marL="0">
+              <a:buNone/>
+            </a:pPr>
+            <a:endParaRPr lang="en-US" dirty="0"/>
+          </a:p>
+        </p:txBody>
+      </p:sp>
+      <p:sp>
+        <p:nvSpPr>
+          <p:cNvPr id="3" name="Text 1"/>
+          <p:cNvSpPr/>
+          <p:nvPr/>
+        </p:nvSpPr>
+        <p:spPr>
+          <a:xfrm>
+            <a:off x="406301" y="457051"/>
+            <a:ext cx="8498026" cy="274290"/>
+          </a:xfrm>
+          <a:prstGeom prst="rect">
+            <a:avLst/>
+          </a:prstGeom>
+          <a:noFill/>
+          <a:ln/>
+        </p:spPr>
+        <p:txBody>
+          <a:bodyPr wrap="square" lIns="0" tIns="0" rIns="0" bIns="0" rtlCol="0" anchor="t"/>
+          <a:lstStyle/>
+          <a:p>
+            <a:pPr algn="l" indent="0" marL="0">
+              <a:lnSpc>
+                <a:spcPts val="2160"/>
+              </a:lnSpc>
+              <a:spcBef>
+                <a:spcPts val="600"/>
+              </a:spcBef>
+              <a:spcAft>
+                <a:spcPts val="800"/>
+              </a:spcAft>
+              <a:buNone/>
+            </a:pPr>
+            <a:r>
+              <a:rPr lang="en-US" sz="1800" b="1" dirty="0">
+                <a:solidFill>
+                  <a:srgbClr val="FE4447"/>
+                </a:solidFill>
+                <a:latin typeface="Georgia" pitchFamily="34" charset="0"/>
+                <a:ea typeface="Georgia" pitchFamily="34" charset="-122"/>
+                <a:cs typeface="Georgia" pitchFamily="34" charset="-120"/>
+              </a:rPr>
+              <a:t>Homework</a:t>
+            </a:r>
+            <a:endParaRPr lang="en-US" sz="1800" dirty="0"/>
+          </a:p>
+        </p:txBody>
+      </p:sp>
+      <p:sp>
+        <p:nvSpPr>
+          <p:cNvPr id="4" name="Text 2"/>
+          <p:cNvSpPr/>
+          <p:nvPr/>
+        </p:nvSpPr>
+        <p:spPr>
+          <a:xfrm>
+            <a:off x="634901" y="883593"/>
+            <a:ext cx="8102798" cy="487561"/>
+          </a:xfrm>
+          <a:prstGeom prst="rect">
+            <a:avLst/>
+          </a:prstGeom>
+          <a:noFill/>
+          <a:ln/>
+        </p:spPr>
+        <p:txBody>
+          <a:bodyPr wrap="square" lIns="0" tIns="0" rIns="0" bIns="0" rtlCol="0" anchor="t"/>
+          <a:lstStyle/>
+          <a:p>
+            <a:pPr algn="l" marL="342900" indent="-342900">
+              <a:lnSpc>
+                <a:spcPts val="1620"/>
+              </a:lnSpc>
+              <a:spcAft>
+                <a:spcPts val="300"/>
+              </a:spcAft>
+              <a:buSzPct val="100000"/>
+              <a:buChar char="•"/>
+            </a:pPr>
+            <a:r>
+              <a:rPr lang="en-US" sz="1200" dirty="0">
+                <a:solidFill>
+                  <a:srgbClr val="1C2833"/>
+                </a:solidFill>
+                <a:latin typeface="Arial" pitchFamily="34" charset="0"/>
+                <a:ea typeface="Arial" pitchFamily="34" charset="-122"/>
+                <a:cs typeface="Arial" pitchFamily="34" charset="-120"/>
+              </a:rPr>
+              <a:t>Look around your home tonight. Find </a:t>
+            </a:r>
+            <a:pPr algn="l" indent="0" marL="0">
+              <a:lnSpc>
+                <a:spcPts val="1620"/>
+              </a:lnSpc>
+              <a:spcAft>
+                <a:spcPts val="300"/>
+              </a:spcAft>
+              <a:buNone/>
+            </a:pPr>
+            <a:r>
+              <a:rPr lang="en-US" sz="1200" b="1" dirty="0">
+                <a:solidFill>
+                  <a:srgbClr val="1C2833"/>
+                </a:solidFill>
+                <a:latin typeface="Arial" pitchFamily="34" charset="0"/>
+                <a:ea typeface="Arial" pitchFamily="34" charset="-122"/>
+                <a:cs typeface="Arial" pitchFamily="34" charset="-120"/>
+              </a:rPr>
+              <a:t>one example</a:t>
+            </a:r>
+            <a:pPr algn="l" indent="0" marL="0">
+              <a:lnSpc>
+                <a:spcPts val="1620"/>
+              </a:lnSpc>
+              <a:spcAft>
+                <a:spcPts val="300"/>
+              </a:spcAft>
+              <a:buNone/>
+            </a:pPr>
+            <a:r>
+              <a:rPr lang="en-US" sz="1200" dirty="0">
+                <a:solidFill>
+                  <a:srgbClr val="1C2833"/>
+                </a:solidFill>
+                <a:latin typeface="Arial" pitchFamily="34" charset="0"/>
+                <a:ea typeface="Arial" pitchFamily="34" charset="-122"/>
+                <a:cs typeface="Arial" pitchFamily="34" charset="-120"/>
+              </a:rPr>
+              <a:t> for each of the three: something that </a:t>
+            </a:r>
+            <a:pPr algn="l" indent="0" marL="0">
+              <a:lnSpc>
+                <a:spcPts val="1620"/>
+              </a:lnSpc>
+              <a:spcAft>
+                <a:spcPts val="300"/>
+              </a:spcAft>
+              <a:buNone/>
+            </a:pPr>
+            <a:r>
+              <a:rPr lang="en-US" sz="1200" i="1" dirty="0">
+                <a:solidFill>
+                  <a:srgbClr val="1C2833"/>
+                </a:solidFill>
+                <a:latin typeface="Arial" pitchFamily="34" charset="0"/>
+                <a:ea typeface="Arial" pitchFamily="34" charset="-122"/>
+                <a:cs typeface="Arial" pitchFamily="34" charset="-120"/>
+              </a:rPr>
+              <a:t>moves</a:t>
+            </a:r>
+            <a:pPr algn="l" indent="0" marL="0">
+              <a:lnSpc>
+                <a:spcPts val="1620"/>
+              </a:lnSpc>
+              <a:spcAft>
+                <a:spcPts val="300"/>
+              </a:spcAft>
+              <a:buNone/>
+            </a:pPr>
+            <a:r>
+              <a:rPr lang="en-US" sz="1200" dirty="0">
+                <a:solidFill>
+                  <a:srgbClr val="1C2833"/>
+                </a:solidFill>
+                <a:latin typeface="Arial" pitchFamily="34" charset="0"/>
+                <a:ea typeface="Arial" pitchFamily="34" charset="-122"/>
+                <a:cs typeface="Arial" pitchFamily="34" charset="-120"/>
+              </a:rPr>
+              <a:t>, something that </a:t>
+            </a:r>
+            <a:pPr algn="l" indent="0" marL="0">
+              <a:lnSpc>
+                <a:spcPts val="1620"/>
+              </a:lnSpc>
+              <a:spcAft>
+                <a:spcPts val="300"/>
+              </a:spcAft>
+              <a:buNone/>
+            </a:pPr>
+            <a:r>
+              <a:rPr lang="en-US" sz="1200" i="1" dirty="0">
+                <a:solidFill>
+                  <a:srgbClr val="1C2833"/>
+                </a:solidFill>
+                <a:latin typeface="Arial" pitchFamily="34" charset="0"/>
+                <a:ea typeface="Arial" pitchFamily="34" charset="-122"/>
+                <a:cs typeface="Arial" pitchFamily="34" charset="-120"/>
+              </a:rPr>
+              <a:t>transforms</a:t>
+            </a:r>
+            <a:pPr algn="l" indent="0" marL="0">
+              <a:lnSpc>
+                <a:spcPts val="1620"/>
+              </a:lnSpc>
+              <a:spcAft>
+                <a:spcPts val="300"/>
+              </a:spcAft>
+              <a:buNone/>
+            </a:pPr>
+            <a:r>
+              <a:rPr lang="en-US" sz="1200" dirty="0">
+                <a:solidFill>
+                  <a:srgbClr val="1C2833"/>
+                </a:solidFill>
+                <a:latin typeface="Arial" pitchFamily="34" charset="0"/>
+                <a:ea typeface="Arial" pitchFamily="34" charset="-122"/>
+                <a:cs typeface="Arial" pitchFamily="34" charset="-120"/>
+              </a:rPr>
+              <a:t>, something that </a:t>
+            </a:r>
+            <a:pPr algn="l" indent="0" marL="0">
+              <a:lnSpc>
+                <a:spcPts val="1620"/>
+              </a:lnSpc>
+              <a:spcAft>
+                <a:spcPts val="300"/>
+              </a:spcAft>
+              <a:buNone/>
+            </a:pPr>
+            <a:r>
+              <a:rPr lang="en-US" sz="1200" i="1" dirty="0">
+                <a:solidFill>
+                  <a:srgbClr val="1C2833"/>
+                </a:solidFill>
+                <a:latin typeface="Arial" pitchFamily="34" charset="0"/>
+                <a:ea typeface="Arial" pitchFamily="34" charset="-122"/>
+                <a:cs typeface="Arial" pitchFamily="34" charset="-120"/>
+              </a:rPr>
+              <a:t>holds together</a:t>
+            </a:r>
+            <a:pPr algn="l" indent="0" marL="0">
+              <a:lnSpc>
+                <a:spcPts val="1620"/>
+              </a:lnSpc>
+              <a:spcAft>
+                <a:spcPts val="300"/>
+              </a:spcAft>
+              <a:buNone/>
+            </a:pPr>
+            <a:r>
+              <a:rPr lang="en-US" sz="1200" dirty="0">
+                <a:solidFill>
+                  <a:srgbClr val="1C2833"/>
+                </a:solidFill>
+                <a:latin typeface="Arial" pitchFamily="34" charset="0"/>
+                <a:ea typeface="Arial" pitchFamily="34" charset="-122"/>
+                <a:cs typeface="Arial" pitchFamily="34" charset="-120"/>
+              </a:rPr>
+              <a:t>. Write the three examples in your notebook.</a:t>
+            </a:r>
+            <a:endParaRPr lang="en-US" sz="1200" dirty="0"/>
+          </a:p>
+        </p:txBody>
+      </p:sp>
+      <p:sp>
+        <p:nvSpPr>
+          <p:cNvPr id="5" name="Text 3"/>
+          <p:cNvSpPr/>
+          <p:nvPr/>
+        </p:nvSpPr>
+        <p:spPr>
+          <a:xfrm>
+            <a:off x="406301" y="4434929"/>
+            <a:ext cx="8498026" cy="213271"/>
+          </a:xfrm>
+          <a:prstGeom prst="rect">
+            <a:avLst/>
+          </a:prstGeom>
+          <a:noFill/>
+          <a:ln/>
+        </p:spPr>
+        <p:txBody>
+          <a:bodyPr wrap="square" lIns="0" tIns="0" rIns="0" bIns="0" rtlCol="0" anchor="t"/>
+          <a:lstStyle/>
+          <a:p>
+            <a:pPr algn="l" indent="0" marL="0">
+              <a:lnSpc>
+                <a:spcPts val="1680"/>
+              </a:lnSpc>
+              <a:spcBef>
+                <a:spcPts val="300"/>
+              </a:spcBef>
+              <a:spcAft>
+                <a:spcPts val="300"/>
+              </a:spcAft>
+              <a:buNone/>
+            </a:pPr>
+            <a:r>
+              <a:rPr lang="en-US" sz="1200" dirty="0">
+                <a:solidFill>
+                  <a:srgbClr val="1C2833"/>
+                </a:solidFill>
+                <a:latin typeface="Arial" pitchFamily="34" charset="0"/>
+                <a:ea typeface="Arial" pitchFamily="34" charset="-122"/>
+                <a:cs typeface="Arial" pitchFamily="34" charset="-120"/>
+              </a:rPr>
+              <a:t>Middle ·  · IKS Curriculum</a:t>
+            </a:r>
+            <a:endParaRPr lang="en-US" sz="1200" dirty="0"/>
+          </a:p>
+        </p:txBody>
+      </p:sp>
+    </p:spTree>
+  </p:cSld>
+  <p:clrMapOvr>
+    <a:masterClrMapping/>
+  </p:clrMapOvr>
+</p:sld>
+</file>
+
+<file path=ppt/slides/slide17.xml><?xml version="1.0" encoding="utf-8"?>
+<p:sld xmlns:a="http://schemas.openxmlformats.org/drawingml/2006/main" xmlns:r="http://schemas.openxmlformats.org/officeDocument/2006/relationships" xmlns:p="http://schemas.openxmlformats.org/presentationml/2006/main">
+  <p:cSld name="Slide 17">
+    <p:bg>
+      <p:bgPr>
+        <a:solidFill>
+          <a:srgbClr val="FFFFFF"/>
+        </a:solidFill>
+      </p:bgPr>
+    </p:bg>
+    <p:spTree>
+      <p:nvGrpSpPr>
+        <p:cNvPr id="1" name=""/>
+        <p:cNvGrpSpPr/>
+        <p:nvPr/>
+      </p:nvGrpSpPr>
+      <p:grpSpPr>
+        <a:xfrm>
+          <a:off x="0" y="0"/>
+          <a:ext cx="0" cy="0"/>
+          <a:chOff x="0" y="0"/>
+          <a:chExt cx="0" cy="0"/>
+        </a:xfrm>
+      </p:grpSpPr>
+      <p:sp>
+        <p:nvSpPr>
+          <p:cNvPr id="2" name="Text 0"/>
+          <p:cNvSpPr/>
+          <p:nvPr/>
+        </p:nvSpPr>
+        <p:spPr>
+          <a:xfrm>
+            <a:off x="0" y="0"/>
+            <a:ext cx="9144000" cy="101501"/>
+          </a:xfrm>
+          <a:prstGeom prst="rect">
+            <a:avLst/>
+          </a:prstGeom>
+          <a:solidFill>
+            <a:srgbClr val="277884"/>
+          </a:solidFill>
+          <a:ln/>
+        </p:spPr>
+        <p:txBody>
+          <a:bodyPr wrap="square" rtlCol="0" anchor="ctr"/>
+          <a:lstStyle/>
+          <a:p>
+            <a:pPr indent="0" marL="0">
+              <a:buNone/>
+            </a:pPr>
+            <a:endParaRPr lang="en-US" dirty="0"/>
+          </a:p>
+        </p:txBody>
+      </p:sp>
+      <p:sp>
+        <p:nvSpPr>
+          <p:cNvPr id="3" name="Text 1"/>
+          <p:cNvSpPr/>
+          <p:nvPr/>
+        </p:nvSpPr>
+        <p:spPr>
+          <a:xfrm>
+            <a:off x="406301" y="457051"/>
+            <a:ext cx="8498026" cy="274290"/>
+          </a:xfrm>
+          <a:prstGeom prst="rect">
+            <a:avLst/>
+          </a:prstGeom>
+          <a:noFill/>
+          <a:ln/>
+        </p:spPr>
+        <p:txBody>
+          <a:bodyPr wrap="square" lIns="0" tIns="0" rIns="0" bIns="0" rtlCol="0" anchor="t"/>
+          <a:lstStyle/>
+          <a:p>
+            <a:pPr algn="l" indent="0" marL="0">
+              <a:lnSpc>
+                <a:spcPts val="2160"/>
+              </a:lnSpc>
+              <a:spcBef>
+                <a:spcPts val="600"/>
+              </a:spcBef>
+              <a:spcAft>
+                <a:spcPts val="800"/>
+              </a:spcAft>
+              <a:buNone/>
+            </a:pPr>
+            <a:r>
+              <a:rPr lang="en-US" sz="1800" b="1" dirty="0">
+                <a:solidFill>
+                  <a:srgbClr val="FE4447"/>
+                </a:solidFill>
+                <a:latin typeface="Georgia" pitchFamily="34" charset="0"/>
+                <a:ea typeface="Georgia" pitchFamily="34" charset="-122"/>
+                <a:cs typeface="Georgia" pitchFamily="34" charset="-120"/>
+              </a:rPr>
+              <a:t>Differentiation</a:t>
+            </a:r>
+            <a:endParaRPr lang="en-US" sz="1800" dirty="0"/>
+          </a:p>
+        </p:txBody>
+      </p:sp>
+      <p:sp>
+        <p:nvSpPr>
+          <p:cNvPr id="4" name="Text 2"/>
+          <p:cNvSpPr/>
+          <p:nvPr/>
+        </p:nvSpPr>
+        <p:spPr>
+          <a:xfrm>
+            <a:off x="634901" y="883593"/>
+            <a:ext cx="8102798" cy="731341"/>
+          </a:xfrm>
+          <a:prstGeom prst="rect">
+            <a:avLst/>
+          </a:prstGeom>
+          <a:noFill/>
+          <a:ln/>
+        </p:spPr>
+        <p:txBody>
+          <a:bodyPr wrap="square" lIns="0" tIns="0" rIns="0" bIns="0" rtlCol="0" anchor="t"/>
+          <a:lstStyle/>
+          <a:p>
+            <a:pPr algn="l" marL="342900" indent="-342900">
+              <a:lnSpc>
+                <a:spcPts val="1620"/>
+              </a:lnSpc>
+              <a:spcAft>
+                <a:spcPts val="300"/>
+              </a:spcAft>
+              <a:buSzPct val="100000"/>
+              <a:buChar char="•"/>
+            </a:pPr>
+            <a:r>
+              <a:rPr lang="en-US" sz="1200" b="1" dirty="0">
+                <a:solidFill>
+                  <a:srgbClr val="1C2833"/>
+                </a:solidFill>
+                <a:latin typeface="Arial" pitchFamily="34" charset="0"/>
+                <a:ea typeface="Arial" pitchFamily="34" charset="-122"/>
+                <a:cs typeface="Arial" pitchFamily="34" charset="-120"/>
+              </a:rPr>
+              <a:t>One tier up:</a:t>
+            </a:r>
+            <a:pPr algn="l" indent="0" marL="0">
+              <a:lnSpc>
+                <a:spcPts val="1620"/>
+              </a:lnSpc>
+              <a:spcAft>
+                <a:spcPts val="300"/>
+              </a:spcAft>
+              <a:buNone/>
+            </a:pPr>
+            <a:r>
+              <a:rPr lang="en-US" sz="1200" dirty="0">
+                <a:solidFill>
+                  <a:srgbClr val="1C2833"/>
+                </a:solidFill>
+                <a:latin typeface="Arial" pitchFamily="34" charset="0"/>
+                <a:ea typeface="Arial" pitchFamily="34" charset="-122"/>
+                <a:cs typeface="Arial" pitchFamily="34" charset="-120"/>
+              </a:rPr>
+              <a:t> Why does </a:t>
+            </a:r>
+            <a:pPr algn="l" indent="0" marL="0">
+              <a:lnSpc>
+                <a:spcPts val="1620"/>
+              </a:lnSpc>
+              <a:spcAft>
+                <a:spcPts val="300"/>
+              </a:spcAft>
+              <a:buNone/>
+            </a:pPr>
+            <a:r>
+              <a:rPr lang="en-US" sz="1200" i="1" dirty="0">
+                <a:solidFill>
+                  <a:srgbClr val="1C2833"/>
+                </a:solidFill>
+                <a:latin typeface="Arial" pitchFamily="34" charset="0"/>
+                <a:ea typeface="Arial" pitchFamily="34" charset="-122"/>
+                <a:cs typeface="Arial" pitchFamily="34" charset="-120"/>
+              </a:rPr>
+              <a:t>ap</a:t>
+            </a:r>
+            <a:pPr algn="l" indent="0" marL="0">
+              <a:lnSpc>
+                <a:spcPts val="1620"/>
+              </a:lnSpc>
+              <a:spcAft>
+                <a:spcPts val="300"/>
+              </a:spcAft>
+              <a:buNone/>
+            </a:pPr>
+            <a:r>
+              <a:rPr lang="en-US" sz="1200" dirty="0">
+                <a:solidFill>
+                  <a:srgbClr val="1C2833"/>
+                </a:solidFill>
+                <a:latin typeface="Arial" pitchFamily="34" charset="0"/>
+                <a:ea typeface="Arial" pitchFamily="34" charset="-122"/>
+                <a:cs typeface="Arial" pitchFamily="34" charset="-120"/>
+              </a:rPr>
+              <a:t> (water) appear in TWO of the three doṣas? What does that suggest about water's special role in the framework?</a:t>
+            </a:r>
+            <a:endParaRPr lang="en-US" sz="1200" dirty="0"/>
+          </a:p>
+          <a:p>
+            <a:pPr algn="l" marL="342900" indent="-342900">
+              <a:lnSpc>
+                <a:spcPts val="1620"/>
+              </a:lnSpc>
+              <a:spcAft>
+                <a:spcPts val="300"/>
+              </a:spcAft>
+              <a:buSzPct val="100000"/>
+              <a:buChar char="•"/>
+            </a:pPr>
+            <a:r>
+              <a:rPr lang="en-US" sz="1200" b="1" dirty="0">
+                <a:solidFill>
+                  <a:srgbClr val="1C2833"/>
+                </a:solidFill>
+                <a:latin typeface="Arial" pitchFamily="34" charset="0"/>
+                <a:ea typeface="Arial" pitchFamily="34" charset="-122"/>
+                <a:cs typeface="Arial" pitchFamily="34" charset="-120"/>
+              </a:rPr>
+              <a:t>One tier down:</a:t>
+            </a:r>
+            <a:pPr algn="l" indent="0" marL="0">
+              <a:lnSpc>
+                <a:spcPts val="1620"/>
+              </a:lnSpc>
+              <a:spcAft>
+                <a:spcPts val="300"/>
+              </a:spcAft>
+              <a:buNone/>
+            </a:pPr>
+            <a:r>
+              <a:rPr lang="en-US" sz="1200" dirty="0">
+                <a:solidFill>
+                  <a:srgbClr val="1C2833"/>
+                </a:solidFill>
+                <a:latin typeface="Arial" pitchFamily="34" charset="0"/>
+                <a:ea typeface="Arial" pitchFamily="34" charset="-122"/>
+                <a:cs typeface="Arial" pitchFamily="34" charset="-120"/>
+              </a:rPr>
+              <a:t> Just remember the three names and what each does. The element pairing can come tomorrow.</a:t>
+            </a:r>
+            <a:endParaRPr lang="en-US" sz="1200" dirty="0"/>
+          </a:p>
+        </p:txBody>
+      </p:sp>
+      <p:sp>
+        <p:nvSpPr>
+          <p:cNvPr id="5" name="Text 3"/>
+          <p:cNvSpPr/>
+          <p:nvPr/>
+        </p:nvSpPr>
+        <p:spPr>
+          <a:xfrm>
+            <a:off x="406301" y="4434929"/>
+            <a:ext cx="8498026" cy="213271"/>
+          </a:xfrm>
+          <a:prstGeom prst="rect">
+            <a:avLst/>
+          </a:prstGeom>
+          <a:noFill/>
+          <a:ln/>
+        </p:spPr>
+        <p:txBody>
+          <a:bodyPr wrap="square" lIns="0" tIns="0" rIns="0" bIns="0" rtlCol="0" anchor="t"/>
+          <a:lstStyle/>
+          <a:p>
+            <a:pPr algn="l" indent="0" marL="0">
+              <a:lnSpc>
+                <a:spcPts val="1680"/>
+              </a:lnSpc>
+              <a:spcBef>
+                <a:spcPts val="300"/>
+              </a:spcBef>
+              <a:spcAft>
+                <a:spcPts val="300"/>
+              </a:spcAft>
+              <a:buNone/>
+            </a:pPr>
+            <a:r>
+              <a:rPr lang="en-US" sz="1200" dirty="0">
+                <a:solidFill>
+                  <a:srgbClr val="1C2833"/>
+                </a:solidFill>
+                <a:latin typeface="Arial" pitchFamily="34" charset="0"/>
+                <a:ea typeface="Arial" pitchFamily="34" charset="-122"/>
+                <a:cs typeface="Arial" pitchFamily="34" charset="-120"/>
+              </a:rPr>
+              <a:t>Middle ·  · IKS Curriculum</a:t>
+            </a:r>
+            <a:endParaRPr lang="en-US" sz="1200" dirty="0"/>
+          </a:p>
+        </p:txBody>
+      </p:sp>
+    </p:spTree>
+  </p:cSld>
+  <p:clrMapOvr>
+    <a:masterClrMapping/>
+  </p:clrMapOvr>
+</p:sld>
+</file>
+
+<file path=ppt/slides/slide18.xml><?xml version="1.0" encoding="utf-8"?>
+<p:sld xmlns:a="http://schemas.openxmlformats.org/drawingml/2006/main" xmlns:r="http://schemas.openxmlformats.org/officeDocument/2006/relationships" xmlns:p="http://schemas.openxmlformats.org/presentationml/2006/main">
+  <p:cSld name="Slide 18">
+    <p:bg>
+      <p:bgPr>
+        <a:solidFill>
+          <a:srgbClr val="FFFFFF"/>
+        </a:solidFill>
+      </p:bgPr>
+    </p:bg>
+    <p:spTree>
+      <p:nvGrpSpPr>
+        <p:cNvPr id="1" name=""/>
+        <p:cNvGrpSpPr/>
+        <p:nvPr/>
+      </p:nvGrpSpPr>
+      <p:grpSpPr>
+        <a:xfrm>
+          <a:off x="0" y="0"/>
+          <a:ext cx="0" cy="0"/>
+          <a:chOff x="0" y="0"/>
+          <a:chExt cx="0" cy="0"/>
+        </a:xfrm>
+      </p:grpSpPr>
+      <p:sp>
+        <p:nvSpPr>
+          <p:cNvPr id="2" name="Text 0"/>
+          <p:cNvSpPr/>
+          <p:nvPr/>
+        </p:nvSpPr>
+        <p:spPr>
+          <a:xfrm>
+            <a:off x="0" y="0"/>
+            <a:ext cx="9144000" cy="101501"/>
+          </a:xfrm>
+          <a:prstGeom prst="rect">
+            <a:avLst/>
+          </a:prstGeom>
+          <a:solidFill>
+            <a:srgbClr val="277884"/>
+          </a:solidFill>
+          <a:ln/>
+        </p:spPr>
+        <p:txBody>
+          <a:bodyPr wrap="square" rtlCol="0" anchor="ctr"/>
+          <a:lstStyle/>
+          <a:p>
+            <a:pPr indent="0" marL="0">
+              <a:buNone/>
+            </a:pPr>
+            <a:endParaRPr lang="en-US" dirty="0"/>
+          </a:p>
+        </p:txBody>
+      </p:sp>
+      <p:sp>
+        <p:nvSpPr>
+          <p:cNvPr id="3" name="Text 1"/>
+          <p:cNvSpPr/>
+          <p:nvPr/>
+        </p:nvSpPr>
+        <p:spPr>
+          <a:xfrm>
+            <a:off x="406301" y="457051"/>
+            <a:ext cx="8498026" cy="274290"/>
+          </a:xfrm>
+          <a:prstGeom prst="rect">
+            <a:avLst/>
+          </a:prstGeom>
+          <a:noFill/>
+          <a:ln/>
+        </p:spPr>
+        <p:txBody>
+          <a:bodyPr wrap="square" lIns="0" tIns="0" rIns="0" bIns="0" rtlCol="0" anchor="t"/>
+          <a:lstStyle/>
+          <a:p>
+            <a:pPr algn="l" indent="0" marL="0">
+              <a:lnSpc>
+                <a:spcPts val="2160"/>
+              </a:lnSpc>
+              <a:spcBef>
+                <a:spcPts val="600"/>
+              </a:spcBef>
+              <a:spcAft>
+                <a:spcPts val="800"/>
+              </a:spcAft>
+              <a:buNone/>
+            </a:pPr>
+            <a:r>
+              <a:rPr lang="en-US" sz="1800" b="1" dirty="0">
+                <a:solidFill>
+                  <a:srgbClr val="FE4447"/>
+                </a:solidFill>
+                <a:latin typeface="Georgia" pitchFamily="34" charset="0"/>
+                <a:ea typeface="Georgia" pitchFamily="34" charset="-122"/>
+                <a:cs typeface="Georgia" pitchFamily="34" charset="-120"/>
+              </a:rPr>
+              <a:t>Teacher notes</a:t>
+            </a:r>
+            <a:endParaRPr lang="en-US" sz="1800" dirty="0"/>
+          </a:p>
+        </p:txBody>
+      </p:sp>
+      <p:sp>
+        <p:nvSpPr>
+          <p:cNvPr id="4" name="Text 2"/>
+          <p:cNvSpPr/>
+          <p:nvPr/>
+        </p:nvSpPr>
+        <p:spPr>
+          <a:xfrm>
+            <a:off x="634901" y="883593"/>
+            <a:ext cx="8102798" cy="1180802"/>
+          </a:xfrm>
+          <a:prstGeom prst="rect">
+            <a:avLst/>
+          </a:prstGeom>
+          <a:noFill/>
+          <a:ln/>
+        </p:spPr>
+        <p:txBody>
+          <a:bodyPr wrap="square" lIns="0" tIns="0" rIns="0" bIns="0" rtlCol="0" anchor="t"/>
+          <a:lstStyle/>
+          <a:p>
+            <a:pPr algn="l" marL="342900" indent="-342900">
+              <a:lnSpc>
+                <a:spcPts val="1620"/>
+              </a:lnSpc>
+              <a:spcAft>
+                <a:spcPts val="300"/>
+              </a:spcAft>
+              <a:buSzPct val="100000"/>
+              <a:buChar char="•"/>
+            </a:pPr>
+            <a:r>
+              <a:rPr lang="en-US" sz="1200" dirty="0">
+                <a:solidFill>
+                  <a:srgbClr val="1C2833"/>
+                </a:solidFill>
+                <a:latin typeface="Arial" pitchFamily="34" charset="0"/>
+                <a:ea typeface="Arial" pitchFamily="34" charset="-122"/>
+                <a:cs typeface="Arial" pitchFamily="34" charset="-120"/>
+              </a:rPr>
+              <a:t>The trickiest pairing is </a:t>
+            </a:r>
+            <a:pPr algn="l" indent="0" marL="0">
+              <a:lnSpc>
+                <a:spcPts val="1620"/>
+              </a:lnSpc>
+              <a:spcAft>
+                <a:spcPts val="300"/>
+              </a:spcAft>
+              <a:buNone/>
+            </a:pPr>
+            <a:r>
+              <a:rPr lang="en-US" sz="1200" i="1" dirty="0">
+                <a:solidFill>
+                  <a:srgbClr val="1C2833"/>
+                </a:solidFill>
+                <a:latin typeface="Arial" pitchFamily="34" charset="0"/>
+                <a:ea typeface="Arial" pitchFamily="34" charset="-122"/>
+                <a:cs typeface="Arial" pitchFamily="34" charset="-120"/>
+              </a:rPr>
+              <a:t>kapha = ap + pṛthvī</a:t>
+            </a:r>
+            <a:pPr algn="l" indent="0" marL="0">
+              <a:lnSpc>
+                <a:spcPts val="1620"/>
+              </a:lnSpc>
+              <a:spcAft>
+                <a:spcPts val="300"/>
+              </a:spcAft>
+              <a:buNone/>
+            </a:pPr>
+            <a:r>
+              <a:rPr lang="en-US" sz="1200" dirty="0">
+                <a:solidFill>
+                  <a:srgbClr val="1C2833"/>
+                </a:solidFill>
+                <a:latin typeface="Arial" pitchFamily="34" charset="0"/>
+                <a:ea typeface="Arial" pitchFamily="34" charset="-122"/>
+                <a:cs typeface="Arial" pitchFamily="34" charset="-120"/>
+              </a:rPr>
+              <a:t>. Students will want </a:t>
+            </a:r>
+            <a:pPr algn="l" indent="0" marL="0">
+              <a:lnSpc>
+                <a:spcPts val="1620"/>
+              </a:lnSpc>
+              <a:spcAft>
+                <a:spcPts val="300"/>
+              </a:spcAft>
+              <a:buNone/>
+            </a:pPr>
+            <a:r>
+              <a:rPr lang="en-US" sz="1200" i="1" dirty="0">
+                <a:solidFill>
+                  <a:srgbClr val="1C2833"/>
+                </a:solidFill>
+                <a:latin typeface="Arial" pitchFamily="34" charset="0"/>
+                <a:ea typeface="Arial" pitchFamily="34" charset="-122"/>
+                <a:cs typeface="Arial" pitchFamily="34" charset="-120"/>
+              </a:rPr>
+              <a:t>pṛthvī</a:t>
+            </a:r>
+            <a:pPr algn="l" indent="0" marL="0">
+              <a:lnSpc>
+                <a:spcPts val="1620"/>
+              </a:lnSpc>
+              <a:spcAft>
+                <a:spcPts val="300"/>
+              </a:spcAft>
+              <a:buNone/>
+            </a:pPr>
+            <a:r>
+              <a:rPr lang="en-US" sz="1200" dirty="0">
+                <a:solidFill>
+                  <a:srgbClr val="1C2833"/>
+                </a:solidFill>
+                <a:latin typeface="Arial" pitchFamily="34" charset="0"/>
+                <a:ea typeface="Arial" pitchFamily="34" charset="-122"/>
+                <a:cs typeface="Arial" pitchFamily="34" charset="-120"/>
+              </a:rPr>
+              <a:t> alone — but the classical formulation is that earth needs water to hold its cohesive structure (think: dry sand vs wet sand).</a:t>
+            </a:r>
+            <a:endParaRPr lang="en-US" sz="1200" dirty="0"/>
+          </a:p>
+          <a:p>
+            <a:pPr algn="l" marL="342900" indent="-342900">
+              <a:lnSpc>
+                <a:spcPts val="1620"/>
+              </a:lnSpc>
+              <a:spcAft>
+                <a:spcPts val="300"/>
+              </a:spcAft>
+              <a:buSzPct val="100000"/>
+              <a:buChar char="•"/>
+            </a:pPr>
+            <a:r>
+              <a:rPr lang="en-US" sz="1200" dirty="0">
+                <a:solidFill>
+                  <a:srgbClr val="1C2833"/>
+                </a:solidFill>
+                <a:latin typeface="Arial" pitchFamily="34" charset="0"/>
+                <a:ea typeface="Arial" pitchFamily="34" charset="-122"/>
+                <a:cs typeface="Arial" pitchFamily="34" charset="-120"/>
+              </a:rPr>
+              <a:t>Some students will ask why fire (</a:t>
+            </a:r>
+            <a:pPr algn="l" indent="0" marL="0">
+              <a:lnSpc>
+                <a:spcPts val="1620"/>
+              </a:lnSpc>
+              <a:spcAft>
+                <a:spcPts val="300"/>
+              </a:spcAft>
+              <a:buNone/>
+            </a:pPr>
+            <a:r>
+              <a:rPr lang="en-US" sz="1200" i="1" dirty="0">
+                <a:solidFill>
+                  <a:srgbClr val="1C2833"/>
+                </a:solidFill>
+                <a:latin typeface="Arial" pitchFamily="34" charset="0"/>
+                <a:ea typeface="Arial" pitchFamily="34" charset="-122"/>
+                <a:cs typeface="Arial" pitchFamily="34" charset="-120"/>
+              </a:rPr>
+              <a:t>tejas</a:t>
+            </a:r>
+            <a:pPr algn="l" indent="0" marL="0">
+              <a:lnSpc>
+                <a:spcPts val="1620"/>
+              </a:lnSpc>
+              <a:spcAft>
+                <a:spcPts val="300"/>
+              </a:spcAft>
+              <a:buNone/>
+            </a:pPr>
+            <a:r>
+              <a:rPr lang="en-US" sz="1200" dirty="0">
+                <a:solidFill>
+                  <a:srgbClr val="1C2833"/>
+                </a:solidFill>
+                <a:latin typeface="Arial" pitchFamily="34" charset="0"/>
+                <a:ea typeface="Arial" pitchFamily="34" charset="-122"/>
+                <a:cs typeface="Arial" pitchFamily="34" charset="-120"/>
+              </a:rPr>
+              <a:t>) doesn't appear alone. Good question. The classical answer: fire by itself doesn't transform — it needs something fluid to transform </a:t>
+            </a:r>
+            <a:pPr algn="l" indent="0" marL="0">
+              <a:lnSpc>
+                <a:spcPts val="1620"/>
+              </a:lnSpc>
+              <a:spcAft>
+                <a:spcPts val="300"/>
+              </a:spcAft>
+              <a:buNone/>
+            </a:pPr>
+            <a:r>
+              <a:rPr lang="en-US" sz="1200" i="1" dirty="0">
+                <a:solidFill>
+                  <a:srgbClr val="1C2833"/>
+                </a:solidFill>
+                <a:latin typeface="Arial" pitchFamily="34" charset="0"/>
+                <a:ea typeface="Arial" pitchFamily="34" charset="-122"/>
+                <a:cs typeface="Arial" pitchFamily="34" charset="-120"/>
+              </a:rPr>
+              <a:t>in</a:t>
+            </a:r>
+            <a:pPr algn="l" indent="0" marL="0">
+              <a:lnSpc>
+                <a:spcPts val="1620"/>
+              </a:lnSpc>
+              <a:spcAft>
+                <a:spcPts val="300"/>
+              </a:spcAft>
+              <a:buNone/>
+            </a:pPr>
+            <a:r>
+              <a:rPr lang="en-US" sz="1200" dirty="0">
+                <a:solidFill>
+                  <a:srgbClr val="1C2833"/>
+                </a:solidFill>
+                <a:latin typeface="Arial" pitchFamily="34" charset="0"/>
+                <a:ea typeface="Arial" pitchFamily="34" charset="-122"/>
+                <a:cs typeface="Arial" pitchFamily="34" charset="-120"/>
+              </a:rPr>
+              <a:t>. Hence </a:t>
+            </a:r>
+            <a:pPr algn="l" indent="0" marL="0">
+              <a:lnSpc>
+                <a:spcPts val="1620"/>
+              </a:lnSpc>
+              <a:spcAft>
+                <a:spcPts val="300"/>
+              </a:spcAft>
+              <a:buNone/>
+            </a:pPr>
+            <a:r>
+              <a:rPr lang="en-US" sz="1200" i="1" dirty="0">
+                <a:solidFill>
+                  <a:srgbClr val="1C2833"/>
+                </a:solidFill>
+                <a:latin typeface="Arial" pitchFamily="34" charset="0"/>
+                <a:ea typeface="Arial" pitchFamily="34" charset="-122"/>
+                <a:cs typeface="Arial" pitchFamily="34" charset="-120"/>
+              </a:rPr>
+              <a:t>tejas + ap = pitta</a:t>
+            </a:r>
+            <a:pPr algn="l" indent="0" marL="0">
+              <a:lnSpc>
+                <a:spcPts val="1620"/>
+              </a:lnSpc>
+              <a:spcAft>
+                <a:spcPts val="300"/>
+              </a:spcAft>
+              <a:buNone/>
+            </a:pPr>
+            <a:r>
+              <a:rPr lang="en-US" sz="1200" dirty="0">
+                <a:solidFill>
+                  <a:srgbClr val="1C2833"/>
+                </a:solidFill>
+                <a:latin typeface="Arial" pitchFamily="34" charset="0"/>
+                <a:ea typeface="Arial" pitchFamily="34" charset="-122"/>
+                <a:cs typeface="Arial" pitchFamily="34" charset="-120"/>
+              </a:rPr>
+              <a:t>.</a:t>
+            </a:r>
+            <a:endParaRPr lang="en-US" sz="1200" dirty="0"/>
+          </a:p>
+          <a:p>
+            <a:pPr algn="l" marL="342900" indent="-342900">
+              <a:lnSpc>
+                <a:spcPts val="1620"/>
+              </a:lnSpc>
+              <a:spcAft>
+                <a:spcPts val="300"/>
+              </a:spcAft>
+              <a:buSzPct val="100000"/>
+              <a:buChar char="•"/>
+            </a:pPr>
+            <a:r>
+              <a:rPr lang="en-US" sz="1200" dirty="0">
+                <a:solidFill>
+                  <a:srgbClr val="1C2833"/>
+                </a:solidFill>
+                <a:latin typeface="Arial" pitchFamily="34" charset="0"/>
+                <a:ea typeface="Arial" pitchFamily="34" charset="-122"/>
+                <a:cs typeface="Arial" pitchFamily="34" charset="-120"/>
+              </a:rPr>
+              <a:t>Don't go deep on </a:t>
+            </a:r>
+            <a:pPr algn="l" indent="0" marL="0">
+              <a:lnSpc>
+                <a:spcPts val="1620"/>
+              </a:lnSpc>
+              <a:spcAft>
+                <a:spcPts val="300"/>
+              </a:spcAft>
+              <a:buNone/>
+            </a:pPr>
+            <a:r>
+              <a:rPr lang="en-US" sz="1200" i="1" dirty="0">
+                <a:solidFill>
+                  <a:srgbClr val="1C2833"/>
+                </a:solidFill>
+                <a:latin typeface="Arial" pitchFamily="34" charset="0"/>
+                <a:ea typeface="Arial" pitchFamily="34" charset="-122"/>
+                <a:cs typeface="Arial" pitchFamily="34" charset="-120"/>
+              </a:rPr>
+              <a:t>prakṛti/vikṛti</a:t>
+            </a:r>
+            <a:pPr algn="l" indent="0" marL="0">
+              <a:lnSpc>
+                <a:spcPts val="1620"/>
+              </a:lnSpc>
+              <a:spcAft>
+                <a:spcPts val="300"/>
+              </a:spcAft>
+              <a:buNone/>
+            </a:pPr>
+            <a:r>
+              <a:rPr lang="en-US" sz="1200" dirty="0">
+                <a:solidFill>
+                  <a:srgbClr val="1C2833"/>
+                </a:solidFill>
+                <a:latin typeface="Arial" pitchFamily="34" charset="0"/>
+                <a:ea typeface="Arial" pitchFamily="34" charset="-122"/>
+                <a:cs typeface="Arial" pitchFamily="34" charset="-120"/>
+              </a:rPr>
+              <a:t> today. That's Day 3.</a:t>
+            </a:r>
+            <a:endParaRPr lang="en-US" sz="1200" dirty="0"/>
+          </a:p>
+        </p:txBody>
+      </p:sp>
+      <p:sp>
+        <p:nvSpPr>
+          <p:cNvPr id="5" name="Text 3"/>
+          <p:cNvSpPr/>
+          <p:nvPr/>
+        </p:nvSpPr>
+        <p:spPr>
+          <a:xfrm>
+            <a:off x="406301" y="4434929"/>
+            <a:ext cx="8498026" cy="213271"/>
+          </a:xfrm>
+          <a:prstGeom prst="rect">
+            <a:avLst/>
+          </a:prstGeom>
+          <a:noFill/>
+          <a:ln/>
+        </p:spPr>
+        <p:txBody>
+          <a:bodyPr wrap="square" lIns="0" tIns="0" rIns="0" bIns="0" rtlCol="0" anchor="t"/>
+          <a:lstStyle/>
+          <a:p>
+            <a:pPr algn="l" indent="0" marL="0">
+              <a:lnSpc>
+                <a:spcPts val="1680"/>
+              </a:lnSpc>
+              <a:spcBef>
+                <a:spcPts val="300"/>
+              </a:spcBef>
+              <a:spcAft>
+                <a:spcPts val="300"/>
+              </a:spcAft>
+              <a:buNone/>
+            </a:pPr>
+            <a:r>
+              <a:rPr lang="en-US" sz="1200" dirty="0">
+                <a:solidFill>
+                  <a:srgbClr val="1C2833"/>
+                </a:solidFill>
+                <a:latin typeface="Arial" pitchFamily="34" charset="0"/>
+                <a:ea typeface="Arial" pitchFamily="34" charset="-122"/>
+                <a:cs typeface="Arial" pitchFamily="34" charset="-120"/>
+              </a:rPr>
+              <a:t>Middle ·  · IKS Curriculum</a:t>
+            </a:r>
+            <a:endParaRPr lang="en-US" sz="1200" dirty="0"/>
+          </a:p>
+        </p:txBody>
+      </p:sp>
+    </p:spTree>
+  </p:cSld>
+  <p:clrMapOvr>
+    <a:masterClrMapping/>
+  </p:clrMapOvr>
+</p:sld>
+</file>
+
+<file path=ppt/slides/slide19.xml><?xml version="1.0" encoding="utf-8"?>
+<p:sld xmlns:a="http://schemas.openxmlformats.org/drawingml/2006/main" xmlns:r="http://schemas.openxmlformats.org/officeDocument/2006/relationships" xmlns:p="http://schemas.openxmlformats.org/presentationml/2006/main">
+  <p:cSld name="Slide 19">
+    <p:bg>
+      <p:bgPr>
+        <a:solidFill>
+          <a:srgbClr val="FFFFFF"/>
+        </a:solidFill>
+      </p:bgPr>
+    </p:bg>
+    <p:spTree>
+      <p:nvGrpSpPr>
+        <p:cNvPr id="1" name=""/>
+        <p:cNvGrpSpPr/>
+        <p:nvPr/>
+      </p:nvGrpSpPr>
+      <p:grpSpPr>
+        <a:xfrm>
+          <a:off x="0" y="0"/>
+          <a:ext cx="0" cy="0"/>
+          <a:chOff x="0" y="0"/>
+          <a:chExt cx="0" cy="0"/>
+        </a:xfrm>
+      </p:grpSpPr>
+      <p:sp>
+        <p:nvSpPr>
+          <p:cNvPr id="2" name="Text 0"/>
+          <p:cNvSpPr/>
+          <p:nvPr/>
+        </p:nvSpPr>
+        <p:spPr>
+          <a:xfrm>
+            <a:off x="0" y="0"/>
+            <a:ext cx="9144000" cy="101501"/>
+          </a:xfrm>
+          <a:prstGeom prst="rect">
+            <a:avLst/>
+          </a:prstGeom>
+          <a:solidFill>
+            <a:srgbClr val="277884"/>
+          </a:solidFill>
+          <a:ln/>
+        </p:spPr>
+        <p:txBody>
+          <a:bodyPr wrap="square" rtlCol="0" anchor="ctr"/>
+          <a:lstStyle/>
+          <a:p>
+            <a:pPr indent="0" marL="0">
+              <a:buNone/>
+            </a:pPr>
+            <a:endParaRPr lang="en-US" dirty="0"/>
+          </a:p>
+        </p:txBody>
+      </p:sp>
+      <p:sp>
+        <p:nvSpPr>
+          <p:cNvPr id="3" name="Text 1"/>
+          <p:cNvSpPr/>
+          <p:nvPr/>
+        </p:nvSpPr>
+        <p:spPr>
+          <a:xfrm>
+            <a:off x="406301" y="457051"/>
+            <a:ext cx="8498026" cy="274290"/>
+          </a:xfrm>
+          <a:prstGeom prst="rect">
+            <a:avLst/>
+          </a:prstGeom>
+          <a:noFill/>
+          <a:ln/>
+        </p:spPr>
+        <p:txBody>
+          <a:bodyPr wrap="square" lIns="0" tIns="0" rIns="0" bIns="0" rtlCol="0" anchor="t"/>
+          <a:lstStyle/>
+          <a:p>
+            <a:pPr algn="l" indent="0" marL="0">
+              <a:lnSpc>
+                <a:spcPts val="2160"/>
+              </a:lnSpc>
+              <a:spcBef>
+                <a:spcPts val="600"/>
+              </a:spcBef>
+              <a:spcAft>
+                <a:spcPts val="800"/>
+              </a:spcAft>
+              <a:buNone/>
+            </a:pPr>
+            <a:r>
+              <a:rPr lang="en-US" sz="1800" b="1" dirty="0">
+                <a:solidFill>
+                  <a:srgbClr val="FE4447"/>
+                </a:solidFill>
+                <a:latin typeface="Georgia" pitchFamily="34" charset="0"/>
+                <a:ea typeface="Georgia" pitchFamily="34" charset="-122"/>
+                <a:cs typeface="Georgia" pitchFamily="34" charset="-120"/>
+              </a:rPr>
+              <a:t>Citation(s) used in this lesson</a:t>
+            </a:r>
+            <a:endParaRPr lang="en-US" sz="1800" dirty="0"/>
+          </a:p>
+        </p:txBody>
+      </p:sp>
+      <p:sp>
+        <p:nvSpPr>
+          <p:cNvPr id="4" name="Text 2"/>
+          <p:cNvSpPr/>
+          <p:nvPr/>
+        </p:nvSpPr>
+        <p:spPr>
+          <a:xfrm>
+            <a:off x="634901" y="883593"/>
+            <a:ext cx="8102798" cy="300930"/>
+          </a:xfrm>
+          <a:prstGeom prst="rect">
+            <a:avLst/>
+          </a:prstGeom>
+          <a:noFill/>
+          <a:ln/>
+        </p:spPr>
+        <p:txBody>
+          <a:bodyPr wrap="square" lIns="0" tIns="0" rIns="0" bIns="0" rtlCol="0" anchor="t"/>
+          <a:lstStyle/>
+          <a:p>
+            <a:pPr algn="l" marL="342900" indent="-342900">
+              <a:lnSpc>
+                <a:spcPts val="1620"/>
+              </a:lnSpc>
+              <a:spcAft>
+                <a:spcPts val="300"/>
+              </a:spcAft>
+              <a:buSzPct val="100000"/>
+              <a:buChar char="•"/>
+            </a:pPr>
+            <a:r>
+              <a:rPr lang="en-US" sz="1200" dirty="0">
+                <a:solidFill>
+                  <a:srgbClr val="1C2833"/>
+                </a:solidFill>
+                <a:latin typeface="Arial" pitchFamily="34" charset="0"/>
+                <a:ea typeface="Arial" pitchFamily="34" charset="-122"/>
+                <a:cs typeface="Arial" pitchFamily="34" charset="-120"/>
+              </a:rPr>
+              <a:t>Caraka Saṁhitā, </a:t>
+            </a:r>
+            <a:pPr algn="l" indent="0" marL="0">
+              <a:lnSpc>
+                <a:spcPts val="1620"/>
+              </a:lnSpc>
+              <a:spcAft>
+                <a:spcPts val="300"/>
+              </a:spcAft>
+              <a:buNone/>
+            </a:pPr>
+            <a:r>
+              <a:rPr lang="en-US" sz="1200" i="1" dirty="0">
+                <a:solidFill>
+                  <a:srgbClr val="1C2833"/>
+                </a:solidFill>
+                <a:latin typeface="Arial" pitchFamily="34" charset="0"/>
+                <a:ea typeface="Arial" pitchFamily="34" charset="-122"/>
+                <a:cs typeface="Arial" pitchFamily="34" charset="-120"/>
+              </a:rPr>
+              <a:t>Sūtrasthāna</a:t>
+            </a:r>
+            <a:pPr algn="l" indent="0" marL="0">
+              <a:lnSpc>
+                <a:spcPts val="1620"/>
+              </a:lnSpc>
+              <a:spcAft>
+                <a:spcPts val="300"/>
+              </a:spcAft>
+              <a:buNone/>
+            </a:pPr>
+            <a:r>
+              <a:rPr lang="en-US" sz="1200" dirty="0">
+                <a:solidFill>
+                  <a:srgbClr val="1C2833"/>
+                </a:solidFill>
+                <a:latin typeface="Arial" pitchFamily="34" charset="0"/>
+                <a:ea typeface="Arial" pitchFamily="34" charset="-122"/>
+                <a:cs typeface="Arial" pitchFamily="34" charset="-120"/>
+              </a:rPr>
               <a:t> 1.57 (paraphrase; see </a:t>
             </a:r>
             <a:pPr algn="l" indent="0" marL="0">
               <a:lnSpc>
-                <a:spcPts val="1680"/>
-              </a:lnSpc>
-              <a:spcBef>
-                <a:spcPts val="300"/>
-              </a:spcBef>
+                <a:spcPts val="1620"/>
+              </a:lnSpc>
               <a:spcAft>
                 <a:spcPts val="300"/>
               </a:spcAft>
@@ -3297,11 +7038,8 @@
             </a:r>
             <a:pPr algn="l" indent="0" marL="0">
               <a:lnSpc>
-                <a:spcPts val="1680"/>
-              </a:lnSpc>
-              <a:spcBef>
-                <a:spcPts val="300"/>
-              </a:spcBef>
+                <a:spcPts val="1620"/>
+              </a:lnSpc>
               <a:spcAft>
                 <a:spcPts val="300"/>
               </a:spcAft>
@@ -3474,7 +7212,7 @@
                 <a:ea typeface="Georgia" pitchFamily="34" charset="-122"/>
                 <a:cs typeface="Georgia" pitchFamily="34" charset="-120"/>
               </a:rPr>
-              <a:t>Materials</a:t>
+              <a:t>Learning objective</a:t>
             </a:r>
             <a:endParaRPr lang="en-US" sz="1800" dirty="0"/>
           </a:p>
@@ -3522,7 +7260,7 @@
                 <a:ea typeface="Arial" pitchFamily="34" charset="-122"/>
                 <a:cs typeface="Arial" pitchFamily="34" charset="-120"/>
               </a:rPr>
-              <a:t>– Whiteboard with the </a:t>
+              <a:t>By the end of this lesson, students recall the five </a:t>
             </a:r>
             <a:pPr algn="l" indent="0" marL="0">
               <a:lnSpc>
@@ -3568,53 +7306,7 @@
                 <a:ea typeface="Arial" pitchFamily="34" charset="-122"/>
                 <a:cs typeface="Arial" pitchFamily="34" charset="-120"/>
               </a:rPr>
-              <a:t> diagram from Module 2 (or a printed copy) – A small fan, a candle (unlit, for show), a stone, a glass of water, an empty box – One blank page per student to start the </a:t>
-            </a:r>
-            <a:pPr algn="l" indent="0" marL="0">
-              <a:lnSpc>
-                <a:spcPts val="1680"/>
-              </a:lnSpc>
-              <a:spcBef>
-                <a:spcPts val="300"/>
-              </a:spcBef>
-              <a:spcAft>
-                <a:spcPts val="300"/>
-              </a:spcAft>
-              <a:buNone/>
-            </a:pPr>
-            <a:r>
-              <a:rPr lang="en-US" sz="1200" i="1" dirty="0">
-                <a:solidFill>
-                  <a:srgbClr val="1C2833"/>
-                </a:solidFill>
-                <a:latin typeface="Arial" pitchFamily="34" charset="0"/>
-                <a:ea typeface="Arial" pitchFamily="34" charset="-122"/>
-                <a:cs typeface="Arial" pitchFamily="34" charset="-120"/>
-              </a:rPr>
-              <a:t>doṣa</a:t>
-            </a:r>
-            <a:pPr algn="l" indent="0" marL="0">
-              <a:lnSpc>
-                <a:spcPts val="1680"/>
-              </a:lnSpc>
-              <a:spcBef>
-                <a:spcPts val="300"/>
-              </a:spcBef>
-              <a:spcAft>
-                <a:spcPts val="300"/>
-              </a:spcAft>
-              <a:buNone/>
-            </a:pPr>
-            <a:r>
-              <a:rPr lang="en-US" sz="1200" dirty="0">
-                <a:solidFill>
-                  <a:srgbClr val="1C2833"/>
-                </a:solidFill>
-                <a:latin typeface="Arial" pitchFamily="34" charset="0"/>
-                <a:ea typeface="Arial" pitchFamily="34" charset="-122"/>
-                <a:cs typeface="Arial" pitchFamily="34" charset="-120"/>
-              </a:rPr>
-              <a:t> notebook</a:t>
+              <a:t>, pair them into three combinations, and articulate why the body might be organised around motion, transformation, and structure.</a:t>
             </a:r>
             <a:endParaRPr lang="en-US" sz="1200" dirty="0"/>
           </a:p>
@@ -3772,7 +7464,7 @@
                 <a:ea typeface="Georgia" pitchFamily="34" charset="-122"/>
                 <a:cs typeface="Georgia" pitchFamily="34" charset="-120"/>
               </a:rPr>
-              <a:t>Vocabulary introduced today</a:t>
+              <a:t>Materials</a:t>
             </a:r>
             <a:endParaRPr lang="en-US" sz="1800" dirty="0"/>
           </a:p>
@@ -3787,7 +7479,7 @@
         <p:spPr>
           <a:xfrm>
             <a:off x="634901" y="883593"/>
-            <a:ext cx="8102798" cy="731341"/>
+            <a:ext cx="8102798" cy="769441"/>
           </a:xfrm>
           <a:prstGeom prst="rect">
             <a:avLst/>
@@ -3810,6 +7502,26 @@
               <a:buChar char="•"/>
             </a:pPr>
             <a:r>
+              <a:rPr lang="en-US" sz="1200" dirty="0">
+                <a:solidFill>
+                  <a:srgbClr val="1C2833"/>
+                </a:solidFill>
+                <a:latin typeface="Arial" pitchFamily="34" charset="0"/>
+                <a:ea typeface="Arial" pitchFamily="34" charset="-122"/>
+                <a:cs typeface="Arial" pitchFamily="34" charset="-120"/>
+              </a:rPr>
+              <a:t>Whiteboard with the </a:t>
+            </a:r>
+            <a:pPr algn="l" indent="0" marL="0">
+              <a:lnSpc>
+                <a:spcPts val="1620"/>
+              </a:lnSpc>
+              <a:spcAft>
+                <a:spcPts val="300"/>
+              </a:spcAft>
+              <a:buNone/>
+            </a:pPr>
+            <a:r>
               <a:rPr lang="en-US" sz="1200" i="1" dirty="0">
                 <a:solidFill>
                   <a:srgbClr val="1C2833"/>
@@ -3818,7 +7530,7 @@
                 <a:ea typeface="Arial" pitchFamily="34" charset="-122"/>
                 <a:cs typeface="Arial" pitchFamily="34" charset="-120"/>
               </a:rPr>
-              <a:t>doṣa</a:t>
+              <a:t>pañcabhūta</a:t>
             </a:r>
             <a:pPr algn="l" indent="0" marL="0">
               <a:lnSpc>
@@ -3838,7 +7550,7 @@
                 <a:ea typeface="Arial" pitchFamily="34" charset="-122"/>
                 <a:cs typeface="Arial" pitchFamily="34" charset="-120"/>
               </a:rPr>
-              <a:t> (IAST: doṣa; lit. "that which can become faulty / humour") — a biological functional principle in Ayurveda. In its natural state, it sustains the body; out of balance, it causes harm.</a:t>
+              <a:t> diagram from Module 2 (or a printed copy)</a:t>
             </a:r>
             <a:endParaRPr lang="en-US" sz="1200" dirty="0"/>
           </a:p>
@@ -3854,6 +7566,50 @@
               <a:buChar char="•"/>
             </a:pPr>
             <a:r>
+              <a:rPr lang="en-US" sz="1200" dirty="0">
+                <a:solidFill>
+                  <a:srgbClr val="1C2833"/>
+                </a:solidFill>
+                <a:latin typeface="Arial" pitchFamily="34" charset="0"/>
+                <a:ea typeface="Arial" pitchFamily="34" charset="-122"/>
+                <a:cs typeface="Arial" pitchFamily="34" charset="-120"/>
+              </a:rPr>
+              <a:t>A small fan, a candle (unlit, for show), a stone, a glass of water, an empty box</a:t>
+            </a:r>
+            <a:endParaRPr lang="en-US" sz="1200" dirty="0"/>
+          </a:p>
+          <a:p>
+            <a:pPr algn="l" marL="342900" indent="-342900">
+              <a:lnSpc>
+                <a:spcPts val="1620"/>
+              </a:lnSpc>
+              <a:spcAft>
+                <a:spcPts val="300"/>
+              </a:spcAft>
+              <a:buSzPct val="100000"/>
+              <a:buChar char="•"/>
+            </a:pPr>
+            <a:r>
+              <a:rPr lang="en-US" sz="1200" dirty="0">
+                <a:solidFill>
+                  <a:srgbClr val="1C2833"/>
+                </a:solidFill>
+                <a:latin typeface="Arial" pitchFamily="34" charset="0"/>
+                <a:ea typeface="Arial" pitchFamily="34" charset="-122"/>
+                <a:cs typeface="Arial" pitchFamily="34" charset="-120"/>
+              </a:rPr>
+              <a:t>One blank page per student to start the </a:t>
+            </a:r>
+            <a:pPr algn="l" indent="0" marL="0">
+              <a:lnSpc>
+                <a:spcPts val="1620"/>
+              </a:lnSpc>
+              <a:spcAft>
+                <a:spcPts val="300"/>
+              </a:spcAft>
+              <a:buNone/>
+            </a:pPr>
+            <a:r>
               <a:rPr lang="en-US" sz="1200" i="1" dirty="0">
                 <a:solidFill>
                   <a:srgbClr val="1C2833"/>
@@ -3862,7 +7618,7 @@
                 <a:ea typeface="Arial" pitchFamily="34" charset="-122"/>
                 <a:cs typeface="Arial" pitchFamily="34" charset="-120"/>
               </a:rPr>
-              <a:t>tridoṣa</a:t>
+              <a:t>doṣa</a:t>
             </a:r>
             <a:pPr algn="l" indent="0" marL="0">
               <a:lnSpc>
@@ -3882,47 +7638,7 @@
                 <a:ea typeface="Arial" pitchFamily="34" charset="-122"/>
                 <a:cs typeface="Arial" pitchFamily="34" charset="-120"/>
               </a:rPr>
-              <a:t> (IAST: tri-doṣa; lit. "three doṣas") — the three together: </a:t>
-            </a:r>
-            <a:pPr algn="l" indent="0" marL="0">
-              <a:lnSpc>
-                <a:spcPts val="1620"/>
-              </a:lnSpc>
-              <a:spcAft>
-                <a:spcPts val="300"/>
-              </a:spcAft>
-              <a:buNone/>
-            </a:pPr>
-            <a:r>
-              <a:rPr lang="en-US" sz="1200" i="1" dirty="0">
-                <a:solidFill>
-                  <a:srgbClr val="1C2833"/>
-                </a:solidFill>
-                <a:latin typeface="Arial" pitchFamily="34" charset="0"/>
-                <a:ea typeface="Arial" pitchFamily="34" charset="-122"/>
-                <a:cs typeface="Arial" pitchFamily="34" charset="-120"/>
-              </a:rPr>
-              <a:t>vāta, pitta, kapha</a:t>
-            </a:r>
-            <a:pPr algn="l" indent="0" marL="0">
-              <a:lnSpc>
-                <a:spcPts val="1620"/>
-              </a:lnSpc>
-              <a:spcAft>
-                <a:spcPts val="300"/>
-              </a:spcAft>
-              <a:buNone/>
-            </a:pPr>
-            <a:r>
-              <a:rPr lang="en-US" sz="1200" dirty="0">
-                <a:solidFill>
-                  <a:srgbClr val="1C2833"/>
-                </a:solidFill>
-                <a:latin typeface="Arial" pitchFamily="34" charset="0"/>
-                <a:ea typeface="Arial" pitchFamily="34" charset="-122"/>
-                <a:cs typeface="Arial" pitchFamily="34" charset="-120"/>
-              </a:rPr>
-              <a:t>.</a:t>
+              <a:t> notebook</a:t>
             </a:r>
             <a:endParaRPr lang="en-US" sz="1200" dirty="0"/>
           </a:p>
@@ -4080,7 +7796,7 @@
                 <a:ea typeface="Georgia" pitchFamily="34" charset="-122"/>
                 <a:cs typeface="Georgia" pitchFamily="34" charset="-120"/>
               </a:rPr>
-              <a:t>Lesson flow</a:t>
+              <a:t>Vocabulary introduced today</a:t>
             </a:r>
             <a:endParaRPr lang="en-US" sz="1800" dirty="0"/>
           </a:p>
@@ -4089,6 +7805,156 @@
       <p:sp>
         <p:nvSpPr>
           <p:cNvPr id="4" name="Text 2"/>
+          <p:cNvSpPr/>
+          <p:nvPr/>
+        </p:nvSpPr>
+        <p:spPr>
+          <a:xfrm>
+            <a:off x="634901" y="883593"/>
+            <a:ext cx="8102798" cy="731341"/>
+          </a:xfrm>
+          <a:prstGeom prst="rect">
+            <a:avLst/>
+          </a:prstGeom>
+          <a:noFill/>
+          <a:ln/>
+        </p:spPr>
+        <p:txBody>
+          <a:bodyPr wrap="square" lIns="0" tIns="0" rIns="0" bIns="0" rtlCol="0" anchor="t"/>
+          <a:lstStyle/>
+          <a:p>
+            <a:pPr algn="l" marL="342900" indent="-342900">
+              <a:lnSpc>
+                <a:spcPts val="1620"/>
+              </a:lnSpc>
+              <a:spcAft>
+                <a:spcPts val="300"/>
+              </a:spcAft>
+              <a:buSzPct val="100000"/>
+              <a:buChar char="•"/>
+            </a:pPr>
+            <a:r>
+              <a:rPr lang="en-US" sz="1200" i="1" dirty="0">
+                <a:solidFill>
+                  <a:srgbClr val="1C2833"/>
+                </a:solidFill>
+                <a:latin typeface="Arial" pitchFamily="34" charset="0"/>
+                <a:ea typeface="Arial" pitchFamily="34" charset="-122"/>
+                <a:cs typeface="Arial" pitchFamily="34" charset="-120"/>
+              </a:rPr>
+              <a:t>doṣa</a:t>
+            </a:r>
+            <a:pPr algn="l" indent="0" marL="0">
+              <a:lnSpc>
+                <a:spcPts val="1620"/>
+              </a:lnSpc>
+              <a:spcAft>
+                <a:spcPts val="300"/>
+              </a:spcAft>
+              <a:buNone/>
+            </a:pPr>
+            <a:r>
+              <a:rPr lang="en-US" sz="1200" dirty="0">
+                <a:solidFill>
+                  <a:srgbClr val="1C2833"/>
+                </a:solidFill>
+                <a:latin typeface="Arial" pitchFamily="34" charset="0"/>
+                <a:ea typeface="Arial" pitchFamily="34" charset="-122"/>
+                <a:cs typeface="Arial" pitchFamily="34" charset="-120"/>
+              </a:rPr>
+              <a:t> (IAST: doṣa; lit. "that which can become faulty / humour") — a biological functional principle in Ayurveda. In its natural state, it sustains the body; out of balance, it causes harm.</a:t>
+            </a:r>
+            <a:endParaRPr lang="en-US" sz="1200" dirty="0"/>
+          </a:p>
+          <a:p>
+            <a:pPr algn="l" marL="342900" indent="-342900">
+              <a:lnSpc>
+                <a:spcPts val="1620"/>
+              </a:lnSpc>
+              <a:spcAft>
+                <a:spcPts val="300"/>
+              </a:spcAft>
+              <a:buSzPct val="100000"/>
+              <a:buChar char="•"/>
+            </a:pPr>
+            <a:r>
+              <a:rPr lang="en-US" sz="1200" i="1" dirty="0">
+                <a:solidFill>
+                  <a:srgbClr val="1C2833"/>
+                </a:solidFill>
+                <a:latin typeface="Arial" pitchFamily="34" charset="0"/>
+                <a:ea typeface="Arial" pitchFamily="34" charset="-122"/>
+                <a:cs typeface="Arial" pitchFamily="34" charset="-120"/>
+              </a:rPr>
+              <a:t>tridoṣa</a:t>
+            </a:r>
+            <a:pPr algn="l" indent="0" marL="0">
+              <a:lnSpc>
+                <a:spcPts val="1620"/>
+              </a:lnSpc>
+              <a:spcAft>
+                <a:spcPts val="300"/>
+              </a:spcAft>
+              <a:buNone/>
+            </a:pPr>
+            <a:r>
+              <a:rPr lang="en-US" sz="1200" dirty="0">
+                <a:solidFill>
+                  <a:srgbClr val="1C2833"/>
+                </a:solidFill>
+                <a:latin typeface="Arial" pitchFamily="34" charset="0"/>
+                <a:ea typeface="Arial" pitchFamily="34" charset="-122"/>
+                <a:cs typeface="Arial" pitchFamily="34" charset="-120"/>
+              </a:rPr>
+              <a:t> (IAST: tri-doṣa; lit. "three doṣas") — the three together: </a:t>
+            </a:r>
+            <a:pPr algn="l" indent="0" marL="0">
+              <a:lnSpc>
+                <a:spcPts val="1620"/>
+              </a:lnSpc>
+              <a:spcAft>
+                <a:spcPts val="300"/>
+              </a:spcAft>
+              <a:buNone/>
+            </a:pPr>
+            <a:r>
+              <a:rPr lang="en-US" sz="1200" i="1" dirty="0">
+                <a:solidFill>
+                  <a:srgbClr val="1C2833"/>
+                </a:solidFill>
+                <a:latin typeface="Arial" pitchFamily="34" charset="0"/>
+                <a:ea typeface="Arial" pitchFamily="34" charset="-122"/>
+                <a:cs typeface="Arial" pitchFamily="34" charset="-120"/>
+              </a:rPr>
+              <a:t>vāta, pitta, kapha</a:t>
+            </a:r>
+            <a:pPr algn="l" indent="0" marL="0">
+              <a:lnSpc>
+                <a:spcPts val="1620"/>
+              </a:lnSpc>
+              <a:spcAft>
+                <a:spcPts val="300"/>
+              </a:spcAft>
+              <a:buNone/>
+            </a:pPr>
+            <a:r>
+              <a:rPr lang="en-US" sz="1200" dirty="0">
+                <a:solidFill>
+                  <a:srgbClr val="1C2833"/>
+                </a:solidFill>
+                <a:latin typeface="Arial" pitchFamily="34" charset="0"/>
+                <a:ea typeface="Arial" pitchFamily="34" charset="-122"/>
+                <a:cs typeface="Arial" pitchFamily="34" charset="-120"/>
+              </a:rPr>
+              <a:t>.</a:t>
+            </a:r>
+            <a:endParaRPr lang="en-US" sz="1200" dirty="0"/>
+          </a:p>
+        </p:txBody>
+      </p:sp>
+      <p:sp>
+        <p:nvSpPr>
+          <p:cNvPr id="5" name="Text 3"/>
           <p:cNvSpPr/>
           <p:nvPr/>
         </p:nvSpPr>
@@ -4238,7 +8104,7 @@
                 <a:ea typeface="Georgia" pitchFamily="34" charset="-122"/>
                 <a:cs typeface="Georgia" pitchFamily="34" charset="-120"/>
               </a:rPr>
-              <a:t>Warm-up (5 min)</a:t>
+              <a:t>Lesson flow</a:t>
             </a:r>
             <a:endParaRPr lang="en-US" sz="1800" dirty="0"/>
           </a:p>
@@ -4247,170 +8113,6 @@
       <p:sp>
         <p:nvSpPr>
           <p:cNvPr id="4" name="Text 2"/>
-          <p:cNvSpPr/>
-          <p:nvPr/>
-        </p:nvSpPr>
-        <p:spPr>
-          <a:xfrm>
-            <a:off x="406301" y="870942"/>
-            <a:ext cx="8498026" cy="213271"/>
-          </a:xfrm>
-          <a:prstGeom prst="rect">
-            <a:avLst/>
-          </a:prstGeom>
-          <a:noFill/>
-          <a:ln/>
-        </p:spPr>
-        <p:txBody>
-          <a:bodyPr wrap="square" lIns="0" tIns="0" rIns="0" bIns="0" rtlCol="0" anchor="t"/>
-          <a:lstStyle/>
-          <a:p>
-            <a:pPr algn="l" indent="0" marL="0">
-              <a:lnSpc>
-                <a:spcPts val="1680"/>
-              </a:lnSpc>
-              <a:spcBef>
-                <a:spcPts val="300"/>
-              </a:spcBef>
-              <a:spcAft>
-                <a:spcPts val="300"/>
-              </a:spcAft>
-              <a:buNone/>
-            </a:pPr>
-            <a:r>
-              <a:rPr lang="en-US" sz="1200" dirty="0">
-                <a:solidFill>
-                  <a:srgbClr val="1C2833"/>
-                </a:solidFill>
-                <a:latin typeface="Arial" pitchFamily="34" charset="0"/>
-                <a:ea typeface="Arial" pitchFamily="34" charset="-122"/>
-                <a:cs typeface="Arial" pitchFamily="34" charset="-120"/>
-              </a:rPr>
-              <a:t>– On the board: </a:t>
-            </a:r>
-            <a:pPr algn="l" indent="0" marL="0">
-              <a:lnSpc>
-                <a:spcPts val="1680"/>
-              </a:lnSpc>
-              <a:spcBef>
-                <a:spcPts val="300"/>
-              </a:spcBef>
-              <a:spcAft>
-                <a:spcPts val="300"/>
-              </a:spcAft>
-              <a:buNone/>
-            </a:pPr>
-            <a:r>
-              <a:rPr lang="en-US" sz="1200" i="1" dirty="0">
-                <a:solidFill>
-                  <a:srgbClr val="1C2833"/>
-                </a:solidFill>
-                <a:latin typeface="Arial" pitchFamily="34" charset="0"/>
-                <a:ea typeface="Arial" pitchFamily="34" charset="-122"/>
-                <a:cs typeface="Arial" pitchFamily="34" charset="-120"/>
-              </a:rPr>
-              <a:t>"Name the five elements in IAST."</a:t>
-            </a:r>
-            <a:pPr algn="l" indent="0" marL="0">
-              <a:lnSpc>
-                <a:spcPts val="1680"/>
-              </a:lnSpc>
-              <a:spcBef>
-                <a:spcPts val="300"/>
-              </a:spcBef>
-              <a:spcAft>
-                <a:spcPts val="300"/>
-              </a:spcAft>
-              <a:buNone/>
-            </a:pPr>
-            <a:r>
-              <a:rPr lang="en-US" sz="1200" dirty="0">
-                <a:solidFill>
-                  <a:srgbClr val="1C2833"/>
-                </a:solidFill>
-                <a:latin typeface="Arial" pitchFamily="34" charset="0"/>
-                <a:ea typeface="Arial" pitchFamily="34" charset="-122"/>
-                <a:cs typeface="Arial" pitchFamily="34" charset="-120"/>
-              </a:rPr>
-              <a:t> Whole-class chorus.</a:t>
-            </a:r>
-            <a:endParaRPr lang="en-US" sz="1200" dirty="0"/>
-          </a:p>
-        </p:txBody>
-      </p:sp>
-      <p:sp>
-        <p:nvSpPr>
-          <p:cNvPr id="5" name="Text 3"/>
-          <p:cNvSpPr/>
-          <p:nvPr/>
-        </p:nvSpPr>
-        <p:spPr>
-          <a:xfrm>
-            <a:off x="634901" y="1173063"/>
-            <a:ext cx="8102798" cy="525661"/>
-          </a:xfrm>
-          <a:prstGeom prst="rect">
-            <a:avLst/>
-          </a:prstGeom>
-          <a:noFill/>
-          <a:ln/>
-        </p:spPr>
-        <p:txBody>
-          <a:bodyPr wrap="square" lIns="0" tIns="0" rIns="0" bIns="0" rtlCol="0" anchor="t"/>
-          <a:lstStyle/>
-          <a:p>
-            <a:pPr algn="l" marL="342900" indent="-342900">
-              <a:lnSpc>
-                <a:spcPts val="1620"/>
-              </a:lnSpc>
-              <a:spcAft>
-                <a:spcPts val="300"/>
-              </a:spcAft>
-              <a:buSzPct val="100000"/>
-              <a:buChar char="•"/>
-            </a:pPr>
-            <a:r>
-              <a:rPr lang="en-US" sz="1200" i="1" dirty="0">
-                <a:solidFill>
-                  <a:srgbClr val="1C2833"/>
-                </a:solidFill>
-                <a:latin typeface="Arial" pitchFamily="34" charset="0"/>
-                <a:ea typeface="Arial" pitchFamily="34" charset="-122"/>
-                <a:cs typeface="Arial" pitchFamily="34" charset="-120"/>
-              </a:rPr>
-              <a:t>"What did pṛthvī mean again? Ap? Tejas? Vāyu? Ākāśa?"</a:t>
-            </a:r>
-            <a:endParaRPr lang="en-US" sz="1200" dirty="0"/>
-          </a:p>
-          <a:p>
-            <a:pPr algn="l" marL="342900" indent="-342900">
-              <a:lnSpc>
-                <a:spcPts val="1620"/>
-              </a:lnSpc>
-              <a:spcAft>
-                <a:spcPts val="300"/>
-              </a:spcAft>
-              <a:buSzPct val="100000"/>
-              <a:buChar char="•"/>
-            </a:pPr>
-            <a:r>
-              <a:rPr lang="en-US" sz="1200" i="1" dirty="0">
-                <a:solidFill>
-                  <a:srgbClr val="1C2833"/>
-                </a:solidFill>
-                <a:latin typeface="Arial" pitchFamily="34" charset="0"/>
-                <a:ea typeface="Arial" pitchFamily="34" charset="-122"/>
-                <a:cs typeface="Arial" pitchFamily="34" charset="-120"/>
-              </a:rPr>
-              <a:t>"Today we ask: what happens when you combine two of them at a time? Why might the body be built that way?"</a:t>
-            </a:r>
-            <a:endParaRPr lang="en-US" sz="1200" dirty="0"/>
-          </a:p>
-        </p:txBody>
-      </p:sp>
-      <p:sp>
-        <p:nvSpPr>
-          <p:cNvPr id="6" name="Text 4"/>
           <p:cNvSpPr/>
           <p:nvPr/>
         </p:nvSpPr>
@@ -4560,7 +8262,7 @@
                 <a:ea typeface="Georgia" pitchFamily="34" charset="-122"/>
                 <a:cs typeface="Georgia" pitchFamily="34" charset="-120"/>
               </a:rPr>
-              <a:t>Activity (15 min) — Build your tridoṣa page</a:t>
+              <a:t>Warm-up (5 min)</a:t>
             </a:r>
             <a:endParaRPr lang="en-US" sz="1800" dirty="0"/>
           </a:p>
@@ -4574,8 +8276,8 @@
         </p:nvSpPr>
         <p:spPr>
           <a:xfrm>
-            <a:off x="406301" y="870942"/>
-            <a:ext cx="8498026" cy="853083"/>
+            <a:off x="634901" y="883593"/>
+            <a:ext cx="8102798" cy="769441"/>
           </a:xfrm>
           <a:prstGeom prst="rect">
             <a:avLst/>
@@ -4587,17 +8289,15 @@
           <a:bodyPr wrap="square" lIns="0" tIns="0" rIns="0" bIns="0" rtlCol="0" anchor="t"/>
           <a:lstStyle/>
           <a:p>
-            <a:pPr algn="l" indent="0" marL="0">
-              <a:lnSpc>
-                <a:spcPts val="1680"/>
-              </a:lnSpc>
-              <a:spcBef>
-                <a:spcPts val="300"/>
-              </a:spcBef>
-              <a:spcAft>
-                <a:spcPts val="300"/>
-              </a:spcAft>
-              <a:buNone/>
+            <a:pPr algn="l" marL="342900" indent="-342900">
+              <a:lnSpc>
+                <a:spcPts val="1620"/>
+              </a:lnSpc>
+              <a:spcAft>
+                <a:spcPts val="300"/>
+              </a:spcAft>
+              <a:buSzPct val="100000"/>
+              <a:buChar char="•"/>
             </a:pPr>
             <a:r>
               <a:rPr lang="en-US" sz="1200" dirty="0">
@@ -4608,38 +8308,32 @@
                 <a:ea typeface="Arial" pitchFamily="34" charset="-122"/>
                 <a:cs typeface="Arial" pitchFamily="34" charset="-120"/>
               </a:rPr>
-              <a:t>– Open notebook to a fresh page. At the top, write: </a:t>
-            </a:r>
-            <a:pPr algn="l" indent="0" marL="0">
-              <a:lnSpc>
-                <a:spcPts val="1680"/>
-              </a:lnSpc>
-              <a:spcBef>
-                <a:spcPts val="300"/>
-              </a:spcBef>
-              <a:spcAft>
-                <a:spcPts val="300"/>
-              </a:spcAft>
-              <a:buNone/>
-            </a:pPr>
-            <a:r>
-              <a:rPr lang="en-US" sz="1200" b="1" dirty="0">
-                <a:solidFill>
-                  <a:srgbClr val="1C2833"/>
-                </a:solidFill>
-                <a:latin typeface="Arial" pitchFamily="34" charset="0"/>
-                <a:ea typeface="Arial" pitchFamily="34" charset="-122"/>
-                <a:cs typeface="Arial" pitchFamily="34" charset="-120"/>
-              </a:rPr>
-              <a:t>tridoṣa — three doṣa</a:t>
-            </a:r>
-            <a:pPr algn="l" indent="0" marL="0">
-              <a:lnSpc>
-                <a:spcPts val="1680"/>
-              </a:lnSpc>
-              <a:spcBef>
-                <a:spcPts val="300"/>
-              </a:spcBef>
+              <a:t>On the board: </a:t>
+            </a:r>
+            <a:pPr algn="l" indent="0" marL="0">
+              <a:lnSpc>
+                <a:spcPts val="1620"/>
+              </a:lnSpc>
+              <a:spcAft>
+                <a:spcPts val="300"/>
+              </a:spcAft>
+              <a:buNone/>
+            </a:pPr>
+            <a:r>
+              <a:rPr lang="en-US" sz="1200" i="1" dirty="0">
+                <a:solidFill>
+                  <a:srgbClr val="1C2833"/>
+                </a:solidFill>
+                <a:latin typeface="Arial" pitchFamily="34" charset="0"/>
+                <a:ea typeface="Arial" pitchFamily="34" charset="-122"/>
+                <a:cs typeface="Arial" pitchFamily="34" charset="-120"/>
+              </a:rPr>
+              <a:t>"Name the five elements in IAST."</a:t>
+            </a:r>
+            <a:pPr algn="l" indent="0" marL="0">
+              <a:lnSpc>
+                <a:spcPts val="1620"/>
+              </a:lnSpc>
               <a:spcAft>
                 <a:spcPts val="300"/>
               </a:spcAft>
@@ -4654,19 +8348,20 @@
                 <a:ea typeface="Arial" pitchFamily="34" charset="-122"/>
                 <a:cs typeface="Arial" pitchFamily="34" charset="-120"/>
               </a:rPr>
-              <a:t>. – Draw three columns, one per </a:t>
-            </a:r>
-            <a:pPr algn="l" indent="0" marL="0">
-              <a:lnSpc>
-                <a:spcPts val="1680"/>
-              </a:lnSpc>
-              <a:spcBef>
-                <a:spcPts val="300"/>
-              </a:spcBef>
-              <a:spcAft>
-                <a:spcPts val="300"/>
-              </a:spcAft>
-              <a:buNone/>
+              <a:t> Whole-class chorus.</a:t>
+            </a:r>
+            <a:endParaRPr lang="en-US" sz="1200" dirty="0"/>
+          </a:p>
+          <a:p>
+            <a:pPr algn="l" marL="342900" indent="-342900">
+              <a:lnSpc>
+                <a:spcPts val="1620"/>
+              </a:lnSpc>
+              <a:spcAft>
+                <a:spcPts val="300"/>
+              </a:spcAft>
+              <a:buSzPct val="100000"/>
+              <a:buChar char="•"/>
             </a:pPr>
             <a:r>
               <a:rPr lang="en-US" sz="1200" i="1" dirty="0">
@@ -4677,30 +8372,31 @@
                 <a:ea typeface="Arial" pitchFamily="34" charset="-122"/>
                 <a:cs typeface="Arial" pitchFamily="34" charset="-120"/>
               </a:rPr>
-              <a:t>doṣa</a:t>
-            </a:r>
-            <a:pPr algn="l" indent="0" marL="0">
-              <a:lnSpc>
-                <a:spcPts val="1680"/>
-              </a:lnSpc>
-              <a:spcBef>
-                <a:spcPts val="300"/>
-              </a:spcBef>
-              <a:spcAft>
-                <a:spcPts val="300"/>
-              </a:spcAft>
-              <a:buNone/>
-            </a:pPr>
-            <a:r>
-              <a:rPr lang="en-US" sz="1200" dirty="0">
-                <a:solidFill>
-                  <a:srgbClr val="1C2833"/>
-                </a:solidFill>
-                <a:latin typeface="Arial" pitchFamily="34" charset="0"/>
-                <a:ea typeface="Arial" pitchFamily="34" charset="-122"/>
-                <a:cs typeface="Arial" pitchFamily="34" charset="-120"/>
-              </a:rPr>
-              <a:t>. At the top of each column write the Sanskrit name + IAST + literal meaning. – Below each name, draw the two elements that combine. Use the Module 2 element-symbol you made earlier. – Leave the rest of the column blank — you'll fill it tomorrow. – Partner check: swap notebooks with the person next to you. Read theirs out loud. Catch one mistake if you can.</a:t>
+              <a:t>"What did pṛthvī mean again? Ap? Tejas? Vāyu? Ākāśa?"</a:t>
+            </a:r>
+            <a:endParaRPr lang="en-US" sz="1200" dirty="0"/>
+          </a:p>
+          <a:p>
+            <a:pPr algn="l" marL="342900" indent="-342900">
+              <a:lnSpc>
+                <a:spcPts val="1620"/>
+              </a:lnSpc>
+              <a:spcAft>
+                <a:spcPts val="300"/>
+              </a:spcAft>
+              <a:buSzPct val="100000"/>
+              <a:buChar char="•"/>
+            </a:pPr>
+            <a:r>
+              <a:rPr lang="en-US" sz="1200" i="1" dirty="0">
+                <a:solidFill>
+                  <a:srgbClr val="1C2833"/>
+                </a:solidFill>
+                <a:latin typeface="Arial" pitchFamily="34" charset="0"/>
+                <a:ea typeface="Arial" pitchFamily="34" charset="-122"/>
+                <a:cs typeface="Arial" pitchFamily="34" charset="-120"/>
+              </a:rPr>
+              <a:t>"Today we ask: what happens when you combine two of them at a time? Why might the body be built that way?"</a:t>
             </a:r>
             <a:endParaRPr lang="en-US" sz="1200" dirty="0"/>
           </a:p>
@@ -4858,7 +8554,7 @@
                 <a:ea typeface="Georgia" pitchFamily="34" charset="-122"/>
                 <a:cs typeface="Georgia" pitchFamily="34" charset="-120"/>
               </a:rPr>
-              <a:t>Wrap-up (5 min)</a:t>
+              <a:t>Core (20 min)</a:t>
             </a:r>
             <a:endParaRPr lang="en-US" sz="1800" dirty="0"/>
           </a:p>
@@ -4872,8 +8568,8 @@
         </p:nvSpPr>
         <p:spPr>
           <a:xfrm>
-            <a:off x="406301" y="870942"/>
-            <a:ext cx="8498026" cy="426541"/>
+            <a:off x="634901" y="883593"/>
+            <a:ext cx="8102798" cy="281880"/>
           </a:xfrm>
           <a:prstGeom prst="rect">
             <a:avLst/>
@@ -4885,13 +8581,31 @@
           <a:bodyPr wrap="square" lIns="0" tIns="0" rIns="0" bIns="0" rtlCol="0" anchor="t"/>
           <a:lstStyle/>
           <a:p>
-            <a:pPr algn="l" indent="0" marL="0">
-              <a:lnSpc>
-                <a:spcPts val="1680"/>
-              </a:lnSpc>
-              <a:spcBef>
-                <a:spcPts val="300"/>
-              </a:spcBef>
+            <a:pPr algn="l" marL="342900" indent="-342900">
+              <a:lnSpc>
+                <a:spcPts val="1620"/>
+              </a:lnSpc>
+              <a:spcAft>
+                <a:spcPts val="300"/>
+              </a:spcAft>
+              <a:buSzPct val="100000"/>
+              <a:buChar char="•"/>
+            </a:pPr>
+            <a:r>
+              <a:rPr lang="en-US" sz="1200" b="1" dirty="0">
+                <a:solidFill>
+                  <a:srgbClr val="1C2833"/>
+                </a:solidFill>
+                <a:latin typeface="Arial" pitchFamily="34" charset="0"/>
+                <a:ea typeface="Arial" pitchFamily="34" charset="-122"/>
+                <a:cs typeface="Arial" pitchFamily="34" charset="-120"/>
+              </a:rPr>
+              <a:t>Recall the five elements with the props.</a:t>
+            </a:r>
+            <a:pPr algn="l" indent="0" marL="0">
+              <a:lnSpc>
+                <a:spcPts val="1620"/>
+              </a:lnSpc>
               <a:spcAft>
                 <a:spcPts val="300"/>
               </a:spcAft>
@@ -4906,15 +8620,58 @@
                 <a:ea typeface="Arial" pitchFamily="34" charset="-122"/>
                 <a:cs typeface="Arial" pitchFamily="34" charset="-120"/>
               </a:rPr>
-              <a:t>– One-question exit: </a:t>
-            </a:r>
-            <a:pPr algn="l" indent="0" marL="0">
-              <a:lnSpc>
-                <a:spcPts val="1680"/>
-              </a:lnSpc>
-              <a:spcBef>
-                <a:spcPts val="300"/>
-              </a:spcBef>
+              <a:t> Hold each up briefly:</a:t>
+            </a:r>
+            <a:endParaRPr lang="en-US" sz="1200" dirty="0"/>
+          </a:p>
+        </p:txBody>
+      </p:sp>
+      <p:sp>
+        <p:nvSpPr>
+          <p:cNvPr id="5" name="Text 3"/>
+          <p:cNvSpPr/>
+          <p:nvPr/>
+        </p:nvSpPr>
+        <p:spPr>
+          <a:xfrm>
+            <a:off x="634901" y="1266974"/>
+            <a:ext cx="8102798" cy="1257002"/>
+          </a:xfrm>
+          <a:prstGeom prst="rect">
+            <a:avLst/>
+          </a:prstGeom>
+          <a:noFill/>
+          <a:ln/>
+        </p:spPr>
+        <p:txBody>
+          <a:bodyPr wrap="square" lIns="0" tIns="0" rIns="0" bIns="0" rtlCol="0" anchor="t"/>
+          <a:lstStyle/>
+          <a:p>
+            <a:pPr algn="l" marL="342900" indent="-342900">
+              <a:lnSpc>
+                <a:spcPts val="1620"/>
+              </a:lnSpc>
+              <a:spcAft>
+                <a:spcPts val="300"/>
+              </a:spcAft>
+              <a:buSzPct val="100000"/>
+              <a:buChar char="•"/>
+            </a:pPr>
+            <a:r>
+              <a:rPr lang="en-US" sz="1200" dirty="0">
+                <a:solidFill>
+                  <a:srgbClr val="1C2833"/>
+                </a:solidFill>
+                <a:latin typeface="Arial" pitchFamily="34" charset="0"/>
+                <a:ea typeface="Arial" pitchFamily="34" charset="-122"/>
+                <a:cs typeface="Arial" pitchFamily="34" charset="-120"/>
+              </a:rPr>
+              <a:t>stone → </a:t>
+            </a:r>
+            <a:pPr algn="l" indent="0" marL="0">
+              <a:lnSpc>
+                <a:spcPts val="1620"/>
+              </a:lnSpc>
               <a:spcAft>
                 <a:spcPts val="300"/>
               </a:spcAft>
@@ -4929,15 +8686,12 @@
                 <a:ea typeface="Arial" pitchFamily="34" charset="-122"/>
                 <a:cs typeface="Arial" pitchFamily="34" charset="-120"/>
               </a:rPr>
-              <a:t>"Which of the three feels most like YOU right now? Don't think hard — just one word."</a:t>
-            </a:r>
-            <a:pPr algn="l" indent="0" marL="0">
-              <a:lnSpc>
-                <a:spcPts val="1680"/>
-              </a:lnSpc>
-              <a:spcBef>
-                <a:spcPts val="300"/>
-              </a:spcBef>
+              <a:t>pṛthvī</a:t>
+            </a:r>
+            <a:pPr algn="l" indent="0" marL="0">
+              <a:lnSpc>
+                <a:spcPts val="1620"/>
+              </a:lnSpc>
               <a:spcAft>
                 <a:spcPts val="300"/>
               </a:spcAft>
@@ -4952,15 +8706,36 @@
                 <a:ea typeface="Arial" pitchFamily="34" charset="-122"/>
                 <a:cs typeface="Arial" pitchFamily="34" charset="-120"/>
               </a:rPr>
-              <a:t> Sticky note. – Preview: </a:t>
-            </a:r>
-            <a:pPr algn="l" indent="0" marL="0">
-              <a:lnSpc>
-                <a:spcPts val="1680"/>
-              </a:lnSpc>
-              <a:spcBef>
-                <a:spcPts val="300"/>
-              </a:spcBef>
+              <a:t> (solid)</a:t>
+            </a:r>
+            <a:endParaRPr lang="en-US" sz="1200" dirty="0"/>
+          </a:p>
+          <a:p>
+            <a:pPr algn="l" marL="342900" indent="-342900">
+              <a:lnSpc>
+                <a:spcPts val="1620"/>
+              </a:lnSpc>
+              <a:spcAft>
+                <a:spcPts val="300"/>
+              </a:spcAft>
+              <a:buSzPct val="100000"/>
+              <a:buChar char="•"/>
+            </a:pPr>
+            <a:r>
+              <a:rPr lang="en-US" sz="1200" dirty="0">
+                <a:solidFill>
+                  <a:srgbClr val="1C2833"/>
+                </a:solidFill>
+                <a:latin typeface="Arial" pitchFamily="34" charset="0"/>
+                <a:ea typeface="Arial" pitchFamily="34" charset="-122"/>
+                <a:cs typeface="Arial" pitchFamily="34" charset="-120"/>
+              </a:rPr>
+              <a:t>water glass → </a:t>
+            </a:r>
+            <a:pPr algn="l" indent="0" marL="0">
+              <a:lnSpc>
+                <a:spcPts val="1620"/>
+              </a:lnSpc>
               <a:spcAft>
                 <a:spcPts val="300"/>
               </a:spcAft>
@@ -4975,15 +8750,227 @@
                 <a:ea typeface="Arial" pitchFamily="34" charset="-122"/>
                 <a:cs typeface="Arial" pitchFamily="34" charset="-120"/>
               </a:rPr>
-              <a:t>"Tomorrow we fill in the rest of the columns — what each doṣa actually does in your body."</a:t>
+              <a:t>ap</a:t>
+            </a:r>
+            <a:pPr algn="l" indent="0" marL="0">
+              <a:lnSpc>
+                <a:spcPts val="1620"/>
+              </a:lnSpc>
+              <a:spcAft>
+                <a:spcPts val="300"/>
+              </a:spcAft>
+              <a:buNone/>
+            </a:pPr>
+            <a:r>
+              <a:rPr lang="en-US" sz="1200" dirty="0">
+                <a:solidFill>
+                  <a:srgbClr val="1C2833"/>
+                </a:solidFill>
+                <a:latin typeface="Arial" pitchFamily="34" charset="0"/>
+                <a:ea typeface="Arial" pitchFamily="34" charset="-122"/>
+                <a:cs typeface="Arial" pitchFamily="34" charset="-120"/>
+              </a:rPr>
+              <a:t> (liquid)</a:t>
             </a:r>
             <a:endParaRPr lang="en-US" sz="1200" dirty="0"/>
           </a:p>
-        </p:txBody>
-      </p:sp>
-      <p:sp>
-        <p:nvSpPr>
-          <p:cNvPr id="5" name="Text 3"/>
+          <a:p>
+            <a:pPr algn="l" marL="342900" indent="-342900">
+              <a:lnSpc>
+                <a:spcPts val="1620"/>
+              </a:lnSpc>
+              <a:spcAft>
+                <a:spcPts val="300"/>
+              </a:spcAft>
+              <a:buSzPct val="100000"/>
+              <a:buChar char="•"/>
+            </a:pPr>
+            <a:r>
+              <a:rPr lang="en-US" sz="1200" dirty="0">
+                <a:solidFill>
+                  <a:srgbClr val="1C2833"/>
+                </a:solidFill>
+                <a:latin typeface="Arial" pitchFamily="34" charset="0"/>
+                <a:ea typeface="Arial" pitchFamily="34" charset="-122"/>
+                <a:cs typeface="Arial" pitchFamily="34" charset="-120"/>
+              </a:rPr>
+              <a:t>candle → </a:t>
+            </a:r>
+            <a:pPr algn="l" indent="0" marL="0">
+              <a:lnSpc>
+                <a:spcPts val="1620"/>
+              </a:lnSpc>
+              <a:spcAft>
+                <a:spcPts val="300"/>
+              </a:spcAft>
+              <a:buNone/>
+            </a:pPr>
+            <a:r>
+              <a:rPr lang="en-US" sz="1200" i="1" dirty="0">
+                <a:solidFill>
+                  <a:srgbClr val="1C2833"/>
+                </a:solidFill>
+                <a:latin typeface="Arial" pitchFamily="34" charset="0"/>
+                <a:ea typeface="Arial" pitchFamily="34" charset="-122"/>
+                <a:cs typeface="Arial" pitchFamily="34" charset="-120"/>
+              </a:rPr>
+              <a:t>tejas</a:t>
+            </a:r>
+            <a:pPr algn="l" indent="0" marL="0">
+              <a:lnSpc>
+                <a:spcPts val="1620"/>
+              </a:lnSpc>
+              <a:spcAft>
+                <a:spcPts val="300"/>
+              </a:spcAft>
+              <a:buNone/>
+            </a:pPr>
+            <a:r>
+              <a:rPr lang="en-US" sz="1200" dirty="0">
+                <a:solidFill>
+                  <a:srgbClr val="1C2833"/>
+                </a:solidFill>
+                <a:latin typeface="Arial" pitchFamily="34" charset="0"/>
+                <a:ea typeface="Arial" pitchFamily="34" charset="-122"/>
+                <a:cs typeface="Arial" pitchFamily="34" charset="-120"/>
+              </a:rPr>
+              <a:t> (heat/light)</a:t>
+            </a:r>
+            <a:endParaRPr lang="en-US" sz="1200" dirty="0"/>
+          </a:p>
+          <a:p>
+            <a:pPr algn="l" marL="342900" indent="-342900">
+              <a:lnSpc>
+                <a:spcPts val="1620"/>
+              </a:lnSpc>
+              <a:spcAft>
+                <a:spcPts val="300"/>
+              </a:spcAft>
+              <a:buSzPct val="100000"/>
+              <a:buChar char="•"/>
+            </a:pPr>
+            <a:r>
+              <a:rPr lang="en-US" sz="1200" dirty="0">
+                <a:solidFill>
+                  <a:srgbClr val="1C2833"/>
+                </a:solidFill>
+                <a:latin typeface="Arial" pitchFamily="34" charset="0"/>
+                <a:ea typeface="Arial" pitchFamily="34" charset="-122"/>
+                <a:cs typeface="Arial" pitchFamily="34" charset="-120"/>
+              </a:rPr>
+              <a:t>fan → </a:t>
+            </a:r>
+            <a:pPr algn="l" indent="0" marL="0">
+              <a:lnSpc>
+                <a:spcPts val="1620"/>
+              </a:lnSpc>
+              <a:spcAft>
+                <a:spcPts val="300"/>
+              </a:spcAft>
+              <a:buNone/>
+            </a:pPr>
+            <a:r>
+              <a:rPr lang="en-US" sz="1200" i="1" dirty="0">
+                <a:solidFill>
+                  <a:srgbClr val="1C2833"/>
+                </a:solidFill>
+                <a:latin typeface="Arial" pitchFamily="34" charset="0"/>
+                <a:ea typeface="Arial" pitchFamily="34" charset="-122"/>
+                <a:cs typeface="Arial" pitchFamily="34" charset="-120"/>
+              </a:rPr>
+              <a:t>vāyu</a:t>
+            </a:r>
+            <a:pPr algn="l" indent="0" marL="0">
+              <a:lnSpc>
+                <a:spcPts val="1620"/>
+              </a:lnSpc>
+              <a:spcAft>
+                <a:spcPts val="300"/>
+              </a:spcAft>
+              <a:buNone/>
+            </a:pPr>
+            <a:r>
+              <a:rPr lang="en-US" sz="1200" dirty="0">
+                <a:solidFill>
+                  <a:srgbClr val="1C2833"/>
+                </a:solidFill>
+                <a:latin typeface="Arial" pitchFamily="34" charset="0"/>
+                <a:ea typeface="Arial" pitchFamily="34" charset="-122"/>
+                <a:cs typeface="Arial" pitchFamily="34" charset="-120"/>
+              </a:rPr>
+              <a:t> (air, moving)</a:t>
+            </a:r>
+            <a:endParaRPr lang="en-US" sz="1200" dirty="0"/>
+          </a:p>
+          <a:p>
+            <a:pPr algn="l" marL="342900" indent="-342900">
+              <a:lnSpc>
+                <a:spcPts val="1620"/>
+              </a:lnSpc>
+              <a:spcAft>
+                <a:spcPts val="300"/>
+              </a:spcAft>
+              <a:buSzPct val="100000"/>
+              <a:buChar char="•"/>
+            </a:pPr>
+            <a:r>
+              <a:rPr lang="en-US" sz="1200" dirty="0">
+                <a:solidFill>
+                  <a:srgbClr val="1C2833"/>
+                </a:solidFill>
+                <a:latin typeface="Arial" pitchFamily="34" charset="0"/>
+                <a:ea typeface="Arial" pitchFamily="34" charset="-122"/>
+                <a:cs typeface="Arial" pitchFamily="34" charset="-120"/>
+              </a:rPr>
+              <a:t>empty box → </a:t>
+            </a:r>
+            <a:pPr algn="l" indent="0" marL="0">
+              <a:lnSpc>
+                <a:spcPts val="1620"/>
+              </a:lnSpc>
+              <a:spcAft>
+                <a:spcPts val="300"/>
+              </a:spcAft>
+              <a:buNone/>
+            </a:pPr>
+            <a:r>
+              <a:rPr lang="en-US" sz="1200" i="1" dirty="0">
+                <a:solidFill>
+                  <a:srgbClr val="1C2833"/>
+                </a:solidFill>
+                <a:latin typeface="Arial" pitchFamily="34" charset="0"/>
+                <a:ea typeface="Arial" pitchFamily="34" charset="-122"/>
+                <a:cs typeface="Arial" pitchFamily="34" charset="-120"/>
+              </a:rPr>
+              <a:t>ākāśa</a:t>
+            </a:r>
+            <a:pPr algn="l" indent="0" marL="0">
+              <a:lnSpc>
+                <a:spcPts val="1620"/>
+              </a:lnSpc>
+              <a:spcAft>
+                <a:spcPts val="300"/>
+              </a:spcAft>
+              <a:buNone/>
+            </a:pPr>
+            <a:r>
+              <a:rPr lang="en-US" sz="1200" dirty="0">
+                <a:solidFill>
+                  <a:srgbClr val="1C2833"/>
+                </a:solidFill>
+                <a:latin typeface="Arial" pitchFamily="34" charset="0"/>
+                <a:ea typeface="Arial" pitchFamily="34" charset="-122"/>
+                <a:cs typeface="Arial" pitchFamily="34" charset="-120"/>
+              </a:rPr>
+              <a:t> (space inside)</a:t>
+            </a:r>
+            <a:endParaRPr lang="en-US" sz="1200" dirty="0"/>
+          </a:p>
+        </p:txBody>
+      </p:sp>
+      <p:sp>
+        <p:nvSpPr>
+          <p:cNvPr id="6" name="Text 4"/>
           <p:cNvSpPr/>
           <p:nvPr/>
         </p:nvSpPr>
@@ -5133,7 +9120,7 @@
                 <a:ea typeface="Georgia" pitchFamily="34" charset="-122"/>
                 <a:cs typeface="Georgia" pitchFamily="34" charset="-120"/>
               </a:rPr>
-              <a:t>Student-facing content</a:t>
+              <a:t>Core (20 min) (cont.)</a:t>
             </a:r>
             <a:endParaRPr lang="en-US" sz="1800" dirty="0"/>
           </a:p>
@@ -5147,61 +9134,8 @@
         </p:nvSpPr>
         <p:spPr>
           <a:xfrm>
-            <a:off x="406301" y="883593"/>
-            <a:ext cx="8331398" cy="1881187"/>
-          </a:xfrm>
-          <a:prstGeom prst="rect">
-            <a:avLst/>
-          </a:prstGeom>
-          <a:solidFill>
-            <a:srgbClr val="F4F8F9"/>
-          </a:solidFill>
-          <a:ln/>
-        </p:spPr>
-        <p:txBody>
-          <a:bodyPr wrap="square" rtlCol="0" anchor="ctr"/>
-          <a:lstStyle/>
-          <a:p>
-            <a:pPr indent="0" marL="0">
-              <a:buNone/>
-            </a:pPr>
-            <a:endParaRPr lang="en-US" dirty="0"/>
-          </a:p>
-        </p:txBody>
-      </p:sp>
-      <p:sp>
-        <p:nvSpPr>
-          <p:cNvPr id="5" name="Shape 3"/>
-          <p:cNvSpPr/>
-          <p:nvPr/>
-        </p:nvSpPr>
-        <p:spPr>
-          <a:xfrm>
-            <a:off x="434876" y="883593"/>
-            <a:ext cx="0" cy="1881187"/>
-          </a:xfrm>
-          <a:prstGeom prst="line">
-            <a:avLst/>
-          </a:prstGeom>
-          <a:noFill/>
-          <a:ln w="57150">
-            <a:solidFill>
-              <a:srgbClr val="FE4447"/>
-            </a:solidFill>
-            <a:prstDash val="solid"/>
-          </a:ln>
-        </p:spPr>
-      </p:sp>
-      <p:sp>
-        <p:nvSpPr>
-          <p:cNvPr id="6" name="Text 4"/>
-          <p:cNvSpPr/>
-          <p:nvPr/>
-        </p:nvSpPr>
-        <p:spPr>
-          <a:xfrm>
-            <a:off x="692051" y="1074093"/>
-            <a:ext cx="7973389" cy="230981"/>
+            <a:off x="634901" y="883593"/>
+            <a:ext cx="8102798" cy="693241"/>
           </a:xfrm>
           <a:prstGeom prst="rect">
             <a:avLst/>
@@ -5213,135 +9147,181 @@
           <a:bodyPr wrap="square" lIns="0" tIns="0" rIns="0" bIns="0" rtlCol="0" anchor="t"/>
           <a:lstStyle/>
           <a:p>
-            <a:pPr algn="l" indent="0" marL="0">
-              <a:lnSpc>
-                <a:spcPts val="1820"/>
-              </a:lnSpc>
-              <a:spcBef>
-                <a:spcPts val="300"/>
-              </a:spcBef>
-              <a:spcAft>
-                <a:spcPts val="300"/>
-              </a:spcAft>
-              <a:buNone/>
-            </a:pPr>
-            <a:r>
-              <a:rPr lang="en-US" sz="1300" dirty="0">
-                <a:solidFill>
-                  <a:srgbClr val="1C2833"/>
-                </a:solidFill>
-                <a:latin typeface="Georgia" pitchFamily="34" charset="0"/>
-                <a:ea typeface="Georgia" pitchFamily="34" charset="-122"/>
-                <a:cs typeface="Georgia" pitchFamily="34" charset="-120"/>
-              </a:rPr>
-              <a:t>*</a:t>
-            </a:r>
-            <a:pPr algn="l" indent="0" marL="0">
-              <a:lnSpc>
-                <a:spcPts val="1820"/>
-              </a:lnSpc>
-              <a:spcBef>
-                <a:spcPts val="300"/>
-              </a:spcBef>
-              <a:spcAft>
-                <a:spcPts val="300"/>
-              </a:spcAft>
-              <a:buNone/>
-            </a:pPr>
-            <a:r>
-              <a:rPr lang="en-US" sz="1300" i="1" dirty="0">
-                <a:solidFill>
-                  <a:srgbClr val="1C2833"/>
-                </a:solidFill>
-                <a:latin typeface="Georgia" pitchFamily="34" charset="0"/>
-                <a:ea typeface="Georgia" pitchFamily="34" charset="-122"/>
-                <a:cs typeface="Georgia" pitchFamily="34" charset="-120"/>
-              </a:rPr>
-              <a:t>Three categories of</a:t>
-            </a:r>
-            <a:pPr algn="l" indent="0" marL="0">
-              <a:lnSpc>
-                <a:spcPts val="1820"/>
-              </a:lnSpc>
-              <a:spcBef>
-                <a:spcPts val="300"/>
-              </a:spcBef>
-              <a:spcAft>
-                <a:spcPts val="300"/>
-              </a:spcAft>
-              <a:buNone/>
-            </a:pPr>
-            <a:r>
-              <a:rPr lang="en-US" sz="1300" dirty="0">
-                <a:solidFill>
-                  <a:srgbClr val="1C2833"/>
-                </a:solidFill>
-                <a:latin typeface="Georgia" pitchFamily="34" charset="0"/>
-                <a:ea typeface="Georgia" pitchFamily="34" charset="-122"/>
-                <a:cs typeface="Georgia" pitchFamily="34" charset="-120"/>
-              </a:rPr>
-              <a:t>doing</a:t>
-            </a:r>
-            <a:pPr algn="l" indent="0" marL="0">
-              <a:lnSpc>
-                <a:spcPts val="1820"/>
-              </a:lnSpc>
-              <a:spcBef>
-                <a:spcPts val="300"/>
-              </a:spcBef>
-              <a:spcAft>
-                <a:spcPts val="300"/>
-              </a:spcAft>
-              <a:buNone/>
-            </a:pPr>
-            <a:r>
-              <a:rPr lang="en-US" sz="1300" i="1" dirty="0">
-                <a:solidFill>
-                  <a:srgbClr val="1C2833"/>
-                </a:solidFill>
-                <a:latin typeface="Georgia" pitchFamily="34" charset="0"/>
-                <a:ea typeface="Georgia" pitchFamily="34" charset="-122"/>
-                <a:cs typeface="Georgia" pitchFamily="34" charset="-120"/>
-              </a:rPr>
-              <a:t>:</a:t>
-            </a:r>
-            <a:pPr algn="l" indent="0" marL="0">
-              <a:lnSpc>
-                <a:spcPts val="1820"/>
-              </a:lnSpc>
-              <a:spcBef>
-                <a:spcPts val="300"/>
-              </a:spcBef>
-              <a:spcAft>
-                <a:spcPts val="300"/>
-              </a:spcAft>
-              <a:buNone/>
-            </a:pPr>
-            <a:r>
-              <a:rPr lang="en-US" sz="1300" dirty="0">
-                <a:solidFill>
-                  <a:srgbClr val="1C2833"/>
-                </a:solidFill>
-                <a:latin typeface="Georgia" pitchFamily="34" charset="0"/>
-                <a:ea typeface="Georgia" pitchFamily="34" charset="-122"/>
-                <a:cs typeface="Georgia" pitchFamily="34" charset="-120"/>
-              </a:rPr>
-              <a:t>*</a:t>
-            </a:r>
-            <a:endParaRPr lang="en-US" sz="1300" dirty="0"/>
-          </a:p>
-        </p:txBody>
-      </p:sp>
-      <p:sp>
-        <p:nvSpPr>
-          <p:cNvPr id="7" name="Text 5"/>
+            <a:pPr algn="l" marL="342900" indent="-342900">
+              <a:lnSpc>
+                <a:spcPts val="1620"/>
+              </a:lnSpc>
+              <a:spcAft>
+                <a:spcPts val="300"/>
+              </a:spcAft>
+              <a:buSzPct val="100000"/>
+              <a:buChar char="•"/>
+            </a:pPr>
+            <a:r>
+              <a:rPr lang="en-US" sz="1200" b="1" dirty="0">
+                <a:solidFill>
+                  <a:srgbClr val="1C2833"/>
+                </a:solidFill>
+                <a:latin typeface="Arial" pitchFamily="34" charset="0"/>
+                <a:ea typeface="Arial" pitchFamily="34" charset="-122"/>
+                <a:cs typeface="Arial" pitchFamily="34" charset="-120"/>
+              </a:rPr>
+              <a:t>The shift from Module 2.</a:t>
+            </a:r>
+            <a:pPr algn="l" indent="0" marL="0">
+              <a:lnSpc>
+                <a:spcPts val="1620"/>
+              </a:lnSpc>
+              <a:spcAft>
+                <a:spcPts val="300"/>
+              </a:spcAft>
+              <a:buNone/>
+            </a:pPr>
+            <a:r>
+              <a:rPr lang="en-US" sz="1200" dirty="0">
+                <a:solidFill>
+                  <a:srgbClr val="1C2833"/>
+                </a:solidFill>
+                <a:latin typeface="Arial" pitchFamily="34" charset="0"/>
+                <a:ea typeface="Arial" pitchFamily="34" charset="-122"/>
+                <a:cs typeface="Arial" pitchFamily="34" charset="-120"/>
+              </a:rPr>
+              <a:t> Module 2 asked "what categories does </a:t>
+            </a:r>
+            <a:pPr algn="l" indent="0" marL="0">
+              <a:lnSpc>
+                <a:spcPts val="1620"/>
+              </a:lnSpc>
+              <a:spcAft>
+                <a:spcPts val="300"/>
+              </a:spcAft>
+              <a:buNone/>
+            </a:pPr>
+            <a:r>
+              <a:rPr lang="en-US" sz="1200" i="1" dirty="0">
+                <a:solidFill>
+                  <a:srgbClr val="1C2833"/>
+                </a:solidFill>
+                <a:latin typeface="Arial" pitchFamily="34" charset="0"/>
+                <a:ea typeface="Arial" pitchFamily="34" charset="-122"/>
+                <a:cs typeface="Arial" pitchFamily="34" charset="-120"/>
+              </a:rPr>
+              <a:t>matter</a:t>
+            </a:r>
+            <a:pPr algn="l" indent="0" marL="0">
+              <a:lnSpc>
+                <a:spcPts val="1620"/>
+              </a:lnSpc>
+              <a:spcAft>
+                <a:spcPts val="300"/>
+              </a:spcAft>
+              <a:buNone/>
+            </a:pPr>
+            <a:r>
+              <a:rPr lang="en-US" sz="1200" dirty="0">
+                <a:solidFill>
+                  <a:srgbClr val="1C2833"/>
+                </a:solidFill>
+                <a:latin typeface="Arial" pitchFamily="34" charset="0"/>
+                <a:ea typeface="Arial" pitchFamily="34" charset="-122"/>
+                <a:cs typeface="Arial" pitchFamily="34" charset="-120"/>
+              </a:rPr>
+              <a:t> come in?" Today we ask: </a:t>
+            </a:r>
+            <a:pPr algn="l" indent="0" marL="0">
+              <a:lnSpc>
+                <a:spcPts val="1620"/>
+              </a:lnSpc>
+              <a:spcAft>
+                <a:spcPts val="300"/>
+              </a:spcAft>
+              <a:buNone/>
+            </a:pPr>
+            <a:r>
+              <a:rPr lang="en-US" sz="1200" i="1" dirty="0">
+                <a:solidFill>
+                  <a:srgbClr val="1C2833"/>
+                </a:solidFill>
+                <a:latin typeface="Arial" pitchFamily="34" charset="0"/>
+                <a:ea typeface="Arial" pitchFamily="34" charset="-122"/>
+                <a:cs typeface="Arial" pitchFamily="34" charset="-120"/>
+              </a:rPr>
+              <a:t>"What categories do bodily functions come in?"</a:t>
+            </a:r>
+            <a:pPr algn="l" indent="0" marL="0">
+              <a:lnSpc>
+                <a:spcPts val="1620"/>
+              </a:lnSpc>
+              <a:spcAft>
+                <a:spcPts val="300"/>
+              </a:spcAft>
+              <a:buNone/>
+            </a:pPr>
+            <a:r>
+              <a:rPr lang="en-US" sz="1200" dirty="0">
+                <a:solidFill>
+                  <a:srgbClr val="1C2833"/>
+                </a:solidFill>
+                <a:latin typeface="Arial" pitchFamily="34" charset="0"/>
+                <a:ea typeface="Arial" pitchFamily="34" charset="-122"/>
+                <a:cs typeface="Arial" pitchFamily="34" charset="-120"/>
+              </a:rPr>
+              <a:t> The body is not made of </a:t>
+            </a:r>
+            <a:pPr algn="l" indent="0" marL="0">
+              <a:lnSpc>
+                <a:spcPts val="1620"/>
+              </a:lnSpc>
+              <a:spcAft>
+                <a:spcPts val="300"/>
+              </a:spcAft>
+              <a:buNone/>
+            </a:pPr>
+            <a:r>
+              <a:rPr lang="en-US" sz="1200" i="1" dirty="0">
+                <a:solidFill>
+                  <a:srgbClr val="1C2833"/>
+                </a:solidFill>
+                <a:latin typeface="Arial" pitchFamily="34" charset="0"/>
+                <a:ea typeface="Arial" pitchFamily="34" charset="-122"/>
+                <a:cs typeface="Arial" pitchFamily="34" charset="-120"/>
+              </a:rPr>
+              <a:t>just</a:t>
+            </a:r>
+            <a:pPr algn="l" indent="0" marL="0">
+              <a:lnSpc>
+                <a:spcPts val="1620"/>
+              </a:lnSpc>
+              <a:spcAft>
+                <a:spcPts val="300"/>
+              </a:spcAft>
+              <a:buNone/>
+            </a:pPr>
+            <a:r>
+              <a:rPr lang="en-US" sz="1200" dirty="0">
+                <a:solidFill>
+                  <a:srgbClr val="1C2833"/>
+                </a:solidFill>
+                <a:latin typeface="Arial" pitchFamily="34" charset="0"/>
+                <a:ea typeface="Arial" pitchFamily="34" charset="-122"/>
+                <a:cs typeface="Arial" pitchFamily="34" charset="-120"/>
+              </a:rPr>
+              <a:t> matter — it does things. It moves. It transforms food. It holds itself together.</a:t>
+            </a:r>
+            <a:endParaRPr lang="en-US" sz="1200" dirty="0"/>
+          </a:p>
+        </p:txBody>
+      </p:sp>
+      <p:sp>
+        <p:nvSpPr>
+          <p:cNvPr id="5" name="Text 3"/>
           <p:cNvSpPr/>
           <p:nvPr/>
         </p:nvSpPr>
         <p:spPr>
           <a:xfrm>
-            <a:off x="692051" y="1343174"/>
-            <a:ext cx="7973389" cy="692944"/>
+            <a:off x="634901" y="1678335"/>
+            <a:ext cx="8102798" cy="281880"/>
           </a:xfrm>
           <a:prstGeom prst="rect">
             <a:avLst/>
@@ -5353,457 +9333,41 @@
           <a:bodyPr wrap="square" lIns="0" tIns="0" rIns="0" bIns="0" rtlCol="0" anchor="t"/>
           <a:lstStyle/>
           <a:p>
-            <a:pPr algn="l" indent="0" marL="0">
-              <a:lnSpc>
-                <a:spcPts val="1820"/>
-              </a:lnSpc>
-              <a:spcBef>
-                <a:spcPts val="300"/>
-              </a:spcBef>
-              <a:spcAft>
-                <a:spcPts val="300"/>
-              </a:spcAft>
-              <a:buNone/>
-            </a:pPr>
-            <a:r>
-              <a:rPr lang="en-US" sz="1300" dirty="0">
-                <a:solidFill>
-                  <a:srgbClr val="1C2833"/>
-                </a:solidFill>
-                <a:latin typeface="Georgia" pitchFamily="34" charset="0"/>
-                <a:ea typeface="Georgia" pitchFamily="34" charset="-122"/>
-                <a:cs typeface="Georgia" pitchFamily="34" charset="-120"/>
-              </a:rPr>
-              <a:t>| Doṣa | Sanskrit | Elements | What it does | |------|----------|----------|---------------| | </a:t>
-            </a:r>
-            <a:pPr algn="l" indent="0" marL="0">
-              <a:lnSpc>
-                <a:spcPts val="1820"/>
-              </a:lnSpc>
-              <a:spcBef>
-                <a:spcPts val="300"/>
-              </a:spcBef>
-              <a:spcAft>
-                <a:spcPts val="300"/>
-              </a:spcAft>
-              <a:buNone/>
-            </a:pPr>
-            <a:r>
-              <a:rPr lang="en-US" sz="1300" i="1" dirty="0">
-                <a:solidFill>
-                  <a:srgbClr val="1C2833"/>
-                </a:solidFill>
-                <a:latin typeface="Georgia" pitchFamily="34" charset="0"/>
-                <a:ea typeface="Georgia" pitchFamily="34" charset="-122"/>
-                <a:cs typeface="Georgia" pitchFamily="34" charset="-120"/>
-              </a:rPr>
-              <a:t>vāta</a:t>
-            </a:r>
-            <a:pPr algn="l" indent="0" marL="0">
-              <a:lnSpc>
-                <a:spcPts val="1820"/>
-              </a:lnSpc>
-              <a:spcBef>
-                <a:spcPts val="300"/>
-              </a:spcBef>
-              <a:spcAft>
-                <a:spcPts val="300"/>
-              </a:spcAft>
-              <a:buNone/>
-            </a:pPr>
-            <a:r>
-              <a:rPr lang="en-US" sz="1300" dirty="0">
-                <a:solidFill>
-                  <a:srgbClr val="1C2833"/>
-                </a:solidFill>
-                <a:latin typeface="Georgia" pitchFamily="34" charset="0"/>
-                <a:ea typeface="Georgia" pitchFamily="34" charset="-122"/>
-                <a:cs typeface="Georgia" pitchFamily="34" charset="-120"/>
-              </a:rPr>
-              <a:t> | "wind" | </a:t>
-            </a:r>
-            <a:pPr algn="l" indent="0" marL="0">
-              <a:lnSpc>
-                <a:spcPts val="1820"/>
-              </a:lnSpc>
-              <a:spcBef>
-                <a:spcPts val="300"/>
-              </a:spcBef>
-              <a:spcAft>
-                <a:spcPts val="300"/>
-              </a:spcAft>
-              <a:buNone/>
-            </a:pPr>
-            <a:r>
-              <a:rPr lang="en-US" sz="1300" i="1" dirty="0">
-                <a:solidFill>
-                  <a:srgbClr val="1C2833"/>
-                </a:solidFill>
-                <a:latin typeface="Georgia" pitchFamily="34" charset="0"/>
-                <a:ea typeface="Georgia" pitchFamily="34" charset="-122"/>
-                <a:cs typeface="Georgia" pitchFamily="34" charset="-120"/>
-              </a:rPr>
-              <a:t>ākāśa</a:t>
-            </a:r>
-            <a:pPr algn="l" indent="0" marL="0">
-              <a:lnSpc>
-                <a:spcPts val="1820"/>
-              </a:lnSpc>
-              <a:spcBef>
-                <a:spcPts val="300"/>
-              </a:spcBef>
-              <a:spcAft>
-                <a:spcPts val="300"/>
-              </a:spcAft>
-              <a:buNone/>
-            </a:pPr>
-            <a:r>
-              <a:rPr lang="en-US" sz="1300" dirty="0">
-                <a:solidFill>
-                  <a:srgbClr val="1C2833"/>
-                </a:solidFill>
-                <a:latin typeface="Georgia" pitchFamily="34" charset="0"/>
-                <a:ea typeface="Georgia" pitchFamily="34" charset="-122"/>
-                <a:cs typeface="Georgia" pitchFamily="34" charset="-120"/>
-              </a:rPr>
-              <a:t> + </a:t>
-            </a:r>
-            <a:pPr algn="l" indent="0" marL="0">
-              <a:lnSpc>
-                <a:spcPts val="1820"/>
-              </a:lnSpc>
-              <a:spcBef>
-                <a:spcPts val="300"/>
-              </a:spcBef>
-              <a:spcAft>
-                <a:spcPts val="300"/>
-              </a:spcAft>
-              <a:buNone/>
-            </a:pPr>
-            <a:r>
-              <a:rPr lang="en-US" sz="1300" i="1" dirty="0">
-                <a:solidFill>
-                  <a:srgbClr val="1C2833"/>
-                </a:solidFill>
-                <a:latin typeface="Georgia" pitchFamily="34" charset="0"/>
-                <a:ea typeface="Georgia" pitchFamily="34" charset="-122"/>
-                <a:cs typeface="Georgia" pitchFamily="34" charset="-120"/>
-              </a:rPr>
-              <a:t>vāyu</a:t>
-            </a:r>
-            <a:pPr algn="l" indent="0" marL="0">
-              <a:lnSpc>
-                <a:spcPts val="1820"/>
-              </a:lnSpc>
-              <a:spcBef>
-                <a:spcPts val="300"/>
-              </a:spcBef>
-              <a:spcAft>
-                <a:spcPts val="300"/>
-              </a:spcAft>
-              <a:buNone/>
-            </a:pPr>
-            <a:r>
-              <a:rPr lang="en-US" sz="1300" dirty="0">
-                <a:solidFill>
-                  <a:srgbClr val="1C2833"/>
-                </a:solidFill>
-                <a:latin typeface="Georgia" pitchFamily="34" charset="0"/>
-                <a:ea typeface="Georgia" pitchFamily="34" charset="-122"/>
-                <a:cs typeface="Georgia" pitchFamily="34" charset="-120"/>
-              </a:rPr>
-              <a:t> | moves things | | </a:t>
-            </a:r>
-            <a:pPr algn="l" indent="0" marL="0">
-              <a:lnSpc>
-                <a:spcPts val="1820"/>
-              </a:lnSpc>
-              <a:spcBef>
-                <a:spcPts val="300"/>
-              </a:spcBef>
-              <a:spcAft>
-                <a:spcPts val="300"/>
-              </a:spcAft>
-              <a:buNone/>
-            </a:pPr>
-            <a:r>
-              <a:rPr lang="en-US" sz="1300" i="1" dirty="0">
-                <a:solidFill>
-                  <a:srgbClr val="1C2833"/>
-                </a:solidFill>
-                <a:latin typeface="Georgia" pitchFamily="34" charset="0"/>
-                <a:ea typeface="Georgia" pitchFamily="34" charset="-122"/>
-                <a:cs typeface="Georgia" pitchFamily="34" charset="-120"/>
-              </a:rPr>
-              <a:t>pitta</a:t>
-            </a:r>
-            <a:pPr algn="l" indent="0" marL="0">
-              <a:lnSpc>
-                <a:spcPts val="1820"/>
-              </a:lnSpc>
-              <a:spcBef>
-                <a:spcPts val="300"/>
-              </a:spcBef>
-              <a:spcAft>
-                <a:spcPts val="300"/>
-              </a:spcAft>
-              <a:buNone/>
-            </a:pPr>
-            <a:r>
-              <a:rPr lang="en-US" sz="1300" dirty="0">
-                <a:solidFill>
-                  <a:srgbClr val="1C2833"/>
-                </a:solidFill>
-                <a:latin typeface="Georgia" pitchFamily="34" charset="0"/>
-                <a:ea typeface="Georgia" pitchFamily="34" charset="-122"/>
-                <a:cs typeface="Georgia" pitchFamily="34" charset="-120"/>
-              </a:rPr>
-              <a:t> | "heater" | </a:t>
-            </a:r>
-            <a:pPr algn="l" indent="0" marL="0">
-              <a:lnSpc>
-                <a:spcPts val="1820"/>
-              </a:lnSpc>
-              <a:spcBef>
-                <a:spcPts val="300"/>
-              </a:spcBef>
-              <a:spcAft>
-                <a:spcPts val="300"/>
-              </a:spcAft>
-              <a:buNone/>
-            </a:pPr>
-            <a:r>
-              <a:rPr lang="en-US" sz="1300" i="1" dirty="0">
-                <a:solidFill>
-                  <a:srgbClr val="1C2833"/>
-                </a:solidFill>
-                <a:latin typeface="Georgia" pitchFamily="34" charset="0"/>
-                <a:ea typeface="Georgia" pitchFamily="34" charset="-122"/>
-                <a:cs typeface="Georgia" pitchFamily="34" charset="-120"/>
-              </a:rPr>
-              <a:t>tejas</a:t>
-            </a:r>
-            <a:pPr algn="l" indent="0" marL="0">
-              <a:lnSpc>
-                <a:spcPts val="1820"/>
-              </a:lnSpc>
-              <a:spcBef>
-                <a:spcPts val="300"/>
-              </a:spcBef>
-              <a:spcAft>
-                <a:spcPts val="300"/>
-              </a:spcAft>
-              <a:buNone/>
-            </a:pPr>
-            <a:r>
-              <a:rPr lang="en-US" sz="1300" dirty="0">
-                <a:solidFill>
-                  <a:srgbClr val="1C2833"/>
-                </a:solidFill>
-                <a:latin typeface="Georgia" pitchFamily="34" charset="0"/>
-                <a:ea typeface="Georgia" pitchFamily="34" charset="-122"/>
-                <a:cs typeface="Georgia" pitchFamily="34" charset="-120"/>
-              </a:rPr>
-              <a:t> + </a:t>
-            </a:r>
-            <a:pPr algn="l" indent="0" marL="0">
-              <a:lnSpc>
-                <a:spcPts val="1820"/>
-              </a:lnSpc>
-              <a:spcBef>
-                <a:spcPts val="300"/>
-              </a:spcBef>
-              <a:spcAft>
-                <a:spcPts val="300"/>
-              </a:spcAft>
-              <a:buNone/>
-            </a:pPr>
-            <a:r>
-              <a:rPr lang="en-US" sz="1300" i="1" dirty="0">
-                <a:solidFill>
-                  <a:srgbClr val="1C2833"/>
-                </a:solidFill>
-                <a:latin typeface="Georgia" pitchFamily="34" charset="0"/>
-                <a:ea typeface="Georgia" pitchFamily="34" charset="-122"/>
-                <a:cs typeface="Georgia" pitchFamily="34" charset="-120"/>
-              </a:rPr>
-              <a:t>ap</a:t>
-            </a:r>
-            <a:pPr algn="l" indent="0" marL="0">
-              <a:lnSpc>
-                <a:spcPts val="1820"/>
-              </a:lnSpc>
-              <a:spcBef>
-                <a:spcPts val="300"/>
-              </a:spcBef>
-              <a:spcAft>
-                <a:spcPts val="300"/>
-              </a:spcAft>
-              <a:buNone/>
-            </a:pPr>
-            <a:r>
-              <a:rPr lang="en-US" sz="1300" dirty="0">
-                <a:solidFill>
-                  <a:srgbClr val="1C2833"/>
-                </a:solidFill>
-                <a:latin typeface="Georgia" pitchFamily="34" charset="0"/>
-                <a:ea typeface="Georgia" pitchFamily="34" charset="-122"/>
-                <a:cs typeface="Georgia" pitchFamily="34" charset="-120"/>
-              </a:rPr>
-              <a:t> | transforms things | | </a:t>
-            </a:r>
-            <a:pPr algn="l" indent="0" marL="0">
-              <a:lnSpc>
-                <a:spcPts val="1820"/>
-              </a:lnSpc>
-              <a:spcBef>
-                <a:spcPts val="300"/>
-              </a:spcBef>
-              <a:spcAft>
-                <a:spcPts val="300"/>
-              </a:spcAft>
-              <a:buNone/>
-            </a:pPr>
-            <a:r>
-              <a:rPr lang="en-US" sz="1300" i="1" dirty="0">
-                <a:solidFill>
-                  <a:srgbClr val="1C2833"/>
-                </a:solidFill>
-                <a:latin typeface="Georgia" pitchFamily="34" charset="0"/>
-                <a:ea typeface="Georgia" pitchFamily="34" charset="-122"/>
-                <a:cs typeface="Georgia" pitchFamily="34" charset="-120"/>
-              </a:rPr>
-              <a:t>kapha</a:t>
-            </a:r>
-            <a:pPr algn="l" indent="0" marL="0">
-              <a:lnSpc>
-                <a:spcPts val="1820"/>
-              </a:lnSpc>
-              <a:spcBef>
-                <a:spcPts val="300"/>
-              </a:spcBef>
-              <a:spcAft>
-                <a:spcPts val="300"/>
-              </a:spcAft>
-              <a:buNone/>
-            </a:pPr>
-            <a:r>
-              <a:rPr lang="en-US" sz="1300" dirty="0">
-                <a:solidFill>
-                  <a:srgbClr val="1C2833"/>
-                </a:solidFill>
-                <a:latin typeface="Georgia" pitchFamily="34" charset="0"/>
-                <a:ea typeface="Georgia" pitchFamily="34" charset="-122"/>
-                <a:cs typeface="Georgia" pitchFamily="34" charset="-120"/>
-              </a:rPr>
-              <a:t> | "binder" | </a:t>
-            </a:r>
-            <a:pPr algn="l" indent="0" marL="0">
-              <a:lnSpc>
-                <a:spcPts val="1820"/>
-              </a:lnSpc>
-              <a:spcBef>
-                <a:spcPts val="300"/>
-              </a:spcBef>
-              <a:spcAft>
-                <a:spcPts val="300"/>
-              </a:spcAft>
-              <a:buNone/>
-            </a:pPr>
-            <a:r>
-              <a:rPr lang="en-US" sz="1300" i="1" dirty="0">
-                <a:solidFill>
-                  <a:srgbClr val="1C2833"/>
-                </a:solidFill>
-                <a:latin typeface="Georgia" pitchFamily="34" charset="0"/>
-                <a:ea typeface="Georgia" pitchFamily="34" charset="-122"/>
-                <a:cs typeface="Georgia" pitchFamily="34" charset="-120"/>
-              </a:rPr>
-              <a:t>ap</a:t>
-            </a:r>
-            <a:pPr algn="l" indent="0" marL="0">
-              <a:lnSpc>
-                <a:spcPts val="1820"/>
-              </a:lnSpc>
-              <a:spcBef>
-                <a:spcPts val="300"/>
-              </a:spcBef>
-              <a:spcAft>
-                <a:spcPts val="300"/>
-              </a:spcAft>
-              <a:buNone/>
-            </a:pPr>
-            <a:r>
-              <a:rPr lang="en-US" sz="1300" dirty="0">
-                <a:solidFill>
-                  <a:srgbClr val="1C2833"/>
-                </a:solidFill>
-                <a:latin typeface="Georgia" pitchFamily="34" charset="0"/>
-                <a:ea typeface="Georgia" pitchFamily="34" charset="-122"/>
-                <a:cs typeface="Georgia" pitchFamily="34" charset="-120"/>
-              </a:rPr>
-              <a:t> + </a:t>
-            </a:r>
-            <a:pPr algn="l" indent="0" marL="0">
-              <a:lnSpc>
-                <a:spcPts val="1820"/>
-              </a:lnSpc>
-              <a:spcBef>
-                <a:spcPts val="300"/>
-              </a:spcBef>
-              <a:spcAft>
-                <a:spcPts val="300"/>
-              </a:spcAft>
-              <a:buNone/>
-            </a:pPr>
-            <a:r>
-              <a:rPr lang="en-US" sz="1300" i="1" dirty="0">
-                <a:solidFill>
-                  <a:srgbClr val="1C2833"/>
-                </a:solidFill>
-                <a:latin typeface="Georgia" pitchFamily="34" charset="0"/>
-                <a:ea typeface="Georgia" pitchFamily="34" charset="-122"/>
-                <a:cs typeface="Georgia" pitchFamily="34" charset="-120"/>
-              </a:rPr>
-              <a:t>pṛthvī</a:t>
-            </a:r>
-            <a:pPr algn="l" indent="0" marL="0">
-              <a:lnSpc>
-                <a:spcPts val="1820"/>
-              </a:lnSpc>
-              <a:spcBef>
-                <a:spcPts val="300"/>
-              </a:spcBef>
-              <a:spcAft>
-                <a:spcPts val="300"/>
-              </a:spcAft>
-              <a:buNone/>
-            </a:pPr>
-            <a:r>
-              <a:rPr lang="en-US" sz="1300" dirty="0">
-                <a:solidFill>
-                  <a:srgbClr val="1C2833"/>
-                </a:solidFill>
-                <a:latin typeface="Georgia" pitchFamily="34" charset="0"/>
-                <a:ea typeface="Georgia" pitchFamily="34" charset="-122"/>
-                <a:cs typeface="Georgia" pitchFamily="34" charset="-120"/>
-              </a:rPr>
-              <a:t> | holds things |</a:t>
-            </a:r>
-            <a:endParaRPr lang="en-US" sz="1300" dirty="0"/>
-          </a:p>
-        </p:txBody>
-      </p:sp>
-      <p:sp>
-        <p:nvSpPr>
-          <p:cNvPr id="8" name="Text 6"/>
+            <a:pPr algn="l" marL="342900" indent="-342900">
+              <a:lnSpc>
+                <a:spcPts val="1620"/>
+              </a:lnSpc>
+              <a:spcAft>
+                <a:spcPts val="300"/>
+              </a:spcAft>
+              <a:buSzPct val="100000"/>
+              <a:buChar char="•"/>
+            </a:pPr>
+            <a:r>
+              <a:rPr lang="en-US" sz="1200" b="1" dirty="0">
+                <a:solidFill>
+                  <a:srgbClr val="1C2833"/>
+                </a:solidFill>
+                <a:latin typeface="Arial" pitchFamily="34" charset="0"/>
+                <a:ea typeface="Arial" pitchFamily="34" charset="-122"/>
+                <a:cs typeface="Arial" pitchFamily="34" charset="-120"/>
+              </a:rPr>
+              <a:t>Three categories of doing — build on the board:</a:t>
+            </a:r>
+            <a:endParaRPr lang="en-US" sz="1200" dirty="0"/>
+          </a:p>
+        </p:txBody>
+      </p:sp>
+      <p:sp>
+        <p:nvSpPr>
+          <p:cNvPr id="6" name="Text 4"/>
           <p:cNvSpPr/>
           <p:nvPr/>
         </p:nvSpPr>
         <p:spPr>
           <a:xfrm>
-            <a:off x="692051" y="2074218"/>
-            <a:ext cx="7973389" cy="230981"/>
+            <a:off x="406301" y="2049066"/>
+            <a:ext cx="8498026" cy="213271"/>
           </a:xfrm>
           <a:prstGeom prst="rect">
             <a:avLst/>
@@ -5817,7 +9381,7 @@
           <a:p>
             <a:pPr algn="l" indent="0" marL="0">
               <a:lnSpc>
-                <a:spcPts val="1820"/>
+                <a:spcPts val="1680"/>
               </a:lnSpc>
               <a:spcBef>
                 <a:spcPts val="300"/>
@@ -5828,117 +9392,23 @@
               <a:buNone/>
             </a:pPr>
             <a:r>
-              <a:rPr lang="en-US" sz="1300" i="1" dirty="0">
-                <a:solidFill>
-                  <a:srgbClr val="1C2833"/>
-                </a:solidFill>
-                <a:latin typeface="Georgia" pitchFamily="34" charset="0"/>
-                <a:ea typeface="Georgia" pitchFamily="34" charset="-122"/>
-                <a:cs typeface="Georgia" pitchFamily="34" charset="-120"/>
-              </a:rPr>
-              <a:t>When they are in balance, they sustain the body. When they are out of balance, they cause trouble.</a:t>
-            </a:r>
-            <a:endParaRPr lang="en-US" sz="1300" dirty="0"/>
-          </a:p>
-        </p:txBody>
-      </p:sp>
-      <p:sp>
-        <p:nvSpPr>
-          <p:cNvPr id="9" name="Text 7"/>
-          <p:cNvSpPr/>
-          <p:nvPr/>
-        </p:nvSpPr>
-        <p:spPr>
-          <a:xfrm>
-            <a:off x="692051" y="2343299"/>
-            <a:ext cx="7973389" cy="230981"/>
-          </a:xfrm>
-          <a:prstGeom prst="rect">
-            <a:avLst/>
-          </a:prstGeom>
-          <a:noFill/>
-          <a:ln/>
-        </p:spPr>
-        <p:txBody>
-          <a:bodyPr wrap="square" lIns="0" tIns="0" rIns="0" bIns="0" rtlCol="0" anchor="t"/>
-          <a:lstStyle/>
-          <a:p>
-            <a:pPr algn="l" indent="0" marL="0">
-              <a:lnSpc>
-                <a:spcPts val="1820"/>
-              </a:lnSpc>
-              <a:spcBef>
-                <a:spcPts val="300"/>
-              </a:spcBef>
-              <a:spcAft>
-                <a:spcPts val="300"/>
-              </a:spcAft>
-              <a:buNone/>
-            </a:pPr>
-            <a:r>
-              <a:rPr lang="en-US" sz="1300" dirty="0">
-                <a:solidFill>
-                  <a:srgbClr val="1C2833"/>
-                </a:solidFill>
-                <a:latin typeface="Georgia" pitchFamily="34" charset="0"/>
-                <a:ea typeface="Georgia" pitchFamily="34" charset="-122"/>
-                <a:cs typeface="Georgia" pitchFamily="34" charset="-120"/>
-              </a:rPr>
-              <a:t>— Caraka Saṁhitā, </a:t>
-            </a:r>
-            <a:pPr algn="l" indent="0" marL="0">
-              <a:lnSpc>
-                <a:spcPts val="1820"/>
-              </a:lnSpc>
-              <a:spcBef>
-                <a:spcPts val="300"/>
-              </a:spcBef>
-              <a:spcAft>
-                <a:spcPts val="300"/>
-              </a:spcAft>
-              <a:buNone/>
-            </a:pPr>
-            <a:r>
-              <a:rPr lang="en-US" sz="1300" i="1" dirty="0">
-                <a:solidFill>
-                  <a:srgbClr val="1C2833"/>
-                </a:solidFill>
-                <a:latin typeface="Georgia" pitchFamily="34" charset="0"/>
-                <a:ea typeface="Georgia" pitchFamily="34" charset="-122"/>
-                <a:cs typeface="Georgia" pitchFamily="34" charset="-120"/>
-              </a:rPr>
-              <a:t>Sūtrasthāna</a:t>
-            </a:r>
-            <a:pPr algn="l" indent="0" marL="0">
-              <a:lnSpc>
-                <a:spcPts val="1820"/>
-              </a:lnSpc>
-              <a:spcBef>
-                <a:spcPts val="300"/>
-              </a:spcBef>
-              <a:spcAft>
-                <a:spcPts val="300"/>
-              </a:spcAft>
-              <a:buNone/>
-            </a:pPr>
-            <a:r>
-              <a:rPr lang="en-US" sz="1300" dirty="0">
-                <a:solidFill>
-                  <a:srgbClr val="1C2833"/>
-                </a:solidFill>
-                <a:latin typeface="Georgia" pitchFamily="34" charset="0"/>
-                <a:ea typeface="Georgia" pitchFamily="34" charset="-122"/>
-                <a:cs typeface="Georgia" pitchFamily="34" charset="-120"/>
-              </a:rPr>
-              <a:t> 1.57 (paraphrase)</a:t>
-            </a:r>
-            <a:endParaRPr lang="en-US" sz="1300" dirty="0"/>
-          </a:p>
-        </p:txBody>
-      </p:sp>
-      <p:sp>
-        <p:nvSpPr>
-          <p:cNvPr id="10" name="Text 8"/>
+              <a:rPr lang="en-US" sz="1200" i="1" dirty="0">
+                <a:solidFill>
+                  <a:srgbClr val="1C2833"/>
+                </a:solidFill>
+                <a:latin typeface="Arial" pitchFamily="34" charset="0"/>
+                <a:ea typeface="Arial" pitchFamily="34" charset="-122"/>
+                <a:cs typeface="Arial" pitchFamily="34" charset="-120"/>
+              </a:rPr>
+              <a:t>Each row: What the body does · Need this kind of element · Pair.</a:t>
+            </a:r>
+            <a:endParaRPr lang="en-US" sz="1200" dirty="0"/>
+          </a:p>
+        </p:txBody>
+      </p:sp>
+      <p:sp>
+        <p:nvSpPr>
+          <p:cNvPr id="7" name="Text 5"/>
           <p:cNvSpPr/>
           <p:nvPr/>
         </p:nvSpPr>
@@ -6088,7 +9558,7 @@
                 <a:ea typeface="Georgia" pitchFamily="34" charset="-122"/>
                 <a:cs typeface="Georgia" pitchFamily="34" charset="-120"/>
               </a:rPr>
-              <a:t>Homework</a:t>
+              <a:t>Core (20 min) (cont.)</a:t>
             </a:r>
             <a:endParaRPr lang="en-US" sz="1800" dirty="0"/>
           </a:p>
@@ -6102,8 +9572,8 @@
         </p:nvSpPr>
         <p:spPr>
           <a:xfrm>
-            <a:off x="406301" y="870942"/>
-            <a:ext cx="8498026" cy="426541"/>
+            <a:off x="634901" y="883593"/>
+            <a:ext cx="8102798" cy="1180802"/>
           </a:xfrm>
           <a:prstGeom prst="rect">
             <a:avLst/>
@@ -6115,13 +9585,31 @@
           <a:bodyPr wrap="square" lIns="0" tIns="0" rIns="0" bIns="0" rtlCol="0" anchor="t"/>
           <a:lstStyle/>
           <a:p>
-            <a:pPr algn="l" indent="0" marL="0">
-              <a:lnSpc>
-                <a:spcPts val="1680"/>
-              </a:lnSpc>
-              <a:spcBef>
-                <a:spcPts val="300"/>
-              </a:spcBef>
+            <a:pPr algn="l" marL="342900" indent="-342900">
+              <a:lnSpc>
+                <a:spcPts val="1620"/>
+              </a:lnSpc>
+              <a:spcAft>
+                <a:spcPts val="300"/>
+              </a:spcAft>
+              <a:buSzPct val="100000"/>
+              <a:buChar char="•"/>
+            </a:pPr>
+            <a:r>
+              <a:rPr lang="en-US" sz="1200" b="1" dirty="0">
+                <a:solidFill>
+                  <a:srgbClr val="1C2833"/>
+                </a:solidFill>
+                <a:latin typeface="Arial" pitchFamily="34" charset="0"/>
+                <a:ea typeface="Arial" pitchFamily="34" charset="-122"/>
+                <a:cs typeface="Arial" pitchFamily="34" charset="-120"/>
+              </a:rPr>
+              <a:t>Moves things</a:t>
+            </a:r>
+            <a:pPr algn="l" indent="0" marL="0">
+              <a:lnSpc>
+                <a:spcPts val="1620"/>
+              </a:lnSpc>
               <a:spcAft>
                 <a:spcPts val="300"/>
               </a:spcAft>
@@ -6136,19 +9624,80 @@
                 <a:ea typeface="Arial" pitchFamily="34" charset="-122"/>
                 <a:cs typeface="Arial" pitchFamily="34" charset="-120"/>
               </a:rPr>
-              <a:t>– Look around your home tonight. Find </a:t>
-            </a:r>
-            <a:pPr algn="l" indent="0" marL="0">
-              <a:lnSpc>
-                <a:spcPts val="1680"/>
-              </a:lnSpc>
-              <a:spcBef>
-                <a:spcPts val="300"/>
-              </a:spcBef>
-              <a:spcAft>
-                <a:spcPts val="300"/>
-              </a:spcAft>
-              <a:buNone/>
+              <a:t> — breath, blood, food through gut, signals to muscles — Something that moves freely, in a space · </a:t>
+            </a:r>
+            <a:pPr algn="l" indent="0" marL="0">
+              <a:lnSpc>
+                <a:spcPts val="1620"/>
+              </a:lnSpc>
+              <a:spcAft>
+                <a:spcPts val="300"/>
+              </a:spcAft>
+              <a:buNone/>
+            </a:pPr>
+            <a:r>
+              <a:rPr lang="en-US" sz="1200" i="1" dirty="0">
+                <a:solidFill>
+                  <a:srgbClr val="1C2833"/>
+                </a:solidFill>
+                <a:latin typeface="Arial" pitchFamily="34" charset="0"/>
+                <a:ea typeface="Arial" pitchFamily="34" charset="-122"/>
+                <a:cs typeface="Arial" pitchFamily="34" charset="-120"/>
+              </a:rPr>
+              <a:t>ākāśa</a:t>
+            </a:r>
+            <a:pPr algn="l" indent="0" marL="0">
+              <a:lnSpc>
+                <a:spcPts val="1620"/>
+              </a:lnSpc>
+              <a:spcAft>
+                <a:spcPts val="300"/>
+              </a:spcAft>
+              <a:buNone/>
+            </a:pPr>
+            <a:r>
+              <a:rPr lang="en-US" sz="1200" dirty="0">
+                <a:solidFill>
+                  <a:srgbClr val="1C2833"/>
+                </a:solidFill>
+                <a:latin typeface="Arial" pitchFamily="34" charset="0"/>
+                <a:ea typeface="Arial" pitchFamily="34" charset="-122"/>
+                <a:cs typeface="Arial" pitchFamily="34" charset="-120"/>
+              </a:rPr>
+              <a:t> + </a:t>
+            </a:r>
+            <a:pPr algn="l" indent="0" marL="0">
+              <a:lnSpc>
+                <a:spcPts val="1620"/>
+              </a:lnSpc>
+              <a:spcAft>
+                <a:spcPts val="300"/>
+              </a:spcAft>
+              <a:buNone/>
+            </a:pPr>
+            <a:r>
+              <a:rPr lang="en-US" sz="1200" i="1" dirty="0">
+                <a:solidFill>
+                  <a:srgbClr val="1C2833"/>
+                </a:solidFill>
+                <a:latin typeface="Arial" pitchFamily="34" charset="0"/>
+                <a:ea typeface="Arial" pitchFamily="34" charset="-122"/>
+                <a:cs typeface="Arial" pitchFamily="34" charset="-120"/>
+              </a:rPr>
+              <a:t>vāyu</a:t>
+            </a:r>
+            <a:endParaRPr lang="en-US" sz="1200" dirty="0"/>
+          </a:p>
+          <a:p>
+            <a:pPr algn="l" marL="342900" indent="-342900">
+              <a:lnSpc>
+                <a:spcPts val="1620"/>
+              </a:lnSpc>
+              <a:spcAft>
+                <a:spcPts val="300"/>
+              </a:spcAft>
+              <a:buSzPct val="100000"/>
+              <a:buChar char="•"/>
             </a:pPr>
             <a:r>
               <a:rPr lang="en-US" sz="1200" b="1" dirty="0">
@@ -6159,15 +9708,12 @@
                 <a:ea typeface="Arial" pitchFamily="34" charset="-122"/>
                 <a:cs typeface="Arial" pitchFamily="34" charset="-120"/>
               </a:rPr>
-              <a:t>one example</a:t>
-            </a:r>
-            <a:pPr algn="l" indent="0" marL="0">
-              <a:lnSpc>
-                <a:spcPts val="1680"/>
-              </a:lnSpc>
-              <a:spcBef>
-                <a:spcPts val="300"/>
-              </a:spcBef>
+              <a:t>Transforms things</a:t>
+            </a:r>
+            <a:pPr algn="l" indent="0" marL="0">
+              <a:lnSpc>
+                <a:spcPts val="1620"/>
+              </a:lnSpc>
               <a:spcAft>
                 <a:spcPts val="300"/>
               </a:spcAft>
@@ -6182,15 +9728,12 @@
                 <a:ea typeface="Arial" pitchFamily="34" charset="-122"/>
                 <a:cs typeface="Arial" pitchFamily="34" charset="-120"/>
               </a:rPr>
-              <a:t> for each of the three: something that </a:t>
-            </a:r>
-            <a:pPr algn="l" indent="0" marL="0">
-              <a:lnSpc>
-                <a:spcPts val="1680"/>
-              </a:lnSpc>
-              <a:spcBef>
-                <a:spcPts val="300"/>
-              </a:spcBef>
+              <a:t> — digestion (food → energy), seeing (light → image), body heat — Something that converts, with a medium · </a:t>
+            </a:r>
+            <a:pPr algn="l" indent="0" marL="0">
+              <a:lnSpc>
+                <a:spcPts val="1620"/>
+              </a:lnSpc>
               <a:spcAft>
                 <a:spcPts val="300"/>
               </a:spcAft>
@@ -6205,15 +9748,12 @@
                 <a:ea typeface="Arial" pitchFamily="34" charset="-122"/>
                 <a:cs typeface="Arial" pitchFamily="34" charset="-120"/>
               </a:rPr>
-              <a:t>moves</a:t>
-            </a:r>
-            <a:pPr algn="l" indent="0" marL="0">
-              <a:lnSpc>
-                <a:spcPts val="1680"/>
-              </a:lnSpc>
-              <a:spcBef>
-                <a:spcPts val="300"/>
-              </a:spcBef>
+              <a:t>tejas</a:t>
+            </a:r>
+            <a:pPr algn="l" indent="0" marL="0">
+              <a:lnSpc>
+                <a:spcPts val="1620"/>
+              </a:lnSpc>
               <a:spcAft>
                 <a:spcPts val="300"/>
               </a:spcAft>
@@ -6228,15 +9768,12 @@
                 <a:ea typeface="Arial" pitchFamily="34" charset="-122"/>
                 <a:cs typeface="Arial" pitchFamily="34" charset="-120"/>
               </a:rPr>
-              <a:t>, something that </a:t>
-            </a:r>
-            <a:pPr algn="l" indent="0" marL="0">
-              <a:lnSpc>
-                <a:spcPts val="1680"/>
-              </a:lnSpc>
-              <a:spcBef>
-                <a:spcPts val="300"/>
-              </a:spcBef>
+              <a:t> + </a:t>
+            </a:r>
+            <a:pPr algn="l" indent="0" marL="0">
+              <a:lnSpc>
+                <a:spcPts val="1620"/>
+              </a:lnSpc>
               <a:spcAft>
                 <a:spcPts val="300"/>
               </a:spcAft>
@@ -6251,15 +9788,36 @@
                 <a:ea typeface="Arial" pitchFamily="34" charset="-122"/>
                 <a:cs typeface="Arial" pitchFamily="34" charset="-120"/>
               </a:rPr>
-              <a:t>transforms</a:t>
-            </a:r>
-            <a:pPr algn="l" indent="0" marL="0">
-              <a:lnSpc>
-                <a:spcPts val="1680"/>
-              </a:lnSpc>
-              <a:spcBef>
-                <a:spcPts val="300"/>
-              </a:spcBef>
+              <a:t>ap</a:t>
+            </a:r>
+            <a:endParaRPr lang="en-US" sz="1200" dirty="0"/>
+          </a:p>
+          <a:p>
+            <a:pPr algn="l" marL="342900" indent="-342900">
+              <a:lnSpc>
+                <a:spcPts val="1620"/>
+              </a:lnSpc>
+              <a:spcAft>
+                <a:spcPts val="300"/>
+              </a:spcAft>
+              <a:buSzPct val="100000"/>
+              <a:buChar char="•"/>
+            </a:pPr>
+            <a:r>
+              <a:rPr lang="en-US" sz="1200" b="1" dirty="0">
+                <a:solidFill>
+                  <a:srgbClr val="1C2833"/>
+                </a:solidFill>
+                <a:latin typeface="Arial" pitchFamily="34" charset="0"/>
+                <a:ea typeface="Arial" pitchFamily="34" charset="-122"/>
+                <a:cs typeface="Arial" pitchFamily="34" charset="-120"/>
+              </a:rPr>
+              <a:t>Holds things together</a:t>
+            </a:r>
+            <a:pPr algn="l" indent="0" marL="0">
+              <a:lnSpc>
+                <a:spcPts val="1620"/>
+              </a:lnSpc>
               <a:spcAft>
                 <a:spcPts val="300"/>
               </a:spcAft>
@@ -6274,15 +9832,12 @@
                 <a:ea typeface="Arial" pitchFamily="34" charset="-122"/>
                 <a:cs typeface="Arial" pitchFamily="34" charset="-120"/>
               </a:rPr>
-              <a:t>, something that </a:t>
-            </a:r>
-            <a:pPr algn="l" indent="0" marL="0">
-              <a:lnSpc>
-                <a:spcPts val="1680"/>
-              </a:lnSpc>
-              <a:spcBef>
-                <a:spcPts val="300"/>
-              </a:spcBef>
+              <a:t> — bones, muscle, skin, fluids that lubricate — Something solid and cohesive · </a:t>
+            </a:r>
+            <a:pPr algn="l" indent="0" marL="0">
+              <a:lnSpc>
+                <a:spcPts val="1620"/>
+              </a:lnSpc>
               <a:spcAft>
                 <a:spcPts val="300"/>
               </a:spcAft>
@@ -6297,15 +9852,12 @@
                 <a:ea typeface="Arial" pitchFamily="34" charset="-122"/>
                 <a:cs typeface="Arial" pitchFamily="34" charset="-120"/>
               </a:rPr>
-              <a:t>holds together</a:t>
-            </a:r>
-            <a:pPr algn="l" indent="0" marL="0">
-              <a:lnSpc>
-                <a:spcPts val="1680"/>
-              </a:lnSpc>
-              <a:spcBef>
-                <a:spcPts val="300"/>
-              </a:spcBef>
+              <a:t>ap</a:t>
+            </a:r>
+            <a:pPr algn="l" indent="0" marL="0">
+              <a:lnSpc>
+                <a:spcPts val="1620"/>
+              </a:lnSpc>
               <a:spcAft>
                 <a:spcPts val="300"/>
               </a:spcAft>
@@ -6320,7 +9872,27 @@
                 <a:ea typeface="Arial" pitchFamily="34" charset="-122"/>
                 <a:cs typeface="Arial" pitchFamily="34" charset="-120"/>
               </a:rPr>
-              <a:t>. Write the three examples in your notebook.</a:t>
+              <a:t> + </a:t>
+            </a:r>
+            <a:pPr algn="l" indent="0" marL="0">
+              <a:lnSpc>
+                <a:spcPts val="1620"/>
+              </a:lnSpc>
+              <a:spcAft>
+                <a:spcPts val="300"/>
+              </a:spcAft>
+              <a:buNone/>
+            </a:pPr>
+            <a:r>
+              <a:rPr lang="en-US" sz="1200" i="1" dirty="0">
+                <a:solidFill>
+                  <a:srgbClr val="1C2833"/>
+                </a:solidFill>
+                <a:latin typeface="Arial" pitchFamily="34" charset="0"/>
+                <a:ea typeface="Arial" pitchFamily="34" charset="-122"/>
+                <a:cs typeface="Arial" pitchFamily="34" charset="-120"/>
+              </a:rPr>
+              <a:t>pṛthvī</a:t>
             </a:r>
             <a:endParaRPr lang="en-US" sz="1200" dirty="0"/>
           </a:p>
@@ -6329,6 +9901,52 @@
       <p:sp>
         <p:nvSpPr>
           <p:cNvPr id="5" name="Text 3"/>
+          <p:cNvSpPr/>
+          <p:nvPr/>
+        </p:nvSpPr>
+        <p:spPr>
+          <a:xfrm>
+            <a:off x="634901" y="2165896"/>
+            <a:ext cx="8102798" cy="281880"/>
+          </a:xfrm>
+          <a:prstGeom prst="rect">
+            <a:avLst/>
+          </a:prstGeom>
+          <a:noFill/>
+          <a:ln/>
+        </p:spPr>
+        <p:txBody>
+          <a:bodyPr wrap="square" lIns="0" tIns="0" rIns="0" bIns="0" rtlCol="0" anchor="t"/>
+          <a:lstStyle/>
+          <a:p>
+            <a:pPr algn="l" marL="342900" indent="-342900">
+              <a:lnSpc>
+                <a:spcPts val="1620"/>
+              </a:lnSpc>
+              <a:spcAft>
+                <a:spcPts val="300"/>
+              </a:spcAft>
+              <a:buSzPct val="100000"/>
+              <a:buChar char="•"/>
+            </a:pPr>
+            <a:r>
+              <a:rPr lang="en-US" sz="1200" b="1" dirty="0">
+                <a:solidFill>
+                  <a:srgbClr val="1C2833"/>
+                </a:solidFill>
+                <a:latin typeface="Arial" pitchFamily="34" charset="0"/>
+                <a:ea typeface="Arial" pitchFamily="34" charset="-122"/>
+                <a:cs typeface="Arial" pitchFamily="34" charset="-120"/>
+              </a:rPr>
+              <a:t>Name the three pairs:</a:t>
+            </a:r>
+            <a:endParaRPr lang="en-US" sz="1200" dirty="0"/>
+          </a:p>
+        </p:txBody>
+      </p:sp>
+      <p:sp>
+        <p:nvSpPr>
+          <p:cNvPr id="6" name="Text 4"/>
           <p:cNvSpPr/>
           <p:nvPr/>
         </p:nvSpPr>
